--- a/Boek 2 - Kosten, opbrengsten, elasticiteit en surplus/edities/chat-2026/bronnen/H2/paragrafen/2.2.4 Gemengde opgaven/2.2.4 Gemengde opgaven – presentatie.pptx
+++ b/Boek 2 - Kosten, opbrengsten, elasticiteit en surplus/edities/chat-2026/bronnen/H2/paragrafen/2.2.4 Gemengde opgaven/2.2.4 Gemengde opgaven – presentatie.pptx
@@ -2,35 +2,35 @@
 <file path=ppt/presentation.xml><?xml version="1.0" encoding="utf-8"?>
 <p:presentation xmlns:p="http://schemas.openxmlformats.org/presentationml/2006/main">
   <p:sldMasterIdLst>
-    <p:sldMasterId xmlns:r="http://schemas.openxmlformats.org/officeDocument/2006/relationships" id="2147483648" r:id="R9504eb9e531f43eb"/>
+    <p:sldMasterId xmlns:r="http://schemas.openxmlformats.org/officeDocument/2006/relationships" id="2147483648" r:id="Re5c277d04ec44411"/>
   </p:sldMasterIdLst>
   <p:notesMasterIdLst>
-    <p:notesMasterId xmlns:r="http://schemas.openxmlformats.org/officeDocument/2006/relationships" r:id="R720c4875d2ca4a05"/>
+    <p:notesMasterId xmlns:r="http://schemas.openxmlformats.org/officeDocument/2006/relationships" r:id="R3814d4b5740f4bb3"/>
   </p:notesMasterIdLst>
   <p:sldIdLst>
-    <p:sldId xmlns:r="http://schemas.openxmlformats.org/officeDocument/2006/relationships" id="256" r:id="R11d6c003bf5346f9"/>
-    <p:sldId xmlns:r="http://schemas.openxmlformats.org/officeDocument/2006/relationships" id="257" r:id="R4ea4eba5a8e644d7"/>
-    <p:sldId xmlns:r="http://schemas.openxmlformats.org/officeDocument/2006/relationships" id="258" r:id="Ra29b5d69272742ab"/>
-    <p:sldId xmlns:r="http://schemas.openxmlformats.org/officeDocument/2006/relationships" id="259" r:id="Rc6fc9588c92d4dfb"/>
-    <p:sldId xmlns:r="http://schemas.openxmlformats.org/officeDocument/2006/relationships" id="260" r:id="R45b6b45c5cc440df"/>
-    <p:sldId xmlns:r="http://schemas.openxmlformats.org/officeDocument/2006/relationships" id="261" r:id="R5a8280c1cf424525"/>
-    <p:sldId xmlns:r="http://schemas.openxmlformats.org/officeDocument/2006/relationships" id="262" r:id="Rbfc0cd3372234896"/>
-    <p:sldId xmlns:r="http://schemas.openxmlformats.org/officeDocument/2006/relationships" id="263" r:id="R947a611851594feb"/>
-    <p:sldId xmlns:r="http://schemas.openxmlformats.org/officeDocument/2006/relationships" id="264" r:id="Rafb70fd563ce4226"/>
-    <p:sldId xmlns:r="http://schemas.openxmlformats.org/officeDocument/2006/relationships" id="265" r:id="R48224c87e75c4560"/>
-    <p:sldId xmlns:r="http://schemas.openxmlformats.org/officeDocument/2006/relationships" id="266" r:id="R9fd127ced42846a1"/>
-    <p:sldId xmlns:r="http://schemas.openxmlformats.org/officeDocument/2006/relationships" id="267" r:id="Re90928594e5c4ad0"/>
-    <p:sldId xmlns:r="http://schemas.openxmlformats.org/officeDocument/2006/relationships" id="268" r:id="R8161674269c441b4"/>
-    <p:sldId xmlns:r="http://schemas.openxmlformats.org/officeDocument/2006/relationships" id="269" r:id="R2c99eab05e3b4f50"/>
-    <p:sldId xmlns:r="http://schemas.openxmlformats.org/officeDocument/2006/relationships" id="270" r:id="Rd59d3ea702584a13"/>
-    <p:sldId xmlns:r="http://schemas.openxmlformats.org/officeDocument/2006/relationships" id="271" r:id="R498f1cf1921540e0"/>
-    <p:sldId xmlns:r="http://schemas.openxmlformats.org/officeDocument/2006/relationships" id="272" r:id="Re67ab311a17e4d25"/>
-    <p:sldId xmlns:r="http://schemas.openxmlformats.org/officeDocument/2006/relationships" id="273" r:id="R87aa36ef1ad04db1"/>
-    <p:sldId xmlns:r="http://schemas.openxmlformats.org/officeDocument/2006/relationships" id="274" r:id="R6e51975f99dc4c48"/>
-    <p:sldId xmlns:r="http://schemas.openxmlformats.org/officeDocument/2006/relationships" id="275" r:id="Ra83f3f36997d4704"/>
-    <p:sldId xmlns:r="http://schemas.openxmlformats.org/officeDocument/2006/relationships" id="276" r:id="R50dbe558cad74e36"/>
-    <p:sldId xmlns:r="http://schemas.openxmlformats.org/officeDocument/2006/relationships" id="277" r:id="R9a727ec70bc64575"/>
-    <p:sldId xmlns:r="http://schemas.openxmlformats.org/officeDocument/2006/relationships" id="278" r:id="R85126a01e33d40d7"/>
+    <p:sldId xmlns:r="http://schemas.openxmlformats.org/officeDocument/2006/relationships" id="256" r:id="Rf4786b9533234b23"/>
+    <p:sldId xmlns:r="http://schemas.openxmlformats.org/officeDocument/2006/relationships" id="257" r:id="Ra32cc82753be4566"/>
+    <p:sldId xmlns:r="http://schemas.openxmlformats.org/officeDocument/2006/relationships" id="258" r:id="Rc6c8e1c1202f451a"/>
+    <p:sldId xmlns:r="http://schemas.openxmlformats.org/officeDocument/2006/relationships" id="259" r:id="R3c36be20228c4f11"/>
+    <p:sldId xmlns:r="http://schemas.openxmlformats.org/officeDocument/2006/relationships" id="260" r:id="R9392799818984cf6"/>
+    <p:sldId xmlns:r="http://schemas.openxmlformats.org/officeDocument/2006/relationships" id="261" r:id="R1ab9683db3b348c8"/>
+    <p:sldId xmlns:r="http://schemas.openxmlformats.org/officeDocument/2006/relationships" id="262" r:id="Ra496653b119b4792"/>
+    <p:sldId xmlns:r="http://schemas.openxmlformats.org/officeDocument/2006/relationships" id="263" r:id="Rf7ac3e79b95b4dcd"/>
+    <p:sldId xmlns:r="http://schemas.openxmlformats.org/officeDocument/2006/relationships" id="264" r:id="Rf927b1e65eb14858"/>
+    <p:sldId xmlns:r="http://schemas.openxmlformats.org/officeDocument/2006/relationships" id="265" r:id="Rcf4f537cf93b4048"/>
+    <p:sldId xmlns:r="http://schemas.openxmlformats.org/officeDocument/2006/relationships" id="266" r:id="R5853603c640e4249"/>
+    <p:sldId xmlns:r="http://schemas.openxmlformats.org/officeDocument/2006/relationships" id="267" r:id="Rff92f46f30b44a43"/>
+    <p:sldId xmlns:r="http://schemas.openxmlformats.org/officeDocument/2006/relationships" id="268" r:id="Re663d82ec15342ce"/>
+    <p:sldId xmlns:r="http://schemas.openxmlformats.org/officeDocument/2006/relationships" id="269" r:id="R90f871abfdfe4921"/>
+    <p:sldId xmlns:r="http://schemas.openxmlformats.org/officeDocument/2006/relationships" id="270" r:id="Rf81e60106e994c6b"/>
+    <p:sldId xmlns:r="http://schemas.openxmlformats.org/officeDocument/2006/relationships" id="271" r:id="R917c36e9d2f94f0a"/>
+    <p:sldId xmlns:r="http://schemas.openxmlformats.org/officeDocument/2006/relationships" id="272" r:id="R0e2e5068b6c04939"/>
+    <p:sldId xmlns:r="http://schemas.openxmlformats.org/officeDocument/2006/relationships" id="273" r:id="R54fc72ce52964eb0"/>
+    <p:sldId xmlns:r="http://schemas.openxmlformats.org/officeDocument/2006/relationships" id="274" r:id="Rb0ec5425bb324dd3"/>
+    <p:sldId xmlns:r="http://schemas.openxmlformats.org/officeDocument/2006/relationships" id="275" r:id="R6888e74d57a74f32"/>
+    <p:sldId xmlns:r="http://schemas.openxmlformats.org/officeDocument/2006/relationships" id="276" r:id="Rb8505fd3f95243dd"/>
+    <p:sldId xmlns:r="http://schemas.openxmlformats.org/officeDocument/2006/relationships" id="277" r:id="R925258c328654911"/>
+    <p:sldId xmlns:r="http://schemas.openxmlformats.org/officeDocument/2006/relationships" id="278" r:id="R3586f2822d764b83"/>
   </p:sldIdLst>
   <p:sldSz cx="15240000" cy="8572500"/>
   <p:notesSz cx="6858000" cy="9144000"/>
@@ -477,7 +477,7 @@
           <a:p xmlns:a="http://schemas.openxmlformats.org/drawingml/2006/main">
             <a:r>
               <a:rPr sz="1400"/>
-              <a:t>Uitleg: Laat deze dia staan tijdens startopdracht. Start: opgave 1, gedrukte pagina 64. Er is geen afzonderlijke basis- of begeleide sectie. Werk met gemengde opgaven 1–4 naar doel 5 (StreamPlus, p. 66–67). Die echte doelopgave is gekozen omdat zij bronselectie, Ev, Ei, Ek, maandomzet, een één-factor-scenario en een begrensd advies combineert. Huiswerk: alle opgaven 1–7 maken en nakijken; behoud de labels bonus/denkertje bij 6 en hoofdstukcheck bij 7. De algemene docentenroute noemt 6 en 7 aanvullend; de classroom-afspraak voor gemengde paragrafen wijst alle opgaven toe. Plan zo nodig verdere werktijd; de volledige route is niet als één les getimed.</a:t>
+              <a:t>Uitleg: Laat deze dia staan tijdens startopdracht. Start: opgave 1, gedrukte pagina 65. Er is geen afzonderlijke basis- of begeleide sectie. Werk met gemengde opgaven 1–4 naar doel 5 (StreamPlus, p. 67–68). Die echte doelopgave is gekozen omdat zij bronselectie, Ev, Ei, Ek, maandomzet, een één-factor-scenario en een begrensd advies combineert. Huiswerk: alle opgaven 1–7 maken en nakijken; behoud de labels bonus/denkertje bij 6 en hoofdstukcheck bij 7. De algemene docentenroute noemt 6 en 7 aanvullend; de classroom-afspraak voor gemengde paragrafen wijst alle opgaven toe. Plan zo nodig verdere werktijd; de volledige route is niet als één les getimed.</a:t>
             </a:r>
           </a:p>
           <a:p xmlns:a="http://schemas.openxmlformats.org/drawingml/2006/main">
@@ -513,13 +513,13 @@
           <a:p xmlns:a="http://schemas.openxmlformats.org/drawingml/2006/main">
             <a:r>
               <a:rPr sz="1400"/>
-              <a:t>Bron: Leerlingenboek Boek 2, chat-2026, gedrukte pagina 64–69. https://github.com/meijer1973/4veco-lessen/blob/f2660032cf7e4e3bbab96cf32863d06a38bd74bc/Boek%202%20-%20Kosten,%20opbrengsten,%20elasticiteit%20en%20surplus/edities/chat-2026/boek/Boek_2_Compleet.pdf</a:t>
-            </a:r>
-          </a:p>
-          <a:p xmlns:a="http://schemas.openxmlformats.org/drawingml/2006/main">
-            <a:r>
-              <a:rPr sz="1400"/>
-              <a:t>Antwoordmodel: https://github.com/meijer1973/4veco-lessen/blob/f2660032cf7e4e3bbab96cf32863d06a38bd74bc/Boek%202%20-%20Kosten,%20opbrengsten,%20elasticiteit%20en%20surplus/edities/chat-2026/bronnen/H2/2.2%20Elasticiteit%20%E2%80%93%20antwoorden.md</a:t>
+              <a:t>Bron: Leerlingenboek Boek 2, chat-2026, gedrukte pagina 65–70. https://github.com/meijer1973/4veco-lessen/blob/a8940a7a79e22857a3e306a91fe923c48c63e716/Boek%202%20-%20Kosten,%20opbrengsten,%20elasticiteit%20en%20surplus/edities/chat-2026/boek/Boek_2_Compleet.pdf</a:t>
+            </a:r>
+          </a:p>
+          <a:p xmlns:a="http://schemas.openxmlformats.org/drawingml/2006/main">
+            <a:r>
+              <a:rPr sz="1400"/>
+              <a:t>Antwoordmodel: https://github.com/meijer1973/4veco-lessen/blob/a8940a7a79e22857a3e306a91fe923c48c63e716/Boek%202%20-%20Kosten,%20opbrengsten,%20elasticiteit%20en%20surplus/edities/chat-2026/bronnen/H2/2.2%20Elasticiteit%20%E2%80%93%20antwoorden.md</a:t>
             </a:r>
           </a:p>
         </p:txBody>
@@ -602,7 +602,7 @@
           <a:p xmlns:a="http://schemas.openxmlformats.org/drawingml/2006/main">
             <a:r>
               <a:rPr sz="1400"/>
-              <a:t>Uitleg: Volledige oorspronkelijke vragen 1–3, inclusief puntwaarden. Gebruik de bronnen op pagina 66; in het boek staan ze op de tegenoverliggende pagina. Lees de opdracht zonder al een oplossingsstap te geven. De punten laten de omvang van het antwoord zien.</a:t>
+              <a:t>Uitleg: Volledige oorspronkelijke vragen 1–3, inclusief puntwaarden. Gebruik de bronnen op pagina 67; in het boek staan ze op de vorige pagina. Lees de opdracht zonder al een oplossingsstap te geven. De punten laten de omvang van het antwoord zien.</a:t>
             </a:r>
           </a:p>
           <a:p xmlns:a="http://schemas.openxmlformats.org/drawingml/2006/main">
@@ -638,13 +638,13 @@
           <a:p xmlns:a="http://schemas.openxmlformats.org/drawingml/2006/main">
             <a:r>
               <a:rPr sz="1400"/>
-              <a:t>Bron: Leerlingenboek Boek 2, chat-2026, gedrukte pagina 67. https://github.com/meijer1973/4veco-lessen/blob/f2660032cf7e4e3bbab96cf32863d06a38bd74bc/Boek%202%20-%20Kosten,%20opbrengsten,%20elasticiteit%20en%20surplus/edities/chat-2026/boek/Boek_2_Compleet.pdf</a:t>
-            </a:r>
-          </a:p>
-          <a:p xmlns:a="http://schemas.openxmlformats.org/drawingml/2006/main">
-            <a:r>
-              <a:rPr sz="1400"/>
-              <a:t>Antwoordmodel: https://github.com/meijer1973/4veco-lessen/blob/f2660032cf7e4e3bbab96cf32863d06a38bd74bc/Boek%202%20-%20Kosten,%20opbrengsten,%20elasticiteit%20en%20surplus/edities/chat-2026/bronnen/H2/2.2%20Elasticiteit%20%E2%80%93%20antwoorden.md</a:t>
+              <a:t>Bron: Leerlingenboek Boek 2, chat-2026, gedrukte pagina 68. https://github.com/meijer1973/4veco-lessen/blob/a8940a7a79e22857a3e306a91fe923c48c63e716/Boek%202%20-%20Kosten,%20opbrengsten,%20elasticiteit%20en%20surplus/edities/chat-2026/boek/Boek_2_Compleet.pdf</a:t>
+            </a:r>
+          </a:p>
+          <a:p xmlns:a="http://schemas.openxmlformats.org/drawingml/2006/main">
+            <a:r>
+              <a:rPr sz="1400"/>
+              <a:t>Antwoordmodel: https://github.com/meijer1973/4veco-lessen/blob/a8940a7a79e22857a3e306a91fe923c48c63e716/Boek%202%20-%20Kosten,%20opbrengsten,%20elasticiteit%20en%20surplus/edities/chat-2026/bronnen/H2/2.2%20Elasticiteit%20%E2%80%93%20antwoorden.md</a:t>
             </a:r>
           </a:p>
         </p:txBody>
@@ -727,7 +727,7 @@
           <a:p xmlns:a="http://schemas.openxmlformats.org/drawingml/2006/main">
             <a:r>
               <a:rPr sz="1400"/>
-              <a:t>Uitleg: Volledige oorspronkelijke vragen 4–5, inclusief puntwaarden. Gebruik de bronnen op pagina 66; in het boek staan ze op de tegenoverliggende pagina. Lees de opdracht zonder al een oplossingsstap te geven. De punten laten de omvang van het antwoord zien.</a:t>
+              <a:t>Uitleg: Volledige oorspronkelijke vragen 4–5, inclusief puntwaarden. Gebruik de bronnen op pagina 67; in het boek staan ze op de vorige pagina. Lees de opdracht zonder al een oplossingsstap te geven. De punten laten de omvang van het antwoord zien.</a:t>
             </a:r>
           </a:p>
           <a:p xmlns:a="http://schemas.openxmlformats.org/drawingml/2006/main">
@@ -763,13 +763,13 @@
           <a:p xmlns:a="http://schemas.openxmlformats.org/drawingml/2006/main">
             <a:r>
               <a:rPr sz="1400"/>
-              <a:t>Bron: Leerlingenboek Boek 2, chat-2026, gedrukte pagina 67. https://github.com/meijer1973/4veco-lessen/blob/f2660032cf7e4e3bbab96cf32863d06a38bd74bc/Boek%202%20-%20Kosten,%20opbrengsten,%20elasticiteit%20en%20surplus/edities/chat-2026/boek/Boek_2_Compleet.pdf</a:t>
-            </a:r>
-          </a:p>
-          <a:p xmlns:a="http://schemas.openxmlformats.org/drawingml/2006/main">
-            <a:r>
-              <a:rPr sz="1400"/>
-              <a:t>Antwoordmodel: https://github.com/meijer1973/4veco-lessen/blob/f2660032cf7e4e3bbab96cf32863d06a38bd74bc/Boek%202%20-%20Kosten,%20opbrengsten,%20elasticiteit%20en%20surplus/edities/chat-2026/bronnen/H2/2.2%20Elasticiteit%20%E2%80%93%20antwoorden.md</a:t>
+              <a:t>Bron: Leerlingenboek Boek 2, chat-2026, gedrukte pagina 68. https://github.com/meijer1973/4veco-lessen/blob/a8940a7a79e22857a3e306a91fe923c48c63e716/Boek%202%20-%20Kosten,%20opbrengsten,%20elasticiteit%20en%20surplus/edities/chat-2026/boek/Boek_2_Compleet.pdf</a:t>
+            </a:r>
+          </a:p>
+          <a:p xmlns:a="http://schemas.openxmlformats.org/drawingml/2006/main">
+            <a:r>
+              <a:rPr sz="1400"/>
+              <a:t>Antwoordmodel: https://github.com/meijer1973/4veco-lessen/blob/a8940a7a79e22857a3e306a91fe923c48c63e716/Boek%202%20-%20Kosten,%20opbrengsten,%20elasticiteit%20en%20surplus/edities/chat-2026/bronnen/H2/2.2%20Elasticiteit%20%E2%80%93%20antwoorden.md</a:t>
             </a:r>
           </a:p>
         </p:txBody>
@@ -852,7 +852,7 @@
           <a:p xmlns:a="http://schemas.openxmlformats.org/drawingml/2006/main">
             <a:r>
               <a:rPr sz="1400"/>
-              <a:t>Uitleg: Volledige oorspronkelijke vraag 6, inclusief puntwaarden. Gebruik de bronnen op pagina 66; in het boek staan ze op de tegenoverliggende pagina. Lees de opdracht zonder al een oplossingsstap te geven. De punten laten de omvang van het antwoord zien.</a:t>
+              <a:t>Uitleg: Volledige oorspronkelijke vraag 6, inclusief puntwaarden. Gebruik de bronnen op pagina 67; in het boek staan ze op de vorige pagina. Lees de opdracht zonder al een oplossingsstap te geven. De punten laten de omvang van het antwoord zien.</a:t>
             </a:r>
           </a:p>
           <a:p xmlns:a="http://schemas.openxmlformats.org/drawingml/2006/main">
@@ -888,13 +888,13 @@
           <a:p xmlns:a="http://schemas.openxmlformats.org/drawingml/2006/main">
             <a:r>
               <a:rPr sz="1400"/>
-              <a:t>Bron: Leerlingenboek Boek 2, chat-2026, gedrukte pagina 67. https://github.com/meijer1973/4veco-lessen/blob/f2660032cf7e4e3bbab96cf32863d06a38bd74bc/Boek%202%20-%20Kosten,%20opbrengsten,%20elasticiteit%20en%20surplus/edities/chat-2026/boek/Boek_2_Compleet.pdf</a:t>
-            </a:r>
-          </a:p>
-          <a:p xmlns:a="http://schemas.openxmlformats.org/drawingml/2006/main">
-            <a:r>
-              <a:rPr sz="1400"/>
-              <a:t>Antwoordmodel: https://github.com/meijer1973/4veco-lessen/blob/f2660032cf7e4e3bbab96cf32863d06a38bd74bc/Boek%202%20-%20Kosten,%20opbrengsten,%20elasticiteit%20en%20surplus/edities/chat-2026/bronnen/H2/2.2%20Elasticiteit%20%E2%80%93%20antwoorden.md</a:t>
+              <a:t>Bron: Leerlingenboek Boek 2, chat-2026, gedrukte pagina 68. https://github.com/meijer1973/4veco-lessen/blob/a8940a7a79e22857a3e306a91fe923c48c63e716/Boek%202%20-%20Kosten,%20opbrengsten,%20elasticiteit%20en%20surplus/edities/chat-2026/boek/Boek_2_Compleet.pdf</a:t>
+            </a:r>
+          </a:p>
+          <a:p xmlns:a="http://schemas.openxmlformats.org/drawingml/2006/main">
+            <a:r>
+              <a:rPr sz="1400"/>
+              <a:t>Antwoordmodel: https://github.com/meijer1973/4veco-lessen/blob/a8940a7a79e22857a3e306a91fe923c48c63e716/Boek%202%20-%20Kosten,%20opbrengsten,%20elasticiteit%20en%20surplus/edities/chat-2026/bronnen/H2/2.2%20Elasticiteit%20%E2%80%93%20antwoorden.md</a:t>
             </a:r>
           </a:p>
         </p:txBody>
@@ -1013,13 +1013,13 @@
           <a:p xmlns:a="http://schemas.openxmlformats.org/drawingml/2006/main">
             <a:r>
               <a:rPr sz="1400"/>
-              <a:t>Bron: Leerlingenboek Boek 2, chat-2026, gedrukte pagina 66–67. https://github.com/meijer1973/4veco-lessen/blob/f2660032cf7e4e3bbab96cf32863d06a38bd74bc/Boek%202%20-%20Kosten,%20opbrengsten,%20elasticiteit%20en%20surplus/edities/chat-2026/boek/Boek_2_Compleet.pdf</a:t>
-            </a:r>
-          </a:p>
-          <a:p xmlns:a="http://schemas.openxmlformats.org/drawingml/2006/main">
-            <a:r>
-              <a:rPr sz="1400"/>
-              <a:t>Antwoordmodel: https://github.com/meijer1973/4veco-lessen/blob/f2660032cf7e4e3bbab96cf32863d06a38bd74bc/Boek%202%20-%20Kosten,%20opbrengsten,%20elasticiteit%20en%20surplus/edities/chat-2026/bronnen/H2/2.2%20Elasticiteit%20%E2%80%93%20antwoorden.md</a:t>
+              <a:t>Bron: Leerlingenboek Boek 2, chat-2026, gedrukte pagina 67–68. https://github.com/meijer1973/4veco-lessen/blob/a8940a7a79e22857a3e306a91fe923c48c63e716/Boek%202%20-%20Kosten,%20opbrengsten,%20elasticiteit%20en%20surplus/edities/chat-2026/boek/Boek_2_Compleet.pdf</a:t>
+            </a:r>
+          </a:p>
+          <a:p xmlns:a="http://schemas.openxmlformats.org/drawingml/2006/main">
+            <a:r>
+              <a:rPr sz="1400"/>
+              <a:t>Antwoordmodel: https://github.com/meijer1973/4veco-lessen/blob/a8940a7a79e22857a3e306a91fe923c48c63e716/Boek%202%20-%20Kosten,%20opbrengsten,%20elasticiteit%20en%20surplus/edities/chat-2026/bronnen/H2/2.2%20Elasticiteit%20%E2%80%93%20antwoorden.md</a:t>
             </a:r>
           </a:p>
         </p:txBody>
@@ -1138,13 +1138,13 @@
           <a:p xmlns:a="http://schemas.openxmlformats.org/drawingml/2006/main">
             <a:r>
               <a:rPr sz="1400"/>
-              <a:t>Bron: Leerlingenboek Boek 2, chat-2026, gedrukte pagina 66–67. https://github.com/meijer1973/4veco-lessen/blob/f2660032cf7e4e3bbab96cf32863d06a38bd74bc/Boek%202%20-%20Kosten,%20opbrengsten,%20elasticiteit%20en%20surplus/edities/chat-2026/boek/Boek_2_Compleet.pdf</a:t>
-            </a:r>
-          </a:p>
-          <a:p xmlns:a="http://schemas.openxmlformats.org/drawingml/2006/main">
-            <a:r>
-              <a:rPr sz="1400"/>
-              <a:t>Antwoordmodel: https://github.com/meijer1973/4veco-lessen/blob/f2660032cf7e4e3bbab96cf32863d06a38bd74bc/Boek%202%20-%20Kosten,%20opbrengsten,%20elasticiteit%20en%20surplus/edities/chat-2026/bronnen/H2/2.2%20Elasticiteit%20%E2%80%93%20antwoorden.md</a:t>
+              <a:t>Bron: Leerlingenboek Boek 2, chat-2026, gedrukte pagina 67–68. https://github.com/meijer1973/4veco-lessen/blob/a8940a7a79e22857a3e306a91fe923c48c63e716/Boek%202%20-%20Kosten,%20opbrengsten,%20elasticiteit%20en%20surplus/edities/chat-2026/boek/Boek_2_Compleet.pdf</a:t>
+            </a:r>
+          </a:p>
+          <a:p xmlns:a="http://schemas.openxmlformats.org/drawingml/2006/main">
+            <a:r>
+              <a:rPr sz="1400"/>
+              <a:t>Antwoordmodel: https://github.com/meijer1973/4veco-lessen/blob/a8940a7a79e22857a3e306a91fe923c48c63e716/Boek%202%20-%20Kosten,%20opbrengsten,%20elasticiteit%20en%20surplus/edities/chat-2026/bronnen/H2/2.2%20Elasticiteit%20%E2%80%93%20antwoorden.md</a:t>
             </a:r>
           </a:p>
         </p:txBody>
@@ -1263,13 +1263,13 @@
           <a:p xmlns:a="http://schemas.openxmlformats.org/drawingml/2006/main">
             <a:r>
               <a:rPr sz="1400"/>
-              <a:t>Bron: Leerlingenboek Boek 2, chat-2026, gedrukte pagina 66–67. https://github.com/meijer1973/4veco-lessen/blob/f2660032cf7e4e3bbab96cf32863d06a38bd74bc/Boek%202%20-%20Kosten,%20opbrengsten,%20elasticiteit%20en%20surplus/edities/chat-2026/boek/Boek_2_Compleet.pdf</a:t>
-            </a:r>
-          </a:p>
-          <a:p xmlns:a="http://schemas.openxmlformats.org/drawingml/2006/main">
-            <a:r>
-              <a:rPr sz="1400"/>
-              <a:t>Antwoordmodel: https://github.com/meijer1973/4veco-lessen/blob/f2660032cf7e4e3bbab96cf32863d06a38bd74bc/Boek%202%20-%20Kosten,%20opbrengsten,%20elasticiteit%20en%20surplus/edities/chat-2026/bronnen/H2/2.2%20Elasticiteit%20%E2%80%93%20antwoorden.md</a:t>
+              <a:t>Bron: Leerlingenboek Boek 2, chat-2026, gedrukte pagina 67–68. https://github.com/meijer1973/4veco-lessen/blob/a8940a7a79e22857a3e306a91fe923c48c63e716/Boek%202%20-%20Kosten,%20opbrengsten,%20elasticiteit%20en%20surplus/edities/chat-2026/boek/Boek_2_Compleet.pdf</a:t>
+            </a:r>
+          </a:p>
+          <a:p xmlns:a="http://schemas.openxmlformats.org/drawingml/2006/main">
+            <a:r>
+              <a:rPr sz="1400"/>
+              <a:t>Antwoordmodel: https://github.com/meijer1973/4veco-lessen/blob/a8940a7a79e22857a3e306a91fe923c48c63e716/Boek%202%20-%20Kosten,%20opbrengsten,%20elasticiteit%20en%20surplus/edities/chat-2026/bronnen/H2/2.2%20Elasticiteit%20%E2%80%93%20antwoorden.md</a:t>
             </a:r>
           </a:p>
         </p:txBody>
@@ -1388,13 +1388,13 @@
           <a:p xmlns:a="http://schemas.openxmlformats.org/drawingml/2006/main">
             <a:r>
               <a:rPr sz="1400"/>
-              <a:t>Bron: Leerlingenboek Boek 2, chat-2026, gedrukte pagina 66–67. https://github.com/meijer1973/4veco-lessen/blob/f2660032cf7e4e3bbab96cf32863d06a38bd74bc/Boek%202%20-%20Kosten,%20opbrengsten,%20elasticiteit%20en%20surplus/edities/chat-2026/boek/Boek_2_Compleet.pdf</a:t>
-            </a:r>
-          </a:p>
-          <a:p xmlns:a="http://schemas.openxmlformats.org/drawingml/2006/main">
-            <a:r>
-              <a:rPr sz="1400"/>
-              <a:t>Antwoordmodel: https://github.com/meijer1973/4veco-lessen/blob/f2660032cf7e4e3bbab96cf32863d06a38bd74bc/Boek%202%20-%20Kosten,%20opbrengsten,%20elasticiteit%20en%20surplus/edities/chat-2026/bronnen/H2/2.2%20Elasticiteit%20%E2%80%93%20antwoorden.md</a:t>
+              <a:t>Bron: Leerlingenboek Boek 2, chat-2026, gedrukte pagina 67–68. https://github.com/meijer1973/4veco-lessen/blob/a8940a7a79e22857a3e306a91fe923c48c63e716/Boek%202%20-%20Kosten,%20opbrengsten,%20elasticiteit%20en%20surplus/edities/chat-2026/boek/Boek_2_Compleet.pdf</a:t>
+            </a:r>
+          </a:p>
+          <a:p xmlns:a="http://schemas.openxmlformats.org/drawingml/2006/main">
+            <a:r>
+              <a:rPr sz="1400"/>
+              <a:t>Antwoordmodel: https://github.com/meijer1973/4veco-lessen/blob/a8940a7a79e22857a3e306a91fe923c48c63e716/Boek%202%20-%20Kosten,%20opbrengsten,%20elasticiteit%20en%20surplus/edities/chat-2026/bronnen/H2/2.2%20Elasticiteit%20%E2%80%93%20antwoorden.md</a:t>
             </a:r>
           </a:p>
         </p:txBody>
@@ -1513,13 +1513,13 @@
           <a:p xmlns:a="http://schemas.openxmlformats.org/drawingml/2006/main">
             <a:r>
               <a:rPr sz="1400"/>
-              <a:t>Bron: Leerlingenboek Boek 2, chat-2026, gedrukte pagina 66–67. https://github.com/meijer1973/4veco-lessen/blob/f2660032cf7e4e3bbab96cf32863d06a38bd74bc/Boek%202%20-%20Kosten,%20opbrengsten,%20elasticiteit%20en%20surplus/edities/chat-2026/boek/Boek_2_Compleet.pdf</a:t>
-            </a:r>
-          </a:p>
-          <a:p xmlns:a="http://schemas.openxmlformats.org/drawingml/2006/main">
-            <a:r>
-              <a:rPr sz="1400"/>
-              <a:t>Antwoordmodel: https://github.com/meijer1973/4veco-lessen/blob/f2660032cf7e4e3bbab96cf32863d06a38bd74bc/Boek%202%20-%20Kosten,%20opbrengsten,%20elasticiteit%20en%20surplus/edities/chat-2026/bronnen/H2/2.2%20Elasticiteit%20%E2%80%93%20antwoorden.md</a:t>
+              <a:t>Bron: Leerlingenboek Boek 2, chat-2026, gedrukte pagina 67–68. https://github.com/meijer1973/4veco-lessen/blob/a8940a7a79e22857a3e306a91fe923c48c63e716/Boek%202%20-%20Kosten,%20opbrengsten,%20elasticiteit%20en%20surplus/edities/chat-2026/boek/Boek_2_Compleet.pdf</a:t>
+            </a:r>
+          </a:p>
+          <a:p xmlns:a="http://schemas.openxmlformats.org/drawingml/2006/main">
+            <a:r>
+              <a:rPr sz="1400"/>
+              <a:t>Antwoordmodel: https://github.com/meijer1973/4veco-lessen/blob/a8940a7a79e22857a3e306a91fe923c48c63e716/Boek%202%20-%20Kosten,%20opbrengsten,%20elasticiteit%20en%20surplus/edities/chat-2026/bronnen/H2/2.2%20Elasticiteit%20%E2%80%93%20antwoorden.md</a:t>
             </a:r>
           </a:p>
         </p:txBody>
@@ -1638,13 +1638,13 @@
           <a:p xmlns:a="http://schemas.openxmlformats.org/drawingml/2006/main">
             <a:r>
               <a:rPr sz="1400"/>
-              <a:t>Bron: Leerlingenboek Boek 2, chat-2026, gedrukte pagina 66–67. https://github.com/meijer1973/4veco-lessen/blob/f2660032cf7e4e3bbab96cf32863d06a38bd74bc/Boek%202%20-%20Kosten,%20opbrengsten,%20elasticiteit%20en%20surplus/edities/chat-2026/boek/Boek_2_Compleet.pdf</a:t>
-            </a:r>
-          </a:p>
-          <a:p xmlns:a="http://schemas.openxmlformats.org/drawingml/2006/main">
-            <a:r>
-              <a:rPr sz="1400"/>
-              <a:t>Antwoordmodel: https://github.com/meijer1973/4veco-lessen/blob/f2660032cf7e4e3bbab96cf32863d06a38bd74bc/Boek%202%20-%20Kosten,%20opbrengsten,%20elasticiteit%20en%20surplus/edities/chat-2026/bronnen/H2/2.2%20Elasticiteit%20%E2%80%93%20antwoorden.md</a:t>
+              <a:t>Bron: Leerlingenboek Boek 2, chat-2026, gedrukte pagina 67–68. https://github.com/meijer1973/4veco-lessen/blob/a8940a7a79e22857a3e306a91fe923c48c63e716/Boek%202%20-%20Kosten,%20opbrengsten,%20elasticiteit%20en%20surplus/edities/chat-2026/boek/Boek_2_Compleet.pdf</a:t>
+            </a:r>
+          </a:p>
+          <a:p xmlns:a="http://schemas.openxmlformats.org/drawingml/2006/main">
+            <a:r>
+              <a:rPr sz="1400"/>
+              <a:t>Antwoordmodel: https://github.com/meijer1973/4veco-lessen/blob/a8940a7a79e22857a3e306a91fe923c48c63e716/Boek%202%20-%20Kosten,%20opbrengsten,%20elasticiteit%20en%20surplus/edities/chat-2026/bronnen/H2/2.2%20Elasticiteit%20%E2%80%93%20antwoorden.md</a:t>
             </a:r>
           </a:p>
         </p:txBody>
@@ -1763,13 +1763,13 @@
           <a:p xmlns:a="http://schemas.openxmlformats.org/drawingml/2006/main">
             <a:r>
               <a:rPr sz="1400"/>
-              <a:t>Bron: Leerlingenboek Boek 2, chat-2026, gedrukte pagina 66–67. https://github.com/meijer1973/4veco-lessen/blob/f2660032cf7e4e3bbab96cf32863d06a38bd74bc/Boek%202%20-%20Kosten,%20opbrengsten,%20elasticiteit%20en%20surplus/edities/chat-2026/boek/Boek_2_Compleet.pdf</a:t>
-            </a:r>
-          </a:p>
-          <a:p xmlns:a="http://schemas.openxmlformats.org/drawingml/2006/main">
-            <a:r>
-              <a:rPr sz="1400"/>
-              <a:t>Antwoordmodel: https://github.com/meijer1973/4veco-lessen/blob/f2660032cf7e4e3bbab96cf32863d06a38bd74bc/Boek%202%20-%20Kosten,%20opbrengsten,%20elasticiteit%20en%20surplus/edities/chat-2026/bronnen/H2/2.2%20Elasticiteit%20%E2%80%93%20antwoorden.md</a:t>
+              <a:t>Bron: Leerlingenboek Boek 2, chat-2026, gedrukte pagina 67–68. https://github.com/meijer1973/4veco-lessen/blob/a8940a7a79e22857a3e306a91fe923c48c63e716/Boek%202%20-%20Kosten,%20opbrengsten,%20elasticiteit%20en%20surplus/edities/chat-2026/boek/Boek_2_Compleet.pdf</a:t>
+            </a:r>
+          </a:p>
+          <a:p xmlns:a="http://schemas.openxmlformats.org/drawingml/2006/main">
+            <a:r>
+              <a:rPr sz="1400"/>
+              <a:t>Antwoordmodel: https://github.com/meijer1973/4veco-lessen/blob/a8940a7a79e22857a3e306a91fe923c48c63e716/Boek%202%20-%20Kosten,%20opbrengsten,%20elasticiteit%20en%20surplus/edities/chat-2026/bronnen/H2/2.2%20Elasticiteit%20%E2%80%93%20antwoorden.md</a:t>
             </a:r>
           </a:p>
         </p:txBody>
@@ -1888,7 +1888,7 @@
           <a:p xmlns:a="http://schemas.openxmlformats.org/drawingml/2006/main">
             <a:r>
               <a:rPr sz="1400"/>
-              <a:t>Bron: Zelfgemaakt uitlegvoorbeeld Klimwand; context, gegevens en uitkomsten zijn niet uit het boek. Methoden: leerlingenboek Boek 2, chat-2026, gedrukte pagina's 36–63. https://github.com/meijer1973/4veco-lessen/blob/f2660032cf7e4e3bbab96cf32863d06a38bd74bc/Boek%202%20-%20Kosten,%20opbrengsten,%20elasticiteit%20en%20surplus/edities/chat-2026/boek/Boek_2_Compleet.pdf</a:t>
+              <a:t>Bron: Zelfgemaakt uitlegvoorbeeld Klimwand; context, gegevens en uitkomsten zijn niet uit het boek. Methoden: leerlingenboek Boek 2, chat-2026, gedrukte pagina's 37–64. https://github.com/meijer1973/4veco-lessen/blob/a8940a7a79e22857a3e306a91fe923c48c63e716/Boek%202%20-%20Kosten,%20opbrengsten,%20elasticiteit%20en%20surplus/edities/chat-2026/boek/Boek_2_Compleet.pdf</a:t>
             </a:r>
           </a:p>
         </p:txBody>
@@ -2007,13 +2007,13 @@
           <a:p xmlns:a="http://schemas.openxmlformats.org/drawingml/2006/main">
             <a:r>
               <a:rPr sz="1400"/>
-              <a:t>Bron: Leerlingenboek Boek 2, chat-2026, gedrukte pagina 66–67. https://github.com/meijer1973/4veco-lessen/blob/f2660032cf7e4e3bbab96cf32863d06a38bd74bc/Boek%202%20-%20Kosten,%20opbrengsten,%20elasticiteit%20en%20surplus/edities/chat-2026/boek/Boek_2_Compleet.pdf</a:t>
-            </a:r>
-          </a:p>
-          <a:p xmlns:a="http://schemas.openxmlformats.org/drawingml/2006/main">
-            <a:r>
-              <a:rPr sz="1400"/>
-              <a:t>Antwoordmodel: https://github.com/meijer1973/4veco-lessen/blob/f2660032cf7e4e3bbab96cf32863d06a38bd74bc/Boek%202%20-%20Kosten,%20opbrengsten,%20elasticiteit%20en%20surplus/edities/chat-2026/bronnen/H2/2.2%20Elasticiteit%20%E2%80%93%20antwoorden.md</a:t>
+              <a:t>Bron: Leerlingenboek Boek 2, chat-2026, gedrukte pagina 67–68. https://github.com/meijer1973/4veco-lessen/blob/a8940a7a79e22857a3e306a91fe923c48c63e716/Boek%202%20-%20Kosten,%20opbrengsten,%20elasticiteit%20en%20surplus/edities/chat-2026/boek/Boek_2_Compleet.pdf</a:t>
+            </a:r>
+          </a:p>
+          <a:p xmlns:a="http://schemas.openxmlformats.org/drawingml/2006/main">
+            <a:r>
+              <a:rPr sz="1400"/>
+              <a:t>Antwoordmodel: https://github.com/meijer1973/4veco-lessen/blob/a8940a7a79e22857a3e306a91fe923c48c63e716/Boek%202%20-%20Kosten,%20opbrengsten,%20elasticiteit%20en%20surplus/edities/chat-2026/bronnen/H2/2.2%20Elasticiteit%20%E2%80%93%20antwoorden.md</a:t>
             </a:r>
           </a:p>
         </p:txBody>
@@ -2132,13 +2132,13 @@
           <a:p xmlns:a="http://schemas.openxmlformats.org/drawingml/2006/main">
             <a:r>
               <a:rPr sz="1400"/>
-              <a:t>Bron: Leerlingenboek Boek 2, chat-2026, gedrukte pagina 66–67. https://github.com/meijer1973/4veco-lessen/blob/f2660032cf7e4e3bbab96cf32863d06a38bd74bc/Boek%202%20-%20Kosten,%20opbrengsten,%20elasticiteit%20en%20surplus/edities/chat-2026/boek/Boek_2_Compleet.pdf</a:t>
-            </a:r>
-          </a:p>
-          <a:p xmlns:a="http://schemas.openxmlformats.org/drawingml/2006/main">
-            <a:r>
-              <a:rPr sz="1400"/>
-              <a:t>Antwoordmodel: https://github.com/meijer1973/4veco-lessen/blob/f2660032cf7e4e3bbab96cf32863d06a38bd74bc/Boek%202%20-%20Kosten,%20opbrengsten,%20elasticiteit%20en%20surplus/edities/chat-2026/bronnen/H2/2.2%20Elasticiteit%20%E2%80%93%20antwoorden.md</a:t>
+              <a:t>Bron: Leerlingenboek Boek 2, chat-2026, gedrukte pagina 67–68. https://github.com/meijer1973/4veco-lessen/blob/a8940a7a79e22857a3e306a91fe923c48c63e716/Boek%202%20-%20Kosten,%20opbrengsten,%20elasticiteit%20en%20surplus/edities/chat-2026/boek/Boek_2_Compleet.pdf</a:t>
+            </a:r>
+          </a:p>
+          <a:p xmlns:a="http://schemas.openxmlformats.org/drawingml/2006/main">
+            <a:r>
+              <a:rPr sz="1400"/>
+              <a:t>Antwoordmodel: https://github.com/meijer1973/4veco-lessen/blob/a8940a7a79e22857a3e306a91fe923c48c63e716/Boek%202%20-%20Kosten,%20opbrengsten,%20elasticiteit%20en%20surplus/edities/chat-2026/bronnen/H2/2.2%20Elasticiteit%20%E2%80%93%20antwoorden.md</a:t>
             </a:r>
           </a:p>
         </p:txBody>
@@ -2257,13 +2257,13 @@
           <a:p xmlns:a="http://schemas.openxmlformats.org/drawingml/2006/main">
             <a:r>
               <a:rPr sz="1400"/>
-              <a:t>Bron: Leerlingenboek Boek 2, chat-2026, gedrukte pagina 67–69. https://github.com/meijer1973/4veco-lessen/blob/f2660032cf7e4e3bbab96cf32863d06a38bd74bc/Boek%202%20-%20Kosten,%20opbrengsten,%20elasticiteit%20en%20surplus/edities/chat-2026/boek/Boek_2_Compleet.pdf</a:t>
-            </a:r>
-          </a:p>
-          <a:p xmlns:a="http://schemas.openxmlformats.org/drawingml/2006/main">
-            <a:r>
-              <a:rPr sz="1400"/>
-              <a:t>Antwoordmodel: https://github.com/meijer1973/4veco-lessen/blob/f2660032cf7e4e3bbab96cf32863d06a38bd74bc/Boek%202%20-%20Kosten,%20opbrengsten,%20elasticiteit%20en%20surplus/edities/chat-2026/bronnen/H2/2.2%20Elasticiteit%20%E2%80%93%20antwoorden.md</a:t>
+              <a:t>Bron: Leerlingenboek Boek 2, chat-2026, gedrukte pagina 68–70. https://github.com/meijer1973/4veco-lessen/blob/a8940a7a79e22857a3e306a91fe923c48c63e716/Boek%202%20-%20Kosten,%20opbrengsten,%20elasticiteit%20en%20surplus/edities/chat-2026/boek/Boek_2_Compleet.pdf</a:t>
+            </a:r>
+          </a:p>
+          <a:p xmlns:a="http://schemas.openxmlformats.org/drawingml/2006/main">
+            <a:r>
+              <a:rPr sz="1400"/>
+              <a:t>Antwoordmodel: https://github.com/meijer1973/4veco-lessen/blob/a8940a7a79e22857a3e306a91fe923c48c63e716/Boek%202%20-%20Kosten,%20opbrengsten,%20elasticiteit%20en%20surplus/edities/chat-2026/bronnen/H2/2.2%20Elasticiteit%20%E2%80%93%20antwoorden.md</a:t>
             </a:r>
           </a:p>
         </p:txBody>
@@ -2346,7 +2346,7 @@
           <a:p xmlns:a="http://schemas.openxmlformats.org/drawingml/2006/main">
             <a:r>
               <a:rPr sz="1400"/>
-              <a:t>Uitleg: Laat deze dia staan tijdens afsluiting / huiswerk. Start: opgave 1, gedrukte pagina 64. Er is geen afzonderlijke basis- of begeleide sectie. Werk met gemengde opgaven 1–4 naar doel 5 (StreamPlus, p. 66–67). Die echte doelopgave is gekozen omdat zij bronselectie, Ev, Ei, Ek, maandomzet, een één-factor-scenario en een begrensd advies combineert. Huiswerk: alle opgaven 1–7 maken en nakijken; behoud de labels bonus/denkertje bij 6 en hoofdstukcheck bij 7. De algemene docentenroute noemt 6 en 7 aanvullend; de classroom-afspraak voor gemengde paragrafen wijst alle opgaven toe. Plan zo nodig verdere werktijd; de volledige route is niet als één les getimed.</a:t>
+              <a:t>Uitleg: Laat deze dia staan tijdens afsluiting / huiswerk. Start: opgave 1, gedrukte pagina 65. Er is geen afzonderlijke basis- of begeleide sectie. Werk met gemengde opgaven 1–4 naar doel 5 (StreamPlus, p. 67–68). Die echte doelopgave is gekozen omdat zij bronselectie, Ev, Ei, Ek, maandomzet, een één-factor-scenario en een begrensd advies combineert. Huiswerk: alle opgaven 1–7 maken en nakijken; behoud de labels bonus/denkertje bij 6 en hoofdstukcheck bij 7. De algemene docentenroute noemt 6 en 7 aanvullend; de classroom-afspraak voor gemengde paragrafen wijst alle opgaven toe. Plan zo nodig verdere werktijd; de volledige route is niet als één les getimed.</a:t>
             </a:r>
           </a:p>
           <a:p xmlns:a="http://schemas.openxmlformats.org/drawingml/2006/main">
@@ -2382,13 +2382,13 @@
           <a:p xmlns:a="http://schemas.openxmlformats.org/drawingml/2006/main">
             <a:r>
               <a:rPr sz="1400"/>
-              <a:t>Bron: Leerlingenboek Boek 2, chat-2026, gedrukte pagina 64–69. https://github.com/meijer1973/4veco-lessen/blob/f2660032cf7e4e3bbab96cf32863d06a38bd74bc/Boek%202%20-%20Kosten,%20opbrengsten,%20elasticiteit%20en%20surplus/edities/chat-2026/boek/Boek_2_Compleet.pdf</a:t>
-            </a:r>
-          </a:p>
-          <a:p xmlns:a="http://schemas.openxmlformats.org/drawingml/2006/main">
-            <a:r>
-              <a:rPr sz="1400"/>
-              <a:t>Antwoordmodel: https://github.com/meijer1973/4veco-lessen/blob/f2660032cf7e4e3bbab96cf32863d06a38bd74bc/Boek%202%20-%20Kosten,%20opbrengsten,%20elasticiteit%20en%20surplus/edities/chat-2026/bronnen/H2/2.2%20Elasticiteit%20%E2%80%93%20antwoorden.md</a:t>
+              <a:t>Bron: Leerlingenboek Boek 2, chat-2026, gedrukte pagina 65–70. https://github.com/meijer1973/4veco-lessen/blob/a8940a7a79e22857a3e306a91fe923c48c63e716/Boek%202%20-%20Kosten,%20opbrengsten,%20elasticiteit%20en%20surplus/edities/chat-2026/boek/Boek_2_Compleet.pdf</a:t>
+            </a:r>
+          </a:p>
+          <a:p xmlns:a="http://schemas.openxmlformats.org/drawingml/2006/main">
+            <a:r>
+              <a:rPr sz="1400"/>
+              <a:t>Antwoordmodel: https://github.com/meijer1973/4veco-lessen/blob/a8940a7a79e22857a3e306a91fe923c48c63e716/Boek%202%20-%20Kosten,%20opbrengsten,%20elasticiteit%20en%20surplus/edities/chat-2026/bronnen/H2/2.2%20Elasticiteit%20%E2%80%93%20antwoorden.md</a:t>
             </a:r>
           </a:p>
         </p:txBody>
@@ -2507,7 +2507,7 @@
           <a:p xmlns:a="http://schemas.openxmlformats.org/drawingml/2006/main">
             <a:r>
               <a:rPr sz="1400"/>
-              <a:t>Bron: Zelfgemaakt uitlegvoorbeeld Klimwand; context, gegevens en uitkomsten zijn niet uit het boek. Methoden: leerlingenboek Boek 2, chat-2026, gedrukte pagina's 36–63. https://github.com/meijer1973/4veco-lessen/blob/f2660032cf7e4e3bbab96cf32863d06a38bd74bc/Boek%202%20-%20Kosten,%20opbrengsten,%20elasticiteit%20en%20surplus/edities/chat-2026/boek/Boek_2_Compleet.pdf</a:t>
+              <a:t>Bron: Zelfgemaakt uitlegvoorbeeld Klimwand; context, gegevens en uitkomsten zijn niet uit het boek. Methoden: leerlingenboek Boek 2, chat-2026, gedrukte pagina's 37–64. https://github.com/meijer1973/4veco-lessen/blob/a8940a7a79e22857a3e306a91fe923c48c63e716/Boek%202%20-%20Kosten,%20opbrengsten,%20elasticiteit%20en%20surplus/edities/chat-2026/boek/Boek_2_Compleet.pdf</a:t>
             </a:r>
           </a:p>
         </p:txBody>
@@ -2626,7 +2626,7 @@
           <a:p xmlns:a="http://schemas.openxmlformats.org/drawingml/2006/main">
             <a:r>
               <a:rPr sz="1400"/>
-              <a:t>Bron: Zelfgemaakt uitlegvoorbeeld Klimwand; context, gegevens en uitkomsten zijn niet uit het boek. Methoden: leerlingenboek Boek 2, chat-2026, gedrukte pagina's 36–63. https://github.com/meijer1973/4veco-lessen/blob/f2660032cf7e4e3bbab96cf32863d06a38bd74bc/Boek%202%20-%20Kosten,%20opbrengsten,%20elasticiteit%20en%20surplus/edities/chat-2026/boek/Boek_2_Compleet.pdf</a:t>
+              <a:t>Bron: Zelfgemaakt uitlegvoorbeeld Klimwand; context, gegevens en uitkomsten zijn niet uit het boek. Methoden: leerlingenboek Boek 2, chat-2026, gedrukte pagina's 37–64. https://github.com/meijer1973/4veco-lessen/blob/a8940a7a79e22857a3e306a91fe923c48c63e716/Boek%202%20-%20Kosten,%20opbrengsten,%20elasticiteit%20en%20surplus/edities/chat-2026/boek/Boek_2_Compleet.pdf</a:t>
             </a:r>
           </a:p>
         </p:txBody>
@@ -2745,7 +2745,7 @@
           <a:p xmlns:a="http://schemas.openxmlformats.org/drawingml/2006/main">
             <a:r>
               <a:rPr sz="1400"/>
-              <a:t>Bron: Zelfgemaakt uitlegvoorbeeld Klimwand; context, gegevens en uitkomsten zijn niet uit het boek. Methoden: leerlingenboek Boek 2, chat-2026, gedrukte pagina's 36–63. https://github.com/meijer1973/4veco-lessen/blob/f2660032cf7e4e3bbab96cf32863d06a38bd74bc/Boek%202%20-%20Kosten,%20opbrengsten,%20elasticiteit%20en%20surplus/edities/chat-2026/boek/Boek_2_Compleet.pdf</a:t>
+              <a:t>Bron: Zelfgemaakt uitlegvoorbeeld Klimwand; context, gegevens en uitkomsten zijn niet uit het boek. Methoden: leerlingenboek Boek 2, chat-2026, gedrukte pagina's 37–64. https://github.com/meijer1973/4veco-lessen/blob/a8940a7a79e22857a3e306a91fe923c48c63e716/Boek%202%20-%20Kosten,%20opbrengsten,%20elasticiteit%20en%20surplus/edities/chat-2026/boek/Boek_2_Compleet.pdf</a:t>
             </a:r>
           </a:p>
         </p:txBody>
@@ -2828,7 +2828,7 @@
           <a:p xmlns:a="http://schemas.openxmlformats.org/drawingml/2006/main">
             <a:r>
               <a:rPr sz="1400"/>
-              <a:t>Uitleg: Laat deze dia staan tijdens zelfstandig werken. Start: opgave 1, gedrukte pagina 64. Er is geen afzonderlijke basis- of begeleide sectie. Werk met gemengde opgaven 1–4 naar doel 5 (StreamPlus, p. 66–67). Die echte doelopgave is gekozen omdat zij bronselectie, Ev, Ei, Ek, maandomzet, een één-factor-scenario en een begrensd advies combineert. Huiswerk: alle opgaven 1–7 maken en nakijken; behoud de labels bonus/denkertje bij 6 en hoofdstukcheck bij 7. De algemene docentenroute noemt 6 en 7 aanvullend; de classroom-afspraak voor gemengde paragrafen wijst alle opgaven toe. Plan zo nodig verdere werktijd; de volledige route is niet als één les getimed.</a:t>
+              <a:t>Uitleg: Laat deze dia staan tijdens zelfstandig werken. Start: opgave 1, gedrukte pagina 65. Er is geen afzonderlijke basis- of begeleide sectie. Werk met gemengde opgaven 1–4 naar doel 5 (StreamPlus, p. 67–68). Die echte doelopgave is gekozen omdat zij bronselectie, Ev, Ei, Ek, maandomzet, een één-factor-scenario en een begrensd advies combineert. Huiswerk: alle opgaven 1–7 maken en nakijken; behoud de labels bonus/denkertje bij 6 en hoofdstukcheck bij 7. De algemene docentenroute noemt 6 en 7 aanvullend; de classroom-afspraak voor gemengde paragrafen wijst alle opgaven toe. Plan zo nodig verdere werktijd; de volledige route is niet als één les getimed.</a:t>
             </a:r>
           </a:p>
           <a:p xmlns:a="http://schemas.openxmlformats.org/drawingml/2006/main">
@@ -2864,13 +2864,13 @@
           <a:p xmlns:a="http://schemas.openxmlformats.org/drawingml/2006/main">
             <a:r>
               <a:rPr sz="1400"/>
-              <a:t>Bron: Leerlingenboek Boek 2, chat-2026, gedrukte pagina 64–69. https://github.com/meijer1973/4veco-lessen/blob/f2660032cf7e4e3bbab96cf32863d06a38bd74bc/Boek%202%20-%20Kosten,%20opbrengsten,%20elasticiteit%20en%20surplus/edities/chat-2026/boek/Boek_2_Compleet.pdf</a:t>
-            </a:r>
-          </a:p>
-          <a:p xmlns:a="http://schemas.openxmlformats.org/drawingml/2006/main">
-            <a:r>
-              <a:rPr sz="1400"/>
-              <a:t>Antwoordmodel: https://github.com/meijer1973/4veco-lessen/blob/f2660032cf7e4e3bbab96cf32863d06a38bd74bc/Boek%202%20-%20Kosten,%20opbrengsten,%20elasticiteit%20en%20surplus/edities/chat-2026/bronnen/H2/2.2%20Elasticiteit%20%E2%80%93%20antwoorden.md</a:t>
+              <a:t>Bron: Leerlingenboek Boek 2, chat-2026, gedrukte pagina 65–70. https://github.com/meijer1973/4veco-lessen/blob/a8940a7a79e22857a3e306a91fe923c48c63e716/Boek%202%20-%20Kosten,%20opbrengsten,%20elasticiteit%20en%20surplus/edities/chat-2026/boek/Boek_2_Compleet.pdf</a:t>
+            </a:r>
+          </a:p>
+          <a:p xmlns:a="http://schemas.openxmlformats.org/drawingml/2006/main">
+            <a:r>
+              <a:rPr sz="1400"/>
+              <a:t>Antwoordmodel: https://github.com/meijer1973/4veco-lessen/blob/a8940a7a79e22857a3e306a91fe923c48c63e716/Boek%202%20-%20Kosten,%20opbrengsten,%20elasticiteit%20en%20surplus/edities/chat-2026/bronnen/H2/2.2%20Elasticiteit%20%E2%80%93%20antwoorden.md</a:t>
             </a:r>
           </a:p>
         </p:txBody>
@@ -2989,13 +2989,13 @@
           <a:p xmlns:a="http://schemas.openxmlformats.org/drawingml/2006/main">
             <a:r>
               <a:rPr sz="1400"/>
-              <a:t>Bron: Leerlingenboek Boek 2, chat-2026, gedrukte pagina 66. https://github.com/meijer1973/4veco-lessen/blob/f2660032cf7e4e3bbab96cf32863d06a38bd74bc/Boek%202%20-%20Kosten,%20opbrengsten,%20elasticiteit%20en%20surplus/edities/chat-2026/boek/Boek_2_Compleet.pdf</a:t>
-            </a:r>
-          </a:p>
-          <a:p xmlns:a="http://schemas.openxmlformats.org/drawingml/2006/main">
-            <a:r>
-              <a:rPr sz="1400"/>
-              <a:t>Antwoordmodel: https://github.com/meijer1973/4veco-lessen/blob/f2660032cf7e4e3bbab96cf32863d06a38bd74bc/Boek%202%20-%20Kosten,%20opbrengsten,%20elasticiteit%20en%20surplus/edities/chat-2026/bronnen/H2/2.2%20Elasticiteit%20%E2%80%93%20antwoorden.md</a:t>
+              <a:t>Bron: Leerlingenboek Boek 2, chat-2026, gedrukte pagina 67. https://github.com/meijer1973/4veco-lessen/blob/a8940a7a79e22857a3e306a91fe923c48c63e716/Boek%202%20-%20Kosten,%20opbrengsten,%20elasticiteit%20en%20surplus/edities/chat-2026/boek/Boek_2_Compleet.pdf</a:t>
+            </a:r>
+          </a:p>
+          <a:p xmlns:a="http://schemas.openxmlformats.org/drawingml/2006/main">
+            <a:r>
+              <a:rPr sz="1400"/>
+              <a:t>Antwoordmodel: https://github.com/meijer1973/4veco-lessen/blob/a8940a7a79e22857a3e306a91fe923c48c63e716/Boek%202%20-%20Kosten,%20opbrengsten,%20elasticiteit%20en%20surplus/edities/chat-2026/bronnen/H2/2.2%20Elasticiteit%20%E2%80%93%20antwoorden.md</a:t>
             </a:r>
           </a:p>
         </p:txBody>
@@ -3078,7 +3078,7 @@
           <a:p xmlns:a="http://schemas.openxmlformats.org/drawingml/2006/main">
             <a:r>
               <a:rPr sz="1400"/>
-              <a:t>Uitleg: Dit zijn de volledige tabellen B en C uit de bron. Premium en Budget hebben dezelfde inkomensverandering. C noemt de prijs van de concurrerende dienst en de vraag naar StreamPlus. Geef nog geen berekening of indeling. Laat leerlingen beide bronnen op boekpagina 66 terugvinden.</a:t>
+              <a:t>Uitleg: Dit zijn de volledige tabellen B en C uit de bron. Premium en Budget hebben dezelfde inkomensverandering. C noemt de prijs van de concurrerende dienst en de vraag naar StreamPlus. Geef nog geen berekening of indeling. Laat leerlingen beide bronnen op boekpagina 67 terugvinden.</a:t>
             </a:r>
           </a:p>
           <a:p xmlns:a="http://schemas.openxmlformats.org/drawingml/2006/main">
@@ -3114,13 +3114,13 @@
           <a:p xmlns:a="http://schemas.openxmlformats.org/drawingml/2006/main">
             <a:r>
               <a:rPr sz="1400"/>
-              <a:t>Bron: Leerlingenboek Boek 2, chat-2026, gedrukte pagina 66. https://github.com/meijer1973/4veco-lessen/blob/f2660032cf7e4e3bbab96cf32863d06a38bd74bc/Boek%202%20-%20Kosten,%20opbrengsten,%20elasticiteit%20en%20surplus/edities/chat-2026/boek/Boek_2_Compleet.pdf</a:t>
-            </a:r>
-          </a:p>
-          <a:p xmlns:a="http://schemas.openxmlformats.org/drawingml/2006/main">
-            <a:r>
-              <a:rPr sz="1400"/>
-              <a:t>Antwoordmodel: https://github.com/meijer1973/4veco-lessen/blob/f2660032cf7e4e3bbab96cf32863d06a38bd74bc/Boek%202%20-%20Kosten,%20opbrengsten,%20elasticiteit%20en%20surplus/edities/chat-2026/bronnen/H2/2.2%20Elasticiteit%20%E2%80%93%20antwoorden.md</a:t>
+              <a:t>Bron: Leerlingenboek Boek 2, chat-2026, gedrukte pagina 67. https://github.com/meijer1973/4veco-lessen/blob/a8940a7a79e22857a3e306a91fe923c48c63e716/Boek%202%20-%20Kosten,%20opbrengsten,%20elasticiteit%20en%20surplus/edities/chat-2026/boek/Boek_2_Compleet.pdf</a:t>
+            </a:r>
+          </a:p>
+          <a:p xmlns:a="http://schemas.openxmlformats.org/drawingml/2006/main">
+            <a:r>
+              <a:rPr sz="1400"/>
+              <a:t>Antwoordmodel: https://github.com/meijer1973/4veco-lessen/blob/a8940a7a79e22857a3e306a91fe923c48c63e716/Boek%202%20-%20Kosten,%20opbrengsten,%20elasticiteit%20en%20surplus/edities/chat-2026/bronnen/H2/2.2%20Elasticiteit%20%E2%80%93%20antwoorden.md</a:t>
             </a:r>
           </a:p>
         </p:txBody>
@@ -3239,13 +3239,13 @@
           <a:p xmlns:a="http://schemas.openxmlformats.org/drawingml/2006/main">
             <a:r>
               <a:rPr sz="1400"/>
-              <a:t>Bron: Leerlingenboek Boek 2, chat-2026, gedrukte pagina 66. https://github.com/meijer1973/4veco-lessen/blob/f2660032cf7e4e3bbab96cf32863d06a38bd74bc/Boek%202%20-%20Kosten,%20opbrengsten,%20elasticiteit%20en%20surplus/edities/chat-2026/boek/Boek_2_Compleet.pdf</a:t>
-            </a:r>
-          </a:p>
-          <a:p xmlns:a="http://schemas.openxmlformats.org/drawingml/2006/main">
-            <a:r>
-              <a:rPr sz="1400"/>
-              <a:t>Antwoordmodel: https://github.com/meijer1973/4veco-lessen/blob/f2660032cf7e4e3bbab96cf32863d06a38bd74bc/Boek%202%20-%20Kosten,%20opbrengsten,%20elasticiteit%20en%20surplus/edities/chat-2026/bronnen/H2/2.2%20Elasticiteit%20%E2%80%93%20antwoorden.md</a:t>
+              <a:t>Bron: Leerlingenboek Boek 2, chat-2026, gedrukte pagina 67. https://github.com/meijer1973/4veco-lessen/blob/a8940a7a79e22857a3e306a91fe923c48c63e716/Boek%202%20-%20Kosten,%20opbrengsten,%20elasticiteit%20en%20surplus/edities/chat-2026/boek/Boek_2_Compleet.pdf</a:t>
+            </a:r>
+          </a:p>
+          <a:p xmlns:a="http://schemas.openxmlformats.org/drawingml/2006/main">
+            <a:r>
+              <a:rPr sz="1400"/>
+              <a:t>Antwoordmodel: https://github.com/meijer1973/4veco-lessen/blob/a8940a7a79e22857a3e306a91fe923c48c63e716/Boek%202%20-%20Kosten,%20opbrengsten,%20elasticiteit%20en%20surplus/edities/chat-2026/bronnen/H2/2.2%20Elasticiteit%20%E2%80%93%20antwoorden.md</a:t>
             </a:r>
           </a:p>
         </p:txBody>
@@ -3313,7 +3313,7 @@
   </p:cSld>
   <p:clrMap bg1="lt1" tx1="dk1" bg2="lt2" tx2="dk2" accent1="accent1" accent2="accent2" accent3="accent3" accent4="accent4" accent5="accent5" accent6="accent6" hlink="hlink" folHlink="folHlink"/>
   <p:sldLayoutIdLst>
-    <p:sldLayoutId xmlns:r="http://schemas.openxmlformats.org/officeDocument/2006/relationships" id="2147483649" r:id="R63d9188efca1400d"/>
+    <p:sldLayoutId xmlns:r="http://schemas.openxmlformats.org/officeDocument/2006/relationships" id="2147483649" r:id="Rf7849ee9f8ce49af"/>
   </p:sldLayoutIdLst>
   <p:txStyles>
     <p:titleStyle>
@@ -3864,7 +3864,7 @@
           <p:cNvPr id="29" name="Deze les: §2.2.4 Gemengde opgaven">
             <a:extLst xmlns:a="http://schemas.openxmlformats.org/drawingml/2006/main">
               <a:ext uri="{FF2B5EF4-FFF2-40B4-BE49-F238E27FC236}">
-                <a16:creationId xmlns:a16="http://schemas.microsoft.com/office/drawing/2014/main" id="{5F94DB43-BF71-4AF3-BF0F-1A5521E278D6}"/>
+                <a16:creationId xmlns:a16="http://schemas.microsoft.com/office/drawing/2014/main" id="{CF00F8B2-C750-48FC-9386-CA855283FAA6}"/>
               </a:ext>
             </a:extLst>
           </p:cNvPr>
@@ -3921,7 +3921,7 @@
           <p:cNvPr id="2" name="">
             <a:extLst xmlns:a="http://schemas.openxmlformats.org/drawingml/2006/main">
               <a:ext uri="{FF2B5EF4-FFF2-40B4-BE49-F238E27FC236}">
-                <a16:creationId xmlns:a16="http://schemas.microsoft.com/office/drawing/2014/main" id="{557CCCB4-AE14-4B8E-967F-A764206055CA}"/>
+                <a16:creationId xmlns:a16="http://schemas.microsoft.com/office/drawing/2014/main" id="{CDC4371F-9108-47ED-B39A-6B38E0EB9302}"/>
               </a:ext>
             </a:extLst>
           </p:cNvPr>
@@ -3950,7 +3950,7 @@
           <p:cNvPr id="3" name="footer">
             <a:extLst xmlns:a="http://schemas.openxmlformats.org/drawingml/2006/main">
               <a:ext uri="{FF2B5EF4-FFF2-40B4-BE49-F238E27FC236}">
-                <a16:creationId xmlns:a16="http://schemas.microsoft.com/office/drawing/2014/main" id="{4E53FA40-4393-4E06-9529-FFF57EB18C31}"/>
+                <a16:creationId xmlns:a16="http://schemas.microsoft.com/office/drawing/2014/main" id="{0FB92658-15CD-42CC-88BC-520178E350F9}"/>
               </a:ext>
             </a:extLst>
           </p:cNvPr>
@@ -4007,7 +4007,7 @@
           <p:cNvPr id="4" name="slide-number">
             <a:extLst xmlns:a="http://schemas.openxmlformats.org/drawingml/2006/main">
               <a:ext uri="{FF2B5EF4-FFF2-40B4-BE49-F238E27FC236}">
-                <a16:creationId xmlns:a16="http://schemas.microsoft.com/office/drawing/2014/main" id="{97B42B36-5AEB-4105-B7B5-572AB6B760A4}"/>
+                <a16:creationId xmlns:a16="http://schemas.microsoft.com/office/drawing/2014/main" id="{46FACC1C-A17C-48F6-B3D6-CD65278CDAC2}"/>
               </a:ext>
             </a:extLst>
           </p:cNvPr>
@@ -4064,7 +4064,7 @@
           <p:cNvPr id="5" name="phase">
             <a:extLst xmlns:a="http://schemas.openxmlformats.org/drawingml/2006/main">
               <a:ext uri="{FF2B5EF4-FFF2-40B4-BE49-F238E27FC236}">
-                <a16:creationId xmlns:a16="http://schemas.microsoft.com/office/drawing/2014/main" id="{995F7F0E-835E-4EF3-A03F-30821BCA06B9}"/>
+                <a16:creationId xmlns:a16="http://schemas.microsoft.com/office/drawing/2014/main" id="{35274862-4B71-4050-91A7-067175B98D9F}"/>
               </a:ext>
             </a:extLst>
           </p:cNvPr>
@@ -4121,7 +4121,7 @@
           <p:cNvPr id="6" name="Lesroute">
             <a:extLst xmlns:a="http://schemas.openxmlformats.org/drawingml/2006/main">
               <a:ext uri="{FF2B5EF4-FFF2-40B4-BE49-F238E27FC236}">
-                <a16:creationId xmlns:a16="http://schemas.microsoft.com/office/drawing/2014/main" id="{F7F8E706-C844-45D5-B38D-3C69696CED8F}"/>
+                <a16:creationId xmlns:a16="http://schemas.microsoft.com/office/drawing/2014/main" id="{AC3A13E1-8989-4675-8451-5B7D53638E11}"/>
               </a:ext>
             </a:extLst>
           </p:cNvPr>
@@ -4178,7 +4178,7 @@
           <p:cNvPr id="7" name="route-number-1">
             <a:extLst xmlns:a="http://schemas.openxmlformats.org/drawingml/2006/main">
               <a:ext uri="{FF2B5EF4-FFF2-40B4-BE49-F238E27FC236}">
-                <a16:creationId xmlns:a16="http://schemas.microsoft.com/office/drawing/2014/main" id="{5F499CDB-C3DA-4F69-AE41-C053A9008A1B}"/>
+                <a16:creationId xmlns:a16="http://schemas.microsoft.com/office/drawing/2014/main" id="{3AE00196-6683-4044-B2E9-50320F34329D}"/>
               </a:ext>
             </a:extLst>
           </p:cNvPr>
@@ -4235,7 +4235,7 @@
           <p:cNvPr id="8" name="route-1">
             <a:extLst xmlns:a="http://schemas.openxmlformats.org/drawingml/2006/main">
               <a:ext uri="{FF2B5EF4-FFF2-40B4-BE49-F238E27FC236}">
-                <a16:creationId xmlns:a16="http://schemas.microsoft.com/office/drawing/2014/main" id="{4E0C0075-4305-4180-B2AB-83FE32429905}"/>
+                <a16:creationId xmlns:a16="http://schemas.microsoft.com/office/drawing/2014/main" id="{36DF32E2-940C-4CB2-BFBE-F1646281879F}"/>
               </a:ext>
             </a:extLst>
           </p:cNvPr>
@@ -4292,7 +4292,7 @@
           <p:cNvPr id="9" name="route-number-2">
             <a:extLst xmlns:a="http://schemas.openxmlformats.org/drawingml/2006/main">
               <a:ext uri="{FF2B5EF4-FFF2-40B4-BE49-F238E27FC236}">
-                <a16:creationId xmlns:a16="http://schemas.microsoft.com/office/drawing/2014/main" id="{B4B58738-2350-47F0-9057-D9900641FC41}"/>
+                <a16:creationId xmlns:a16="http://schemas.microsoft.com/office/drawing/2014/main" id="{C8CF78A5-44DD-4BA1-BA49-F0789C9626E3}"/>
               </a:ext>
             </a:extLst>
           </p:cNvPr>
@@ -4349,7 +4349,7 @@
           <p:cNvPr id="10" name="route-2">
             <a:extLst xmlns:a="http://schemas.openxmlformats.org/drawingml/2006/main">
               <a:ext uri="{FF2B5EF4-FFF2-40B4-BE49-F238E27FC236}">
-                <a16:creationId xmlns:a16="http://schemas.microsoft.com/office/drawing/2014/main" id="{C9F76DA9-C4BD-43A5-9086-03396D95E398}"/>
+                <a16:creationId xmlns:a16="http://schemas.microsoft.com/office/drawing/2014/main" id="{E7834507-357E-44A1-A75B-FDC863BA4026}"/>
               </a:ext>
             </a:extLst>
           </p:cNvPr>
@@ -4406,7 +4406,7 @@
           <p:cNvPr id="11" name="route-number-3">
             <a:extLst xmlns:a="http://schemas.openxmlformats.org/drawingml/2006/main">
               <a:ext uri="{FF2B5EF4-FFF2-40B4-BE49-F238E27FC236}">
-                <a16:creationId xmlns:a16="http://schemas.microsoft.com/office/drawing/2014/main" id="{31D0662E-F8E5-4FC1-A590-9A58C2FC90C8}"/>
+                <a16:creationId xmlns:a16="http://schemas.microsoft.com/office/drawing/2014/main" id="{8923B176-9566-482F-82D2-62FD311BA125}"/>
               </a:ext>
             </a:extLst>
           </p:cNvPr>
@@ -4463,7 +4463,7 @@
           <p:cNvPr id="12" name="route-3">
             <a:extLst xmlns:a="http://schemas.openxmlformats.org/drawingml/2006/main">
               <a:ext uri="{FF2B5EF4-FFF2-40B4-BE49-F238E27FC236}">
-                <a16:creationId xmlns:a16="http://schemas.microsoft.com/office/drawing/2014/main" id="{FB29C31C-5B9F-40DE-8A6F-F81949EA8827}"/>
+                <a16:creationId xmlns:a16="http://schemas.microsoft.com/office/drawing/2014/main" id="{68918703-B4E9-4609-897D-070527A711C5}"/>
               </a:ext>
             </a:extLst>
           </p:cNvPr>
@@ -4520,7 +4520,7 @@
           <p:cNvPr id="13" name="route-number-4">
             <a:extLst xmlns:a="http://schemas.openxmlformats.org/drawingml/2006/main">
               <a:ext uri="{FF2B5EF4-FFF2-40B4-BE49-F238E27FC236}">
-                <a16:creationId xmlns:a16="http://schemas.microsoft.com/office/drawing/2014/main" id="{3717FB08-2720-4F4F-AF81-8197C1E1EB59}"/>
+                <a16:creationId xmlns:a16="http://schemas.microsoft.com/office/drawing/2014/main" id="{802D292F-C428-48CA-B756-ED05287C147B}"/>
               </a:ext>
             </a:extLst>
           </p:cNvPr>
@@ -4577,7 +4577,7 @@
           <p:cNvPr id="14" name="route-4">
             <a:extLst xmlns:a="http://schemas.openxmlformats.org/drawingml/2006/main">
               <a:ext uri="{FF2B5EF4-FFF2-40B4-BE49-F238E27FC236}">
-                <a16:creationId xmlns:a16="http://schemas.microsoft.com/office/drawing/2014/main" id="{23A46A8B-909A-4BB3-B85F-11C139002A41}"/>
+                <a16:creationId xmlns:a16="http://schemas.microsoft.com/office/drawing/2014/main" id="{A23B11CC-195B-4127-9AEE-456E577F4083}"/>
               </a:ext>
             </a:extLst>
           </p:cNvPr>
@@ -4634,7 +4634,7 @@
           <p:cNvPr id="15" name="route-number-5">
             <a:extLst xmlns:a="http://schemas.openxmlformats.org/drawingml/2006/main">
               <a:ext uri="{FF2B5EF4-FFF2-40B4-BE49-F238E27FC236}">
-                <a16:creationId xmlns:a16="http://schemas.microsoft.com/office/drawing/2014/main" id="{BFD7A1B1-6472-4F7F-AB64-C80279E6E75C}"/>
+                <a16:creationId xmlns:a16="http://schemas.microsoft.com/office/drawing/2014/main" id="{E60D8595-F8B3-4655-B4D1-6DDAA127C3CC}"/>
               </a:ext>
             </a:extLst>
           </p:cNvPr>
@@ -4691,7 +4691,7 @@
           <p:cNvPr id="16" name="route-5">
             <a:extLst xmlns:a="http://schemas.openxmlformats.org/drawingml/2006/main">
               <a:ext uri="{FF2B5EF4-FFF2-40B4-BE49-F238E27FC236}">
-                <a16:creationId xmlns:a16="http://schemas.microsoft.com/office/drawing/2014/main" id="{7172FAC4-0D6E-4D64-8ED0-94EF6050BE12}"/>
+                <a16:creationId xmlns:a16="http://schemas.microsoft.com/office/drawing/2014/main" id="{D9EBFCDE-970A-440A-BBC0-42728B3F5CFE}"/>
               </a:ext>
             </a:extLst>
           </p:cNvPr>
@@ -4748,7 +4748,7 @@
           <p:cNvPr id="17" name="route-number-6">
             <a:extLst xmlns:a="http://schemas.openxmlformats.org/drawingml/2006/main">
               <a:ext uri="{FF2B5EF4-FFF2-40B4-BE49-F238E27FC236}">
-                <a16:creationId xmlns:a16="http://schemas.microsoft.com/office/drawing/2014/main" id="{E2BC5440-F85E-4A02-8301-A49F3027E404}"/>
+                <a16:creationId xmlns:a16="http://schemas.microsoft.com/office/drawing/2014/main" id="{94166C58-F042-48AB-9615-C5D4F1CF52CE}"/>
               </a:ext>
             </a:extLst>
           </p:cNvPr>
@@ -4805,7 +4805,7 @@
           <p:cNvPr id="18" name="route-6">
             <a:extLst xmlns:a="http://schemas.openxmlformats.org/drawingml/2006/main">
               <a:ext uri="{FF2B5EF4-FFF2-40B4-BE49-F238E27FC236}">
-                <a16:creationId xmlns:a16="http://schemas.microsoft.com/office/drawing/2014/main" id="{732320DE-76E6-4098-8917-740B519FC499}"/>
+                <a16:creationId xmlns:a16="http://schemas.microsoft.com/office/drawing/2014/main" id="{17527BCB-6770-476A-9F3F-4AD858EC93AB}"/>
               </a:ext>
             </a:extLst>
           </p:cNvPr>
@@ -4862,7 +4862,7 @@
           <p:cNvPr id="19" name="route-number-7">
             <a:extLst xmlns:a="http://schemas.openxmlformats.org/drawingml/2006/main">
               <a:ext uri="{FF2B5EF4-FFF2-40B4-BE49-F238E27FC236}">
-                <a16:creationId xmlns:a16="http://schemas.microsoft.com/office/drawing/2014/main" id="{D1FFE864-C779-48DB-8EE0-513F2BA02A28}"/>
+                <a16:creationId xmlns:a16="http://schemas.microsoft.com/office/drawing/2014/main" id="{659A8B58-5738-4657-A92E-FAADA9A4BB6F}"/>
               </a:ext>
             </a:extLst>
           </p:cNvPr>
@@ -4919,7 +4919,7 @@
           <p:cNvPr id="20" name="route-7">
             <a:extLst xmlns:a="http://schemas.openxmlformats.org/drawingml/2006/main">
               <a:ext uri="{FF2B5EF4-FFF2-40B4-BE49-F238E27FC236}">
-                <a16:creationId xmlns:a16="http://schemas.microsoft.com/office/drawing/2014/main" id="{61A870C3-039F-4E5E-B1EC-7BA1B7AAB308}"/>
+                <a16:creationId xmlns:a16="http://schemas.microsoft.com/office/drawing/2014/main" id="{EC150ED0-E8E5-44CE-BF7E-D7BA1DD2AE47}"/>
               </a:ext>
             </a:extLst>
           </p:cNvPr>
@@ -4976,7 +4976,7 @@
           <p:cNvPr id="21" name="Lesdoelen">
             <a:extLst xmlns:a="http://schemas.openxmlformats.org/drawingml/2006/main">
               <a:ext uri="{FF2B5EF4-FFF2-40B4-BE49-F238E27FC236}">
-                <a16:creationId xmlns:a16="http://schemas.microsoft.com/office/drawing/2014/main" id="{0D116C16-7254-4FD7-A54E-FE8DF8788778}"/>
+                <a16:creationId xmlns:a16="http://schemas.microsoft.com/office/drawing/2014/main" id="{4AADA982-8C5B-4EBF-AC85-978B949161E3}"/>
               </a:ext>
             </a:extLst>
           </p:cNvPr>
@@ -5033,7 +5033,7 @@
           <p:cNvPr id="22" name="overview-goals">
             <a:extLst xmlns:a="http://schemas.openxmlformats.org/drawingml/2006/main">
               <a:ext uri="{FF2B5EF4-FFF2-40B4-BE49-F238E27FC236}">
-                <a16:creationId xmlns:a16="http://schemas.microsoft.com/office/drawing/2014/main" id="{00DEE2D3-A583-410C-B49A-3D8FF5966FE3}"/>
+                <a16:creationId xmlns:a16="http://schemas.microsoft.com/office/drawing/2014/main" id="{B0B92741-7ECB-4BFD-B21D-8FA872227ED8}"/>
               </a:ext>
             </a:extLst>
           </p:cNvPr>
@@ -5136,7 +5136,7 @@
           <p:cNvPr id="23" name="">
             <a:extLst xmlns:a="http://schemas.openxmlformats.org/drawingml/2006/main">
               <a:ext uri="{FF2B5EF4-FFF2-40B4-BE49-F238E27FC236}">
-                <a16:creationId xmlns:a16="http://schemas.microsoft.com/office/drawing/2014/main" id="{8520AD00-CF9D-4863-9843-FB5A8CA39888}"/>
+                <a16:creationId xmlns:a16="http://schemas.microsoft.com/office/drawing/2014/main" id="{A464F4BC-2D25-495F-9F48-F6558D149BAA}"/>
               </a:ext>
             </a:extLst>
           </p:cNvPr>
@@ -5165,7 +5165,7 @@
           <p:cNvPr id="24" name="Startopdracht">
             <a:extLst xmlns:a="http://schemas.openxmlformats.org/drawingml/2006/main">
               <a:ext uri="{FF2B5EF4-FFF2-40B4-BE49-F238E27FC236}">
-                <a16:creationId xmlns:a16="http://schemas.microsoft.com/office/drawing/2014/main" id="{C3E805E4-5E90-4A0D-9F6E-D4A6CC171DC8}"/>
+                <a16:creationId xmlns:a16="http://schemas.microsoft.com/office/drawing/2014/main" id="{8F6B157D-AFDB-4CE5-8E7D-ED6C7DB4A429}"/>
               </a:ext>
             </a:extLst>
           </p:cNvPr>
@@ -5222,7 +5222,7 @@
           <p:cNvPr id="25" name="overview-start">
             <a:extLst xmlns:a="http://schemas.openxmlformats.org/drawingml/2006/main">
               <a:ext uri="{FF2B5EF4-FFF2-40B4-BE49-F238E27FC236}">
-                <a16:creationId xmlns:a16="http://schemas.microsoft.com/office/drawing/2014/main" id="{1E43B507-3410-4F1A-9CDE-BDA83B99C0B3}"/>
+                <a16:creationId xmlns:a16="http://schemas.microsoft.com/office/drawing/2014/main" id="{863BFFD6-9D75-4632-AE8A-A7FE8A94D46F}"/>
               </a:ext>
             </a:extLst>
           </p:cNvPr>
@@ -5269,7 +5269,7 @@
                 <a:ea typeface="Arial"/>
                 <a:cs typeface="Arial"/>
               </a:rPr>
-              <a:t>Pagina 64</a:t>
+              <a:t>Pagina 65</a:t>
             </a:r>
           </a:p>
           <a:p xmlns:a="http://schemas.openxmlformats.org/drawingml/2006/main">
@@ -5302,7 +5302,7 @@
           <p:cNvPr id="26" name="">
             <a:extLst xmlns:a="http://schemas.openxmlformats.org/drawingml/2006/main">
               <a:ext uri="{FF2B5EF4-FFF2-40B4-BE49-F238E27FC236}">
-                <a16:creationId xmlns:a16="http://schemas.microsoft.com/office/drawing/2014/main" id="{E3A05759-7F56-4744-88C9-1669F0E84C91}"/>
+                <a16:creationId xmlns:a16="http://schemas.microsoft.com/office/drawing/2014/main" id="{73B21A6E-6911-47F8-863C-D2D43300FDFD}"/>
               </a:ext>
             </a:extLst>
           </p:cNvPr>
@@ -5331,7 +5331,7 @@
           <p:cNvPr id="27" name="Huiswerk">
             <a:extLst xmlns:a="http://schemas.openxmlformats.org/drawingml/2006/main">
               <a:ext uri="{FF2B5EF4-FFF2-40B4-BE49-F238E27FC236}">
-                <a16:creationId xmlns:a16="http://schemas.microsoft.com/office/drawing/2014/main" id="{3B878537-BD42-49CD-BA36-1AFF19518126}"/>
+                <a16:creationId xmlns:a16="http://schemas.microsoft.com/office/drawing/2014/main" id="{1E389E6B-5E3E-47EB-8098-6DBF8CC77B8D}"/>
               </a:ext>
             </a:extLst>
           </p:cNvPr>
@@ -5388,7 +5388,7 @@
           <p:cNvPr id="28" name="overview-homework">
             <a:extLst xmlns:a="http://schemas.openxmlformats.org/drawingml/2006/main">
               <a:ext uri="{FF2B5EF4-FFF2-40B4-BE49-F238E27FC236}">
-                <a16:creationId xmlns:a16="http://schemas.microsoft.com/office/drawing/2014/main" id="{DA27C82A-51B0-4613-ADA9-393B8CC1950D}"/>
+                <a16:creationId xmlns:a16="http://schemas.microsoft.com/office/drawing/2014/main" id="{0B3D3171-A25A-4B84-90B1-2A33155F4874}"/>
               </a:ext>
             </a:extLst>
           </p:cNvPr>
@@ -5535,7 +5535,7 @@
     </p:spTree>
     <p:extLst>
       <p:ext uri="{BB962C8B-B14F-4D97-AF65-F5344CB8AC3E}">
-        <p14:creationId xmlns:p14="http://schemas.microsoft.com/office/powerpoint/2010/main" val="761755024"/>
+        <p14:creationId xmlns:p14="http://schemas.microsoft.com/office/powerpoint/2010/main" val="2084028012"/>
       </p:ext>
     </p:extLst>
   </p:cSld>
@@ -5566,7 +5566,7 @@
           <p:cNvPr id="12" name="Opgave 5 · Vragen 1–3">
             <a:extLst xmlns:a="http://schemas.openxmlformats.org/drawingml/2006/main">
               <a:ext uri="{FF2B5EF4-FFF2-40B4-BE49-F238E27FC236}">
-                <a16:creationId xmlns:a16="http://schemas.microsoft.com/office/drawing/2014/main" id="{DEDEF9E0-A09C-4C58-B991-611B4734A626}"/>
+                <a16:creationId xmlns:a16="http://schemas.microsoft.com/office/drawing/2014/main" id="{F90A7F76-4E88-46FF-8DF9-B01F8B7ADB1A}"/>
               </a:ext>
             </a:extLst>
           </p:cNvPr>
@@ -5623,7 +5623,7 @@
           <p:cNvPr id="2" name="">
             <a:extLst xmlns:a="http://schemas.openxmlformats.org/drawingml/2006/main">
               <a:ext uri="{FF2B5EF4-FFF2-40B4-BE49-F238E27FC236}">
-                <a16:creationId xmlns:a16="http://schemas.microsoft.com/office/drawing/2014/main" id="{4A3FF2E7-9063-4788-B231-75379AAF47F8}"/>
+                <a16:creationId xmlns:a16="http://schemas.microsoft.com/office/drawing/2014/main" id="{F2D69906-1E3C-4E54-A302-722689CBFC00}"/>
               </a:ext>
             </a:extLst>
           </p:cNvPr>
@@ -5652,7 +5652,7 @@
           <p:cNvPr id="3" name="footer">
             <a:extLst xmlns:a="http://schemas.openxmlformats.org/drawingml/2006/main">
               <a:ext uri="{FF2B5EF4-FFF2-40B4-BE49-F238E27FC236}">
-                <a16:creationId xmlns:a16="http://schemas.microsoft.com/office/drawing/2014/main" id="{C162815E-0D04-4F1C-B66A-00746BDD0FBE}"/>
+                <a16:creationId xmlns:a16="http://schemas.microsoft.com/office/drawing/2014/main" id="{DF065D33-DEAC-4BEF-9A45-A4E07D8EA717}"/>
               </a:ext>
             </a:extLst>
           </p:cNvPr>
@@ -5699,7 +5699,7 @@
                 <a:ea typeface="Arial"/>
                 <a:cs typeface="Arial"/>
               </a:rPr>
-              <a:t>§2.2.4 Gemengde opgaven · Opgave 5 · Boekpagina 66–67</a:t>
+              <a:t>§2.2.4 Gemengde opgaven · Opgave 5 · Boekpagina 67–68</a:t>
             </a:r>
           </a:p>
         </p:txBody>
@@ -5709,7 +5709,7 @@
           <p:cNvPr id="4" name="slide-number">
             <a:extLst xmlns:a="http://schemas.openxmlformats.org/drawingml/2006/main">
               <a:ext uri="{FF2B5EF4-FFF2-40B4-BE49-F238E27FC236}">
-                <a16:creationId xmlns:a16="http://schemas.microsoft.com/office/drawing/2014/main" id="{C61007DA-3283-46C8-884E-C64F1DD3D1C5}"/>
+                <a16:creationId xmlns:a16="http://schemas.microsoft.com/office/drawing/2014/main" id="{814D22CD-0A46-46EA-9753-8FD4475662B9}"/>
               </a:ext>
             </a:extLst>
           </p:cNvPr>
@@ -5763,10 +5763,10 @@
       </p:sp>
       <p:sp>
         <p:nvSpPr>
-          <p:cNvPr id="5" name="Gebruik de bronnen op boekpagina 66.">
-            <a:extLst xmlns:a="http://schemas.openxmlformats.org/drawingml/2006/main">
-              <a:ext uri="{FF2B5EF4-FFF2-40B4-BE49-F238E27FC236}">
-                <a16:creationId xmlns:a16="http://schemas.microsoft.com/office/drawing/2014/main" id="{A55DFAD2-DDE9-4E5B-A827-4AA90B83633B}"/>
+          <p:cNvPr id="5" name="Gebruik de bronnen op boekpagina 67.">
+            <a:extLst xmlns:a="http://schemas.openxmlformats.org/drawingml/2006/main">
+              <a:ext uri="{FF2B5EF4-FFF2-40B4-BE49-F238E27FC236}">
+                <a16:creationId xmlns:a16="http://schemas.microsoft.com/office/drawing/2014/main" id="{9567BAB4-EFE0-49FB-B2F9-3C3B01159A62}"/>
               </a:ext>
             </a:extLst>
           </p:cNvPr>
@@ -5813,7 +5813,7 @@
                 <a:ea typeface="Arial"/>
                 <a:cs typeface="Arial"/>
               </a:rPr>
-              <a:t>Gebruik de bronnen op boekpagina 66.</a:t>
+              <a:t>Gebruik de bronnen op boekpagina 67.</a:t>
             </a:r>
           </a:p>
         </p:txBody>
@@ -5823,7 +5823,7 @@
           <p:cNvPr id="6" name="1.">
             <a:extLst xmlns:a="http://schemas.openxmlformats.org/drawingml/2006/main">
               <a:ext uri="{FF2B5EF4-FFF2-40B4-BE49-F238E27FC236}">
-                <a16:creationId xmlns:a16="http://schemas.microsoft.com/office/drawing/2014/main" id="{9B1B0D63-E633-406C-BF01-5C34621B737F}"/>
+                <a16:creationId xmlns:a16="http://schemas.microsoft.com/office/drawing/2014/main" id="{0F5DB33D-0865-4B38-81A8-877E3831AF6F}"/>
               </a:ext>
             </a:extLst>
           </p:cNvPr>
@@ -5880,7 +5880,7 @@
           <p:cNvPr id="7" name="Selecteer uit bron A de gegevens voor een controleberekening">
             <a:extLst xmlns:a="http://schemas.openxmlformats.org/drawingml/2006/main">
               <a:ext uri="{FF2B5EF4-FFF2-40B4-BE49-F238E27FC236}">
-                <a16:creationId xmlns:a16="http://schemas.microsoft.com/office/drawing/2014/main" id="{CE739EBA-89F6-474A-AD39-829CEAC2DBD2}"/>
+                <a16:creationId xmlns:a16="http://schemas.microsoft.com/office/drawing/2014/main" id="{B885175D-29F3-40B4-9152-173B05AFBCD2}"/>
               </a:ext>
             </a:extLst>
           </p:cNvPr>
@@ -5937,7 +5937,7 @@
           <p:cNvPr id="8" name="2.">
             <a:extLst xmlns:a="http://schemas.openxmlformats.org/drawingml/2006/main">
               <a:ext uri="{FF2B5EF4-FFF2-40B4-BE49-F238E27FC236}">
-                <a16:creationId xmlns:a16="http://schemas.microsoft.com/office/drawing/2014/main" id="{1DC3E642-0C6E-48E6-AD8B-9FEB7CD4E1B8}"/>
+                <a16:creationId xmlns:a16="http://schemas.microsoft.com/office/drawing/2014/main" id="{F3DB0FA1-F84D-456F-8FEE-F14B5D6E4E9F}"/>
               </a:ext>
             </a:extLst>
           </p:cNvPr>
@@ -5994,7 +5994,7 @@
           <p:cNvPr id="9" name="Classificeer met de gegeven Ev=−0,7 de vraag en leg in gewon">
             <a:extLst xmlns:a="http://schemas.openxmlformats.org/drawingml/2006/main">
               <a:ext uri="{FF2B5EF4-FFF2-40B4-BE49-F238E27FC236}">
-                <a16:creationId xmlns:a16="http://schemas.microsoft.com/office/drawing/2014/main" id="{8110052F-CAF9-4B15-98AB-F1EEF7DDFE96}"/>
+                <a16:creationId xmlns:a16="http://schemas.microsoft.com/office/drawing/2014/main" id="{A14EBDA9-79DA-47AA-9690-B93295855F58}"/>
               </a:ext>
             </a:extLst>
           </p:cNvPr>
@@ -6051,7 +6051,7 @@
           <p:cNvPr id="10" name="3.">
             <a:extLst xmlns:a="http://schemas.openxmlformats.org/drawingml/2006/main">
               <a:ext uri="{FF2B5EF4-FFF2-40B4-BE49-F238E27FC236}">
-                <a16:creationId xmlns:a16="http://schemas.microsoft.com/office/drawing/2014/main" id="{831F9843-5A75-40BD-A225-05537E98E036}"/>
+                <a16:creationId xmlns:a16="http://schemas.microsoft.com/office/drawing/2014/main" id="{5B8D13CB-EA93-49F0-ADEB-309BC3C5A718}"/>
               </a:ext>
             </a:extLst>
           </p:cNvPr>
@@ -6108,7 +6108,7 @@
           <p:cNvPr id="11" name="Bereken met bron A TO vóór en na de prijsverhoging. (2 punte">
             <a:extLst xmlns:a="http://schemas.openxmlformats.org/drawingml/2006/main">
               <a:ext uri="{FF2B5EF4-FFF2-40B4-BE49-F238E27FC236}">
-                <a16:creationId xmlns:a16="http://schemas.microsoft.com/office/drawing/2014/main" id="{561F9D47-77B2-4406-89F8-314EF9214DD1}"/>
+                <a16:creationId xmlns:a16="http://schemas.microsoft.com/office/drawing/2014/main" id="{CE503752-2022-4551-8BE2-ED5EB27DE388}"/>
               </a:ext>
             </a:extLst>
           </p:cNvPr>
@@ -6163,7 +6163,7 @@
     </p:spTree>
     <p:extLst>
       <p:ext uri="{BB962C8B-B14F-4D97-AF65-F5344CB8AC3E}">
-        <p14:creationId xmlns:p14="http://schemas.microsoft.com/office/powerpoint/2010/main" val="1331399394"/>
+        <p14:creationId xmlns:p14="http://schemas.microsoft.com/office/powerpoint/2010/main" val="2146600894"/>
       </p:ext>
     </p:extLst>
   </p:cSld>
@@ -6194,7 +6194,7 @@
           <p:cNvPr id="10" name="Opgave 5 · Vragen 4–5">
             <a:extLst xmlns:a="http://schemas.openxmlformats.org/drawingml/2006/main">
               <a:ext uri="{FF2B5EF4-FFF2-40B4-BE49-F238E27FC236}">
-                <a16:creationId xmlns:a16="http://schemas.microsoft.com/office/drawing/2014/main" id="{0240C249-D570-4B95-8A21-FEF5B25A7E16}"/>
+                <a16:creationId xmlns:a16="http://schemas.microsoft.com/office/drawing/2014/main" id="{FB5EE8F6-3D76-4E70-938C-FC8BAF49C473}"/>
               </a:ext>
             </a:extLst>
           </p:cNvPr>
@@ -6251,7 +6251,7 @@
           <p:cNvPr id="2" name="">
             <a:extLst xmlns:a="http://schemas.openxmlformats.org/drawingml/2006/main">
               <a:ext uri="{FF2B5EF4-FFF2-40B4-BE49-F238E27FC236}">
-                <a16:creationId xmlns:a16="http://schemas.microsoft.com/office/drawing/2014/main" id="{F55D0CE6-0672-4092-A563-EAD2CE8F1ADA}"/>
+                <a16:creationId xmlns:a16="http://schemas.microsoft.com/office/drawing/2014/main" id="{32E5AE68-7115-41B1-964D-2C23202C3B24}"/>
               </a:ext>
             </a:extLst>
           </p:cNvPr>
@@ -6280,7 +6280,7 @@
           <p:cNvPr id="3" name="footer">
             <a:extLst xmlns:a="http://schemas.openxmlformats.org/drawingml/2006/main">
               <a:ext uri="{FF2B5EF4-FFF2-40B4-BE49-F238E27FC236}">
-                <a16:creationId xmlns:a16="http://schemas.microsoft.com/office/drawing/2014/main" id="{EE4861D0-3814-49A7-B0CA-047BFA0376C5}"/>
+                <a16:creationId xmlns:a16="http://schemas.microsoft.com/office/drawing/2014/main" id="{4039F9DD-F489-4069-A351-BDABC0C9402B}"/>
               </a:ext>
             </a:extLst>
           </p:cNvPr>
@@ -6327,7 +6327,7 @@
                 <a:ea typeface="Arial"/>
                 <a:cs typeface="Arial"/>
               </a:rPr>
-              <a:t>§2.2.4 Gemengde opgaven · Opgave 5 · Boekpagina 66–67</a:t>
+              <a:t>§2.2.4 Gemengde opgaven · Opgave 5 · Boekpagina 67–68</a:t>
             </a:r>
           </a:p>
         </p:txBody>
@@ -6337,7 +6337,7 @@
           <p:cNvPr id="4" name="slide-number">
             <a:extLst xmlns:a="http://schemas.openxmlformats.org/drawingml/2006/main">
               <a:ext uri="{FF2B5EF4-FFF2-40B4-BE49-F238E27FC236}">
-                <a16:creationId xmlns:a16="http://schemas.microsoft.com/office/drawing/2014/main" id="{10B4863C-9DC3-470D-83EC-69609B2A4198}"/>
+                <a16:creationId xmlns:a16="http://schemas.microsoft.com/office/drawing/2014/main" id="{110DC8B5-0CAA-4008-B599-486CCF556E86}"/>
               </a:ext>
             </a:extLst>
           </p:cNvPr>
@@ -6391,10 +6391,10 @@
       </p:sp>
       <p:sp>
         <p:nvSpPr>
-          <p:cNvPr id="5" name="Gebruik de bronnen op boekpagina 66.">
-            <a:extLst xmlns:a="http://schemas.openxmlformats.org/drawingml/2006/main">
-              <a:ext uri="{FF2B5EF4-FFF2-40B4-BE49-F238E27FC236}">
-                <a16:creationId xmlns:a16="http://schemas.microsoft.com/office/drawing/2014/main" id="{093BB8DA-DA2E-4AAE-AF47-4F9B8399DCBE}"/>
+          <p:cNvPr id="5" name="Gebruik de bronnen op boekpagina 67.">
+            <a:extLst xmlns:a="http://schemas.openxmlformats.org/drawingml/2006/main">
+              <a:ext uri="{FF2B5EF4-FFF2-40B4-BE49-F238E27FC236}">
+                <a16:creationId xmlns:a16="http://schemas.microsoft.com/office/drawing/2014/main" id="{EC77A2CB-5E16-4F5C-BFC9-DF112889364A}"/>
               </a:ext>
             </a:extLst>
           </p:cNvPr>
@@ -6441,7 +6441,7 @@
                 <a:ea typeface="Arial"/>
                 <a:cs typeface="Arial"/>
               </a:rPr>
-              <a:t>Gebruik de bronnen op boekpagina 66.</a:t>
+              <a:t>Gebruik de bronnen op boekpagina 67.</a:t>
             </a:r>
           </a:p>
         </p:txBody>
@@ -6451,7 +6451,7 @@
           <p:cNvPr id="6" name="4.">
             <a:extLst xmlns:a="http://schemas.openxmlformats.org/drawingml/2006/main">
               <a:ext uri="{FF2B5EF4-FFF2-40B4-BE49-F238E27FC236}">
-                <a16:creationId xmlns:a16="http://schemas.microsoft.com/office/drawing/2014/main" id="{5264B9E0-DF68-42A7-9223-13944108D07C}"/>
+                <a16:creationId xmlns:a16="http://schemas.microsoft.com/office/drawing/2014/main" id="{694A54D2-5666-4063-810F-05B011F28705}"/>
               </a:ext>
             </a:extLst>
           </p:cNvPr>
@@ -6508,7 +6508,7 @@
           <p:cNvPr id="7" name="Bereken en classificeer met bron B Ei voor Premium en Budget">
             <a:extLst xmlns:a="http://schemas.openxmlformats.org/drawingml/2006/main">
               <a:ext uri="{FF2B5EF4-FFF2-40B4-BE49-F238E27FC236}">
-                <a16:creationId xmlns:a16="http://schemas.microsoft.com/office/drawing/2014/main" id="{48A40DE9-D345-42C6-AED6-E70DAFF34F4B}"/>
+                <a16:creationId xmlns:a16="http://schemas.microsoft.com/office/drawing/2014/main" id="{EF663566-BAEC-4F9F-A181-F703995EF875}"/>
               </a:ext>
             </a:extLst>
           </p:cNvPr>
@@ -6565,7 +6565,7 @@
           <p:cNvPr id="8" name="5.">
             <a:extLst xmlns:a="http://schemas.openxmlformats.org/drawingml/2006/main">
               <a:ext uri="{FF2B5EF4-FFF2-40B4-BE49-F238E27FC236}">
-                <a16:creationId xmlns:a16="http://schemas.microsoft.com/office/drawing/2014/main" id="{8079FCE3-8F0B-4E16-9695-ED102C5B0BB7}"/>
+                <a16:creationId xmlns:a16="http://schemas.microsoft.com/office/drawing/2014/main" id="{006F3A6A-C57F-4774-9BA3-464A636CA148}"/>
               </a:ext>
             </a:extLst>
           </p:cNvPr>
@@ -6622,7 +6622,7 @@
           <p:cNvPr id="9" name="Bereken met bron D Q in de beginsituatie en nadat alleen Y s">
             <a:extLst xmlns:a="http://schemas.openxmlformats.org/drawingml/2006/main">
               <a:ext uri="{FF2B5EF4-FFF2-40B4-BE49-F238E27FC236}">
-                <a16:creationId xmlns:a16="http://schemas.microsoft.com/office/drawing/2014/main" id="{A9658877-F189-42BB-9855-30AE8F88AA9C}"/>
+                <a16:creationId xmlns:a16="http://schemas.microsoft.com/office/drawing/2014/main" id="{9ED7E140-CE7D-421A-BCB8-98ACA8A58CC4}"/>
               </a:ext>
             </a:extLst>
           </p:cNvPr>
@@ -6677,7 +6677,7 @@
     </p:spTree>
     <p:extLst>
       <p:ext uri="{BB962C8B-B14F-4D97-AF65-F5344CB8AC3E}">
-        <p14:creationId xmlns:p14="http://schemas.microsoft.com/office/powerpoint/2010/main" val="464438889"/>
+        <p14:creationId xmlns:p14="http://schemas.microsoft.com/office/powerpoint/2010/main" val="360599670"/>
       </p:ext>
     </p:extLst>
   </p:cSld>
@@ -6708,7 +6708,7 @@
           <p:cNvPr id="9" name="Opgave 5 · Vraag 6">
             <a:extLst xmlns:a="http://schemas.openxmlformats.org/drawingml/2006/main">
               <a:ext uri="{FF2B5EF4-FFF2-40B4-BE49-F238E27FC236}">
-                <a16:creationId xmlns:a16="http://schemas.microsoft.com/office/drawing/2014/main" id="{935C0E74-E247-45C8-BCC9-8A8149A1690F}"/>
+                <a16:creationId xmlns:a16="http://schemas.microsoft.com/office/drawing/2014/main" id="{C8175438-DFF4-49A6-8427-3ABE3C1A9F6B}"/>
               </a:ext>
             </a:extLst>
           </p:cNvPr>
@@ -6765,7 +6765,7 @@
           <p:cNvPr id="2" name="">
             <a:extLst xmlns:a="http://schemas.openxmlformats.org/drawingml/2006/main">
               <a:ext uri="{FF2B5EF4-FFF2-40B4-BE49-F238E27FC236}">
-                <a16:creationId xmlns:a16="http://schemas.microsoft.com/office/drawing/2014/main" id="{DA384805-D0E2-4FAC-A5FA-636AE25BD11A}"/>
+                <a16:creationId xmlns:a16="http://schemas.microsoft.com/office/drawing/2014/main" id="{0CD817E1-C94B-4067-8054-A31815D4B61D}"/>
               </a:ext>
             </a:extLst>
           </p:cNvPr>
@@ -6794,7 +6794,7 @@
           <p:cNvPr id="3" name="footer">
             <a:extLst xmlns:a="http://schemas.openxmlformats.org/drawingml/2006/main">
               <a:ext uri="{FF2B5EF4-FFF2-40B4-BE49-F238E27FC236}">
-                <a16:creationId xmlns:a16="http://schemas.microsoft.com/office/drawing/2014/main" id="{CBB04DF2-D5FC-4D46-B43E-0D101E5E186A}"/>
+                <a16:creationId xmlns:a16="http://schemas.microsoft.com/office/drawing/2014/main" id="{AC6D8BF1-507C-4F8E-8D8E-742E18D7F163}"/>
               </a:ext>
             </a:extLst>
           </p:cNvPr>
@@ -6841,7 +6841,7 @@
                 <a:ea typeface="Arial"/>
                 <a:cs typeface="Arial"/>
               </a:rPr>
-              <a:t>§2.2.4 Gemengde opgaven · Opgave 5 · Boekpagina 66–67</a:t>
+              <a:t>§2.2.4 Gemengde opgaven · Opgave 5 · Boekpagina 67–68</a:t>
             </a:r>
           </a:p>
         </p:txBody>
@@ -6851,7 +6851,7 @@
           <p:cNvPr id="4" name="slide-number">
             <a:extLst xmlns:a="http://schemas.openxmlformats.org/drawingml/2006/main">
               <a:ext uri="{FF2B5EF4-FFF2-40B4-BE49-F238E27FC236}">
-                <a16:creationId xmlns:a16="http://schemas.microsoft.com/office/drawing/2014/main" id="{F7697B34-5503-4212-972C-EB8592DD5DDD}"/>
+                <a16:creationId xmlns:a16="http://schemas.microsoft.com/office/drawing/2014/main" id="{D41A4530-0864-42E5-A4EB-57E6AAF86BFD}"/>
               </a:ext>
             </a:extLst>
           </p:cNvPr>
@@ -6905,10 +6905,10 @@
       </p:sp>
       <p:sp>
         <p:nvSpPr>
-          <p:cNvPr id="5" name="Gebruik de bronnen op boekpagina 66.">
-            <a:extLst xmlns:a="http://schemas.openxmlformats.org/drawingml/2006/main">
-              <a:ext uri="{FF2B5EF4-FFF2-40B4-BE49-F238E27FC236}">
-                <a16:creationId xmlns:a16="http://schemas.microsoft.com/office/drawing/2014/main" id="{DB674834-59D2-48E8-84FC-1986F01CEABE}"/>
+          <p:cNvPr id="5" name="Gebruik de bronnen op boekpagina 67.">
+            <a:extLst xmlns:a="http://schemas.openxmlformats.org/drawingml/2006/main">
+              <a:ext uri="{FF2B5EF4-FFF2-40B4-BE49-F238E27FC236}">
+                <a16:creationId xmlns:a16="http://schemas.microsoft.com/office/drawing/2014/main" id="{39896303-AD11-4F3D-B824-93AFA595F810}"/>
               </a:ext>
             </a:extLst>
           </p:cNvPr>
@@ -6955,7 +6955,7 @@
                 <a:ea typeface="Arial"/>
                 <a:cs typeface="Arial"/>
               </a:rPr>
-              <a:t>Gebruik de bronnen op boekpagina 66.</a:t>
+              <a:t>Gebruik de bronnen op boekpagina 67.</a:t>
             </a:r>
           </a:p>
         </p:txBody>
@@ -6965,7 +6965,7 @@
           <p:cNvPr id="6" name="6.">
             <a:extLst xmlns:a="http://schemas.openxmlformats.org/drawingml/2006/main">
               <a:ext uri="{FF2B5EF4-FFF2-40B4-BE49-F238E27FC236}">
-                <a16:creationId xmlns:a16="http://schemas.microsoft.com/office/drawing/2014/main" id="{51F636F5-F9A9-4D0F-899D-51854EAF4D49}"/>
+                <a16:creationId xmlns:a16="http://schemas.microsoft.com/office/drawing/2014/main" id="{30039931-DDA2-4ED5-B628-6F3B8321A0A3}"/>
               </a:ext>
             </a:extLst>
           </p:cNvPr>
@@ -7022,7 +7022,7 @@
           <p:cNvPr id="7" name="Geef op basis van minstens twee bronnen een voorzichtig omze">
             <a:extLst xmlns:a="http://schemas.openxmlformats.org/drawingml/2006/main">
               <a:ext uri="{FF2B5EF4-FFF2-40B4-BE49-F238E27FC236}">
-                <a16:creationId xmlns:a16="http://schemas.microsoft.com/office/drawing/2014/main" id="{714423CA-D37C-4657-85F9-10F688C513B6}"/>
+                <a16:creationId xmlns:a16="http://schemas.microsoft.com/office/drawing/2014/main" id="{907F27B6-6EB4-412E-84DD-848D2F5A11D0}"/>
               </a:ext>
             </a:extLst>
           </p:cNvPr>
@@ -7079,7 +7079,7 @@
           <p:cNvPr id="8" name="Na afloop: vergelijk berekeningen, eenheden en redenering&#10;me">
             <a:extLst xmlns:a="http://schemas.openxmlformats.org/drawingml/2006/main">
               <a:ext uri="{FF2B5EF4-FFF2-40B4-BE49-F238E27FC236}">
-                <a16:creationId xmlns:a16="http://schemas.microsoft.com/office/drawing/2014/main" id="{E3EA44F5-A1E8-458C-84C7-41571414C62F}"/>
+                <a16:creationId xmlns:a16="http://schemas.microsoft.com/office/drawing/2014/main" id="{07ED17EF-BEE5-4AC8-89A8-60498B2E3A1B}"/>
               </a:ext>
             </a:extLst>
           </p:cNvPr>
@@ -7157,7 +7157,7 @@
     </p:spTree>
     <p:extLst>
       <p:ext uri="{BB962C8B-B14F-4D97-AF65-F5344CB8AC3E}">
-        <p14:creationId xmlns:p14="http://schemas.microsoft.com/office/powerpoint/2010/main" val="1762597755"/>
+        <p14:creationId xmlns:p14="http://schemas.microsoft.com/office/powerpoint/2010/main" val="2096241196"/>
       </p:ext>
     </p:extLst>
   </p:cSld>
@@ -7188,7 +7188,7 @@
           <p:cNvPr id="8" name="Opgave 5.1 · Relevante gegevens">
             <a:extLst xmlns:a="http://schemas.openxmlformats.org/drawingml/2006/main">
               <a:ext uri="{FF2B5EF4-FFF2-40B4-BE49-F238E27FC236}">
-                <a16:creationId xmlns:a16="http://schemas.microsoft.com/office/drawing/2014/main" id="{F30E134D-FD25-45F7-86A1-366A3111DC4D}"/>
+                <a16:creationId xmlns:a16="http://schemas.microsoft.com/office/drawing/2014/main" id="{550735D7-5EE6-4C2D-86D8-E50AD164E827}"/>
               </a:ext>
             </a:extLst>
           </p:cNvPr>
@@ -7245,7 +7245,7 @@
           <p:cNvPr id="2" name="">
             <a:extLst xmlns:a="http://schemas.openxmlformats.org/drawingml/2006/main">
               <a:ext uri="{FF2B5EF4-FFF2-40B4-BE49-F238E27FC236}">
-                <a16:creationId xmlns:a16="http://schemas.microsoft.com/office/drawing/2014/main" id="{E0ED8BEE-2D0A-4714-BE11-65E4681B2EBF}"/>
+                <a16:creationId xmlns:a16="http://schemas.microsoft.com/office/drawing/2014/main" id="{E29DDB5B-58D8-4507-B4DD-240188D3D2DE}"/>
               </a:ext>
             </a:extLst>
           </p:cNvPr>
@@ -7274,7 +7274,7 @@
           <p:cNvPr id="3" name="footer">
             <a:extLst xmlns:a="http://schemas.openxmlformats.org/drawingml/2006/main">
               <a:ext uri="{FF2B5EF4-FFF2-40B4-BE49-F238E27FC236}">
-                <a16:creationId xmlns:a16="http://schemas.microsoft.com/office/drawing/2014/main" id="{49CEA5D8-05F6-4E79-85B8-0105253AD697}"/>
+                <a16:creationId xmlns:a16="http://schemas.microsoft.com/office/drawing/2014/main" id="{94AEF06A-5ADE-4A5D-B25E-1F0B334D1150}"/>
               </a:ext>
             </a:extLst>
           </p:cNvPr>
@@ -7321,7 +7321,7 @@
                 <a:ea typeface="Arial"/>
                 <a:cs typeface="Arial"/>
               </a:rPr>
-              <a:t>§2.2.4 Gemengde opgaven · Opgave 5 · Boekpagina 66–67</a:t>
+              <a:t>§2.2.4 Gemengde opgaven · Opgave 5 · Boekpagina 67–68</a:t>
             </a:r>
           </a:p>
         </p:txBody>
@@ -7331,7 +7331,7 @@
           <p:cNvPr id="4" name="slide-number">
             <a:extLst xmlns:a="http://schemas.openxmlformats.org/drawingml/2006/main">
               <a:ext uri="{FF2B5EF4-FFF2-40B4-BE49-F238E27FC236}">
-                <a16:creationId xmlns:a16="http://schemas.microsoft.com/office/drawing/2014/main" id="{FCEFDC8C-7A23-47BC-A85B-8B6A8FB291D2}"/>
+                <a16:creationId xmlns:a16="http://schemas.microsoft.com/office/drawing/2014/main" id="{BB4084BD-1F45-4A4F-B181-04554E2C7947}"/>
               </a:ext>
             </a:extLst>
           </p:cNvPr>
@@ -7633,7 +7633,7 @@
           <p:cNvPr id="6" name="Ev = %ΔQ / %ΔP">
             <a:extLst xmlns:a="http://schemas.openxmlformats.org/drawingml/2006/main">
               <a:ext uri="{FF2B5EF4-FFF2-40B4-BE49-F238E27FC236}">
-                <a16:creationId xmlns:a16="http://schemas.microsoft.com/office/drawing/2014/main" id="{2CBC66EE-BFE5-424E-A095-9B84B1DFB999}"/>
+                <a16:creationId xmlns:a16="http://schemas.microsoft.com/office/drawing/2014/main" id="{DB2897AA-B762-487E-89C3-83914C99EAAB}"/>
               </a:ext>
             </a:extLst>
           </p:cNvPr>
@@ -7690,7 +7690,7 @@
           <p:cNvPr id="7" name="De appscore 4,6/5 staat in geen van beide breuken.">
             <a:extLst xmlns:a="http://schemas.openxmlformats.org/drawingml/2006/main">
               <a:ext uri="{FF2B5EF4-FFF2-40B4-BE49-F238E27FC236}">
-                <a16:creationId xmlns:a16="http://schemas.microsoft.com/office/drawing/2014/main" id="{EC3FF0DE-642D-4C4D-AE38-11CC87FA88A8}"/>
+                <a16:creationId xmlns:a16="http://schemas.microsoft.com/office/drawing/2014/main" id="{59D8EDEF-AA58-400A-BADE-4652E09E2475}"/>
               </a:ext>
             </a:extLst>
           </p:cNvPr>
@@ -7745,7 +7745,7 @@
     </p:spTree>
     <p:extLst>
       <p:ext uri="{BB962C8B-B14F-4D97-AF65-F5344CB8AC3E}">
-        <p14:creationId xmlns:p14="http://schemas.microsoft.com/office/powerpoint/2010/main" val="1128833635"/>
+        <p14:creationId xmlns:p14="http://schemas.microsoft.com/office/powerpoint/2010/main" val="985926822"/>
       </p:ext>
     </p:extLst>
   </p:cSld>
@@ -7776,7 +7776,7 @@
           <p:cNvPr id="11" name="Opgave 5.2 · Prijsinelastische vraag">
             <a:extLst xmlns:a="http://schemas.openxmlformats.org/drawingml/2006/main">
               <a:ext uri="{FF2B5EF4-FFF2-40B4-BE49-F238E27FC236}">
-                <a16:creationId xmlns:a16="http://schemas.microsoft.com/office/drawing/2014/main" id="{C833D45C-FCC8-48E1-BA0C-FB6499E92382}"/>
+                <a16:creationId xmlns:a16="http://schemas.microsoft.com/office/drawing/2014/main" id="{2F651F5F-7FBE-40D7-80EA-FBC332C52FA7}"/>
               </a:ext>
             </a:extLst>
           </p:cNvPr>
@@ -7833,7 +7833,7 @@
           <p:cNvPr id="2" name="">
             <a:extLst xmlns:a="http://schemas.openxmlformats.org/drawingml/2006/main">
               <a:ext uri="{FF2B5EF4-FFF2-40B4-BE49-F238E27FC236}">
-                <a16:creationId xmlns:a16="http://schemas.microsoft.com/office/drawing/2014/main" id="{FF30084D-A203-4453-AE80-3EEE39B436F4}"/>
+                <a16:creationId xmlns:a16="http://schemas.microsoft.com/office/drawing/2014/main" id="{290C8113-678C-4B40-8008-307D3CF862C6}"/>
               </a:ext>
             </a:extLst>
           </p:cNvPr>
@@ -7862,7 +7862,7 @@
           <p:cNvPr id="3" name="footer">
             <a:extLst xmlns:a="http://schemas.openxmlformats.org/drawingml/2006/main">
               <a:ext uri="{FF2B5EF4-FFF2-40B4-BE49-F238E27FC236}">
-                <a16:creationId xmlns:a16="http://schemas.microsoft.com/office/drawing/2014/main" id="{09C5E8DA-1868-41F7-ACC2-8C96E0A1C0F8}"/>
+                <a16:creationId xmlns:a16="http://schemas.microsoft.com/office/drawing/2014/main" id="{E065414A-AEAA-4F99-B743-A22E38752D4C}"/>
               </a:ext>
             </a:extLst>
           </p:cNvPr>
@@ -7909,7 +7909,7 @@
                 <a:ea typeface="Arial"/>
                 <a:cs typeface="Arial"/>
               </a:rPr>
-              <a:t>§2.2.4 Gemengde opgaven · Opgave 5 · Boekpagina 66–67</a:t>
+              <a:t>§2.2.4 Gemengde opgaven · Opgave 5 · Boekpagina 67–68</a:t>
             </a:r>
           </a:p>
         </p:txBody>
@@ -7919,7 +7919,7 @@
           <p:cNvPr id="4" name="slide-number">
             <a:extLst xmlns:a="http://schemas.openxmlformats.org/drawingml/2006/main">
               <a:ext uri="{FF2B5EF4-FFF2-40B4-BE49-F238E27FC236}">
-                <a16:creationId xmlns:a16="http://schemas.microsoft.com/office/drawing/2014/main" id="{C5DA58BB-502E-4E67-ABDC-D61B484B2991}"/>
+                <a16:creationId xmlns:a16="http://schemas.microsoft.com/office/drawing/2014/main" id="{6F45CD37-A0DA-43F6-AE3A-8BF2274F525D}"/>
               </a:ext>
             </a:extLst>
           </p:cNvPr>
@@ -7976,7 +7976,7 @@
           <p:cNvPr id="5" name="%ΔP = (12 − 10) / 10 × 100% = +20%">
             <a:extLst xmlns:a="http://schemas.openxmlformats.org/drawingml/2006/main">
               <a:ext uri="{FF2B5EF4-FFF2-40B4-BE49-F238E27FC236}">
-                <a16:creationId xmlns:a16="http://schemas.microsoft.com/office/drawing/2014/main" id="{649C21C9-5DF4-47A1-8B18-77BA3A0FEAE9}"/>
+                <a16:creationId xmlns:a16="http://schemas.microsoft.com/office/drawing/2014/main" id="{78026EED-DBA7-42E8-AB68-687611B8315B}"/>
               </a:ext>
             </a:extLst>
           </p:cNvPr>
@@ -8033,7 +8033,7 @@
           <p:cNvPr id="6" name="%ΔQ = (43.000 − 50.000) / 50.000 × 100% = −14%">
             <a:extLst xmlns:a="http://schemas.openxmlformats.org/drawingml/2006/main">
               <a:ext uri="{FF2B5EF4-FFF2-40B4-BE49-F238E27FC236}">
-                <a16:creationId xmlns:a16="http://schemas.microsoft.com/office/drawing/2014/main" id="{D810DABD-0720-4CB3-BE54-98C4644557D8}"/>
+                <a16:creationId xmlns:a16="http://schemas.microsoft.com/office/drawing/2014/main" id="{FD4D0AF7-D89C-4A22-A5F8-244D47360022}"/>
               </a:ext>
             </a:extLst>
           </p:cNvPr>
@@ -8090,7 +8090,7 @@
           <p:cNvPr id="7" name="Controle: Ev = −14% / +20% = −0,7">
             <a:extLst xmlns:a="http://schemas.openxmlformats.org/drawingml/2006/main">
               <a:ext uri="{FF2B5EF4-FFF2-40B4-BE49-F238E27FC236}">
-                <a16:creationId xmlns:a16="http://schemas.microsoft.com/office/drawing/2014/main" id="{D42A89A3-C1B5-4D04-B2C0-CDFA12797583}"/>
+                <a16:creationId xmlns:a16="http://schemas.microsoft.com/office/drawing/2014/main" id="{EC2E028D-307B-4E46-A219-98DF0A8C8BA6}"/>
               </a:ext>
             </a:extLst>
           </p:cNvPr>
@@ -8147,7 +8147,7 @@
           <p:cNvPr id="8" name="">
             <a:extLst xmlns:a="http://schemas.openxmlformats.org/drawingml/2006/main">
               <a:ext uri="{FF2B5EF4-FFF2-40B4-BE49-F238E27FC236}">
-                <a16:creationId xmlns:a16="http://schemas.microsoft.com/office/drawing/2014/main" id="{62558299-1F3B-49CA-BB11-3A9689432674}"/>
+                <a16:creationId xmlns:a16="http://schemas.microsoft.com/office/drawing/2014/main" id="{F9828B5C-48B9-47E4-BBA6-6303B105B099}"/>
               </a:ext>
             </a:extLst>
           </p:cNvPr>
@@ -8176,7 +8176,7 @@
           <p:cNvPr id="9" name="−1 &lt; −0,7 &lt; 0 → prijsinelastische vraag">
             <a:extLst xmlns:a="http://schemas.openxmlformats.org/drawingml/2006/main">
               <a:ext uri="{FF2B5EF4-FFF2-40B4-BE49-F238E27FC236}">
-                <a16:creationId xmlns:a16="http://schemas.microsoft.com/office/drawing/2014/main" id="{33EE3DE4-A18F-45E6-B20F-31D98C803984}"/>
+                <a16:creationId xmlns:a16="http://schemas.microsoft.com/office/drawing/2014/main" id="{80BEEE38-0FA7-49CC-9DFB-D8130663860B}"/>
               </a:ext>
             </a:extLst>
           </p:cNvPr>
@@ -8233,7 +8233,7 @@
           <p:cNvPr id="10" name="Q reageert 0,7 maal zo sterk, in tegengestelde richting.">
             <a:extLst xmlns:a="http://schemas.openxmlformats.org/drawingml/2006/main">
               <a:ext uri="{FF2B5EF4-FFF2-40B4-BE49-F238E27FC236}">
-                <a16:creationId xmlns:a16="http://schemas.microsoft.com/office/drawing/2014/main" id="{7AD8237C-F0BF-41B0-B894-B1591C40B093}"/>
+                <a16:creationId xmlns:a16="http://schemas.microsoft.com/office/drawing/2014/main" id="{D92BF7B1-8D02-43E1-B603-2E37F580769C}"/>
               </a:ext>
             </a:extLst>
           </p:cNvPr>
@@ -8288,7 +8288,7 @@
     </p:spTree>
     <p:extLst>
       <p:ext uri="{BB962C8B-B14F-4D97-AF65-F5344CB8AC3E}">
-        <p14:creationId xmlns:p14="http://schemas.microsoft.com/office/powerpoint/2010/main" val="649955609"/>
+        <p14:creationId xmlns:p14="http://schemas.microsoft.com/office/powerpoint/2010/main" val="2063178104"/>
       </p:ext>
     </p:extLst>
   </p:cSld>
@@ -8319,7 +8319,7 @@
           <p:cNvPr id="9" name="Opgave 5.3 · Maandomzet">
             <a:extLst xmlns:a="http://schemas.openxmlformats.org/drawingml/2006/main">
               <a:ext uri="{FF2B5EF4-FFF2-40B4-BE49-F238E27FC236}">
-                <a16:creationId xmlns:a16="http://schemas.microsoft.com/office/drawing/2014/main" id="{5EDFA63B-8F98-42FF-981D-C8741291AAB0}"/>
+                <a16:creationId xmlns:a16="http://schemas.microsoft.com/office/drawing/2014/main" id="{C5C8AA15-18BA-4AC9-8A9D-F97FBBE235E4}"/>
               </a:ext>
             </a:extLst>
           </p:cNvPr>
@@ -8376,7 +8376,7 @@
           <p:cNvPr id="2" name="">
             <a:extLst xmlns:a="http://schemas.openxmlformats.org/drawingml/2006/main">
               <a:ext uri="{FF2B5EF4-FFF2-40B4-BE49-F238E27FC236}">
-                <a16:creationId xmlns:a16="http://schemas.microsoft.com/office/drawing/2014/main" id="{FAA86657-DE0E-4D82-A487-AB6F7722F712}"/>
+                <a16:creationId xmlns:a16="http://schemas.microsoft.com/office/drawing/2014/main" id="{A8428222-1C7C-4028-A178-B12F1DBE4F62}"/>
               </a:ext>
             </a:extLst>
           </p:cNvPr>
@@ -8405,7 +8405,7 @@
           <p:cNvPr id="3" name="footer">
             <a:extLst xmlns:a="http://schemas.openxmlformats.org/drawingml/2006/main">
               <a:ext uri="{FF2B5EF4-FFF2-40B4-BE49-F238E27FC236}">
-                <a16:creationId xmlns:a16="http://schemas.microsoft.com/office/drawing/2014/main" id="{97CF609C-6BF9-4979-81E5-0CF394CD8926}"/>
+                <a16:creationId xmlns:a16="http://schemas.microsoft.com/office/drawing/2014/main" id="{525A6427-6FCC-4467-AAC5-ECACE63214AD}"/>
               </a:ext>
             </a:extLst>
           </p:cNvPr>
@@ -8452,7 +8452,7 @@
                 <a:ea typeface="Arial"/>
                 <a:cs typeface="Arial"/>
               </a:rPr>
-              <a:t>§2.2.4 Gemengde opgaven · Opgave 5 · Boekpagina 66–67</a:t>
+              <a:t>§2.2.4 Gemengde opgaven · Opgave 5 · Boekpagina 67–68</a:t>
             </a:r>
           </a:p>
         </p:txBody>
@@ -8462,7 +8462,7 @@
           <p:cNvPr id="4" name="slide-number">
             <a:extLst xmlns:a="http://schemas.openxmlformats.org/drawingml/2006/main">
               <a:ext uri="{FF2B5EF4-FFF2-40B4-BE49-F238E27FC236}">
-                <a16:creationId xmlns:a16="http://schemas.microsoft.com/office/drawing/2014/main" id="{33C9DE7E-870C-4753-95F9-D040B26DDFEF}"/>
+                <a16:creationId xmlns:a16="http://schemas.microsoft.com/office/drawing/2014/main" id="{E13623C2-C4D3-46AE-8ED5-6FFA674C0BB4}"/>
               </a:ext>
             </a:extLst>
           </p:cNvPr>
@@ -8519,7 +8519,7 @@
           <p:cNvPr id="5" name="TO = P × Q">
             <a:extLst xmlns:a="http://schemas.openxmlformats.org/drawingml/2006/main">
               <a:ext uri="{FF2B5EF4-FFF2-40B4-BE49-F238E27FC236}">
-                <a16:creationId xmlns:a16="http://schemas.microsoft.com/office/drawing/2014/main" id="{0F37993D-A7EE-4DCB-BF70-708154BD3C5D}"/>
+                <a16:creationId xmlns:a16="http://schemas.microsoft.com/office/drawing/2014/main" id="{B8DA36BF-82D2-4D0F-8D8C-52A6D3EBA0D8}"/>
               </a:ext>
             </a:extLst>
           </p:cNvPr>
@@ -8821,7 +8821,7 @@
           <p:cNvPr id="7" name="ΔTO = 516.000 − 500.000 = +€ 16.000 per maand">
             <a:extLst xmlns:a="http://schemas.openxmlformats.org/drawingml/2006/main">
               <a:ext uri="{FF2B5EF4-FFF2-40B4-BE49-F238E27FC236}">
-                <a16:creationId xmlns:a16="http://schemas.microsoft.com/office/drawing/2014/main" id="{90B4781E-0E23-41DB-AD11-0BD86C3F85DF}"/>
+                <a16:creationId xmlns:a16="http://schemas.microsoft.com/office/drawing/2014/main" id="{CB067491-DA4E-468C-B14C-5E79BCA6E1B3}"/>
               </a:ext>
             </a:extLst>
           </p:cNvPr>
@@ -8878,7 +8878,7 @@
           <p:cNvPr id="8" name="De hogere prijs compenseert hier het verlies aan abonnees.">
             <a:extLst xmlns:a="http://schemas.openxmlformats.org/drawingml/2006/main">
               <a:ext uri="{FF2B5EF4-FFF2-40B4-BE49-F238E27FC236}">
-                <a16:creationId xmlns:a16="http://schemas.microsoft.com/office/drawing/2014/main" id="{0CF0B751-E305-4E4D-91AF-1CF86BF179D8}"/>
+                <a16:creationId xmlns:a16="http://schemas.microsoft.com/office/drawing/2014/main" id="{13ECABAD-7F70-48A0-9DD5-3DB7823D3F4E}"/>
               </a:ext>
             </a:extLst>
           </p:cNvPr>
@@ -8933,7 +8933,7 @@
     </p:spTree>
     <p:extLst>
       <p:ext uri="{BB962C8B-B14F-4D97-AF65-F5344CB8AC3E}">
-        <p14:creationId xmlns:p14="http://schemas.microsoft.com/office/powerpoint/2010/main" val="346032610"/>
+        <p14:creationId xmlns:p14="http://schemas.microsoft.com/office/powerpoint/2010/main" val="882356200"/>
       </p:ext>
     </p:extLst>
   </p:cSld>
@@ -8964,7 +8964,7 @@
           <p:cNvPr id="8" name="Opgave 5.4 · Inkomenselasticiteit">
             <a:extLst xmlns:a="http://schemas.openxmlformats.org/drawingml/2006/main">
               <a:ext uri="{FF2B5EF4-FFF2-40B4-BE49-F238E27FC236}">
-                <a16:creationId xmlns:a16="http://schemas.microsoft.com/office/drawing/2014/main" id="{28F5103E-F707-4BB7-BC44-460026EA002C}"/>
+                <a16:creationId xmlns:a16="http://schemas.microsoft.com/office/drawing/2014/main" id="{993F2436-68D2-4BDB-9135-75D34EABBFE2}"/>
               </a:ext>
             </a:extLst>
           </p:cNvPr>
@@ -9021,7 +9021,7 @@
           <p:cNvPr id="2" name="">
             <a:extLst xmlns:a="http://schemas.openxmlformats.org/drawingml/2006/main">
               <a:ext uri="{FF2B5EF4-FFF2-40B4-BE49-F238E27FC236}">
-                <a16:creationId xmlns:a16="http://schemas.microsoft.com/office/drawing/2014/main" id="{2B2E3CD9-7E98-448D-BF32-B1AE4BB52870}"/>
+                <a16:creationId xmlns:a16="http://schemas.microsoft.com/office/drawing/2014/main" id="{77E7E337-4A71-427C-9E37-2FFA562D3CDC}"/>
               </a:ext>
             </a:extLst>
           </p:cNvPr>
@@ -9050,7 +9050,7 @@
           <p:cNvPr id="3" name="footer">
             <a:extLst xmlns:a="http://schemas.openxmlformats.org/drawingml/2006/main">
               <a:ext uri="{FF2B5EF4-FFF2-40B4-BE49-F238E27FC236}">
-                <a16:creationId xmlns:a16="http://schemas.microsoft.com/office/drawing/2014/main" id="{D0C7D122-7B52-4F23-9735-139F3E008789}"/>
+                <a16:creationId xmlns:a16="http://schemas.microsoft.com/office/drawing/2014/main" id="{33A7BB4C-15D9-4450-818F-64DDA1B5A4D3}"/>
               </a:ext>
             </a:extLst>
           </p:cNvPr>
@@ -9097,7 +9097,7 @@
                 <a:ea typeface="Arial"/>
                 <a:cs typeface="Arial"/>
               </a:rPr>
-              <a:t>§2.2.4 Gemengde opgaven · Opgave 5 · Boekpagina 66–67</a:t>
+              <a:t>§2.2.4 Gemengde opgaven · Opgave 5 · Boekpagina 67–68</a:t>
             </a:r>
           </a:p>
         </p:txBody>
@@ -9107,7 +9107,7 @@
           <p:cNvPr id="4" name="slide-number">
             <a:extLst xmlns:a="http://schemas.openxmlformats.org/drawingml/2006/main">
               <a:ext uri="{FF2B5EF4-FFF2-40B4-BE49-F238E27FC236}">
-                <a16:creationId xmlns:a16="http://schemas.microsoft.com/office/drawing/2014/main" id="{FA727063-9B51-4788-A5FD-D64586B67001}"/>
+                <a16:creationId xmlns:a16="http://schemas.microsoft.com/office/drawing/2014/main" id="{9C8B92CF-0629-459E-A2D3-90F34E1EFACA}"/>
               </a:ext>
             </a:extLst>
           </p:cNvPr>
@@ -9164,7 +9164,7 @@
           <p:cNvPr id="5" name="Ei = %ΔQ / %ΔY">
             <a:extLst xmlns:a="http://schemas.openxmlformats.org/drawingml/2006/main">
               <a:ext uri="{FF2B5EF4-FFF2-40B4-BE49-F238E27FC236}">
-                <a16:creationId xmlns:a16="http://schemas.microsoft.com/office/drawing/2014/main" id="{3A4999D7-6170-4B25-AA79-43D0275BE9A8}"/>
+                <a16:creationId xmlns:a16="http://schemas.microsoft.com/office/drawing/2014/main" id="{280A8231-1AE5-436F-B56C-78D93878BEA5}"/>
               </a:ext>
             </a:extLst>
           </p:cNvPr>
@@ -9479,7 +9479,7 @@
           <p:cNvPr id="7" name="Premium: Q groeit relatief sterker dan Y.&#10;Budget: meer inkom">
             <a:extLst xmlns:a="http://schemas.openxmlformats.org/drawingml/2006/main">
               <a:ext uri="{FF2B5EF4-FFF2-40B4-BE49-F238E27FC236}">
-                <a16:creationId xmlns:a16="http://schemas.microsoft.com/office/drawing/2014/main" id="{F9AB422B-AEB5-4655-96AA-533DD2ACC0CA}"/>
+                <a16:creationId xmlns:a16="http://schemas.microsoft.com/office/drawing/2014/main" id="{904E2122-8415-4D06-8B87-566E385E6348}"/>
               </a:ext>
             </a:extLst>
           </p:cNvPr>
@@ -9557,7 +9557,7 @@
     </p:spTree>
     <p:extLst>
       <p:ext uri="{BB962C8B-B14F-4D97-AF65-F5344CB8AC3E}">
-        <p14:creationId xmlns:p14="http://schemas.microsoft.com/office/powerpoint/2010/main" val="2003934590"/>
+        <p14:creationId xmlns:p14="http://schemas.microsoft.com/office/powerpoint/2010/main" val="771682862"/>
       </p:ext>
     </p:extLst>
   </p:cSld>
@@ -9588,7 +9588,7 @@
           <p:cNvPr id="10" name="Opgave 5.4 · Kruislingse elasticiteit">
             <a:extLst xmlns:a="http://schemas.openxmlformats.org/drawingml/2006/main">
               <a:ext uri="{FF2B5EF4-FFF2-40B4-BE49-F238E27FC236}">
-                <a16:creationId xmlns:a16="http://schemas.microsoft.com/office/drawing/2014/main" id="{90CD95DC-AF66-4592-B40D-00EA39FE99A1}"/>
+                <a16:creationId xmlns:a16="http://schemas.microsoft.com/office/drawing/2014/main" id="{2C5EAFEA-37E3-4707-B9C6-733C4354C832}"/>
               </a:ext>
             </a:extLst>
           </p:cNvPr>
@@ -9645,7 +9645,7 @@
           <p:cNvPr id="2" name="">
             <a:extLst xmlns:a="http://schemas.openxmlformats.org/drawingml/2006/main">
               <a:ext uri="{FF2B5EF4-FFF2-40B4-BE49-F238E27FC236}">
-                <a16:creationId xmlns:a16="http://schemas.microsoft.com/office/drawing/2014/main" id="{AA5A4510-43CA-401B-8B93-2CC59ADFAD37}"/>
+                <a16:creationId xmlns:a16="http://schemas.microsoft.com/office/drawing/2014/main" id="{24D93379-14C8-4799-8D0B-8E72A99008A1}"/>
               </a:ext>
             </a:extLst>
           </p:cNvPr>
@@ -9674,7 +9674,7 @@
           <p:cNvPr id="3" name="footer">
             <a:extLst xmlns:a="http://schemas.openxmlformats.org/drawingml/2006/main">
               <a:ext uri="{FF2B5EF4-FFF2-40B4-BE49-F238E27FC236}">
-                <a16:creationId xmlns:a16="http://schemas.microsoft.com/office/drawing/2014/main" id="{81A6E81A-859E-448C-A85B-BFDF4A8684BC}"/>
+                <a16:creationId xmlns:a16="http://schemas.microsoft.com/office/drawing/2014/main" id="{0E979745-1326-4FA3-82DA-0163AFAB87F2}"/>
               </a:ext>
             </a:extLst>
           </p:cNvPr>
@@ -9721,7 +9721,7 @@
                 <a:ea typeface="Arial"/>
                 <a:cs typeface="Arial"/>
               </a:rPr>
-              <a:t>§2.2.4 Gemengde opgaven · Opgave 5 · Boekpagina 66–67</a:t>
+              <a:t>§2.2.4 Gemengde opgaven · Opgave 5 · Boekpagina 67–68</a:t>
             </a:r>
           </a:p>
         </p:txBody>
@@ -9731,7 +9731,7 @@
           <p:cNvPr id="4" name="slide-number">
             <a:extLst xmlns:a="http://schemas.openxmlformats.org/drawingml/2006/main">
               <a:ext uri="{FF2B5EF4-FFF2-40B4-BE49-F238E27FC236}">
-                <a16:creationId xmlns:a16="http://schemas.microsoft.com/office/drawing/2014/main" id="{CC251DAA-6556-45C6-959D-2CF9F4983FCE}"/>
+                <a16:creationId xmlns:a16="http://schemas.microsoft.com/office/drawing/2014/main" id="{5F9071E4-C03E-4257-9546-3BF645421F3E}"/>
               </a:ext>
             </a:extLst>
           </p:cNvPr>
@@ -9788,7 +9788,7 @@
           <p:cNvPr id="5" name="Teller: vraag StreamPlus · Noemer: prijs concurrent">
             <a:extLst xmlns:a="http://schemas.openxmlformats.org/drawingml/2006/main">
               <a:ext uri="{FF2B5EF4-FFF2-40B4-BE49-F238E27FC236}">
-                <a16:creationId xmlns:a16="http://schemas.microsoft.com/office/drawing/2014/main" id="{E51D3553-97D6-4F9A-A942-4A3B601D1E95}"/>
+                <a16:creationId xmlns:a16="http://schemas.microsoft.com/office/drawing/2014/main" id="{0DC97E74-AD77-4D52-A9FA-A52DBE220CFE}"/>
               </a:ext>
             </a:extLst>
           </p:cNvPr>
@@ -9845,7 +9845,7 @@
           <p:cNvPr id="6" name="%ΔPc = (9 − 8) / 8 × 100% = +12,5%">
             <a:extLst xmlns:a="http://schemas.openxmlformats.org/drawingml/2006/main">
               <a:ext uri="{FF2B5EF4-FFF2-40B4-BE49-F238E27FC236}">
-                <a16:creationId xmlns:a16="http://schemas.microsoft.com/office/drawing/2014/main" id="{878B4C12-9FFC-46A7-BB48-2FAAFBE79381}"/>
+                <a16:creationId xmlns:a16="http://schemas.microsoft.com/office/drawing/2014/main" id="{84D7B4EC-88BE-4DA0-B1C2-55455E9E073F}"/>
               </a:ext>
             </a:extLst>
           </p:cNvPr>
@@ -9902,7 +9902,7 @@
           <p:cNvPr id="7" name="Ek = %ΔQ StreamPlus / %ΔPc">
             <a:extLst xmlns:a="http://schemas.openxmlformats.org/drawingml/2006/main">
               <a:ext uri="{FF2B5EF4-FFF2-40B4-BE49-F238E27FC236}">
-                <a16:creationId xmlns:a16="http://schemas.microsoft.com/office/drawing/2014/main" id="{91DA3ED9-C582-4D3F-9C23-9A7F566A44A2}"/>
+                <a16:creationId xmlns:a16="http://schemas.microsoft.com/office/drawing/2014/main" id="{F83E0692-B6F4-4659-AB93-2FC2BDE8D7BC}"/>
               </a:ext>
             </a:extLst>
           </p:cNvPr>
@@ -9959,7 +9959,7 @@
           <p:cNvPr id="8" name="Ek = +5% / +12,5% = +0,4">
             <a:extLst xmlns:a="http://schemas.openxmlformats.org/drawingml/2006/main">
               <a:ext uri="{FF2B5EF4-FFF2-40B4-BE49-F238E27FC236}">
-                <a16:creationId xmlns:a16="http://schemas.microsoft.com/office/drawing/2014/main" id="{D1F2B2D1-B79D-46E6-8F2A-D90247D0DF0F}"/>
+                <a16:creationId xmlns:a16="http://schemas.microsoft.com/office/drawing/2014/main" id="{13FEAF95-C8F5-4C93-BC67-88B6F26167AA}"/>
               </a:ext>
             </a:extLst>
           </p:cNvPr>
@@ -10016,7 +10016,7 @@
           <p:cNvPr id="9" name="StreamPlus en het concurrerende abonnement zijn substituten.">
             <a:extLst xmlns:a="http://schemas.openxmlformats.org/drawingml/2006/main">
               <a:ext uri="{FF2B5EF4-FFF2-40B4-BE49-F238E27FC236}">
-                <a16:creationId xmlns:a16="http://schemas.microsoft.com/office/drawing/2014/main" id="{30F608FE-337B-43A3-ACCE-8A63A1324C02}"/>
+                <a16:creationId xmlns:a16="http://schemas.microsoft.com/office/drawing/2014/main" id="{092C4834-AB11-45D6-9633-6490884A0903}"/>
               </a:ext>
             </a:extLst>
           </p:cNvPr>
@@ -10071,7 +10071,7 @@
     </p:spTree>
     <p:extLst>
       <p:ext uri="{BB962C8B-B14F-4D97-AF65-F5344CB8AC3E}">
-        <p14:creationId xmlns:p14="http://schemas.microsoft.com/office/powerpoint/2010/main" val="1411289857"/>
+        <p14:creationId xmlns:p14="http://schemas.microsoft.com/office/powerpoint/2010/main" val="1396934315"/>
       </p:ext>
     </p:extLst>
   </p:cSld>
@@ -10102,7 +10102,7 @@
           <p:cNvPr id="10" name="Opgave 5.5 · De beginsituatie">
             <a:extLst xmlns:a="http://schemas.openxmlformats.org/drawingml/2006/main">
               <a:ext uri="{FF2B5EF4-FFF2-40B4-BE49-F238E27FC236}">
-                <a16:creationId xmlns:a16="http://schemas.microsoft.com/office/drawing/2014/main" id="{C1FC1BD3-6A05-4CEB-9D01-41AC0C96F5CC}"/>
+                <a16:creationId xmlns:a16="http://schemas.microsoft.com/office/drawing/2014/main" id="{ABC2A190-1795-4E40-BB17-64DF31C87F6A}"/>
               </a:ext>
             </a:extLst>
           </p:cNvPr>
@@ -10159,7 +10159,7 @@
           <p:cNvPr id="2" name="">
             <a:extLst xmlns:a="http://schemas.openxmlformats.org/drawingml/2006/main">
               <a:ext uri="{FF2B5EF4-FFF2-40B4-BE49-F238E27FC236}">
-                <a16:creationId xmlns:a16="http://schemas.microsoft.com/office/drawing/2014/main" id="{FC1ED945-448B-47DB-A1C2-55EB1BAB1C9E}"/>
+                <a16:creationId xmlns:a16="http://schemas.microsoft.com/office/drawing/2014/main" id="{A11F1976-DE6D-4EEE-916D-7F6FFA84F191}"/>
               </a:ext>
             </a:extLst>
           </p:cNvPr>
@@ -10188,7 +10188,7 @@
           <p:cNvPr id="3" name="footer">
             <a:extLst xmlns:a="http://schemas.openxmlformats.org/drawingml/2006/main">
               <a:ext uri="{FF2B5EF4-FFF2-40B4-BE49-F238E27FC236}">
-                <a16:creationId xmlns:a16="http://schemas.microsoft.com/office/drawing/2014/main" id="{1DB1D5E3-EB19-4A67-8058-EB82D71C4569}"/>
+                <a16:creationId xmlns:a16="http://schemas.microsoft.com/office/drawing/2014/main" id="{F6642BCC-5F23-4500-9FD1-A9C1C5F6BA88}"/>
               </a:ext>
             </a:extLst>
           </p:cNvPr>
@@ -10235,7 +10235,7 @@
                 <a:ea typeface="Arial"/>
                 <a:cs typeface="Arial"/>
               </a:rPr>
-              <a:t>§2.2.4 Gemengde opgaven · Opgave 5 · Boekpagina 66–67</a:t>
+              <a:t>§2.2.4 Gemengde opgaven · Opgave 5 · Boekpagina 67–68</a:t>
             </a:r>
           </a:p>
         </p:txBody>
@@ -10245,7 +10245,7 @@
           <p:cNvPr id="4" name="slide-number">
             <a:extLst xmlns:a="http://schemas.openxmlformats.org/drawingml/2006/main">
               <a:ext uri="{FF2B5EF4-FFF2-40B4-BE49-F238E27FC236}">
-                <a16:creationId xmlns:a16="http://schemas.microsoft.com/office/drawing/2014/main" id="{68E4BD28-2A12-4D7F-A1F4-38CF65BE742A}"/>
+                <a16:creationId xmlns:a16="http://schemas.microsoft.com/office/drawing/2014/main" id="{7D11BFC0-0929-475D-B2C2-93D640657CF9}"/>
               </a:ext>
             </a:extLst>
           </p:cNvPr>
@@ -10302,7 +10302,7 @@
           <p:cNvPr id="5" name="Q = 12.000 − 400P + 0,1Y + 300Pc">
             <a:extLst xmlns:a="http://schemas.openxmlformats.org/drawingml/2006/main">
               <a:ext uri="{FF2B5EF4-FFF2-40B4-BE49-F238E27FC236}">
-                <a16:creationId xmlns:a16="http://schemas.microsoft.com/office/drawing/2014/main" id="{D1AD27BF-90A0-449B-ACF0-ED84F1F284A2}"/>
+                <a16:creationId xmlns:a16="http://schemas.microsoft.com/office/drawing/2014/main" id="{AF58122F-F685-4920-8588-9722BD05B147}"/>
               </a:ext>
             </a:extLst>
           </p:cNvPr>
@@ -10359,7 +10359,7 @@
           <p:cNvPr id="6" name="P = 12 · Pc = 10 · Y = 40.000">
             <a:extLst xmlns:a="http://schemas.openxmlformats.org/drawingml/2006/main">
               <a:ext uri="{FF2B5EF4-FFF2-40B4-BE49-F238E27FC236}">
-                <a16:creationId xmlns:a16="http://schemas.microsoft.com/office/drawing/2014/main" id="{5E20C2EB-774E-4CE0-83D7-EB43DDC03058}"/>
+                <a16:creationId xmlns:a16="http://schemas.microsoft.com/office/drawing/2014/main" id="{3E7D0B6A-B4A7-4994-9A33-A8ECA1ADCB69}"/>
               </a:ext>
             </a:extLst>
           </p:cNvPr>
@@ -10416,7 +10416,7 @@
           <p:cNvPr id="7" name="Q = 12.000 − 400 × 12 + 0,1 × 40.000 + 300 × 10">
             <a:extLst xmlns:a="http://schemas.openxmlformats.org/drawingml/2006/main">
               <a:ext uri="{FF2B5EF4-FFF2-40B4-BE49-F238E27FC236}">
-                <a16:creationId xmlns:a16="http://schemas.microsoft.com/office/drawing/2014/main" id="{4B9F4A6E-CED5-4ECF-9B17-7B8D48829719}"/>
+                <a16:creationId xmlns:a16="http://schemas.microsoft.com/office/drawing/2014/main" id="{47C39104-2CA8-4858-B13A-3FEB49D439EE}"/>
               </a:ext>
             </a:extLst>
           </p:cNvPr>
@@ -10473,7 +10473,7 @@
           <p:cNvPr id="8" name="Q = 12.000 − 4.800 + 4.000 + 3.000">
             <a:extLst xmlns:a="http://schemas.openxmlformats.org/drawingml/2006/main">
               <a:ext uri="{FF2B5EF4-FFF2-40B4-BE49-F238E27FC236}">
-                <a16:creationId xmlns:a16="http://schemas.microsoft.com/office/drawing/2014/main" id="{41B38328-0369-4819-9663-C4B5A01A0006}"/>
+                <a16:creationId xmlns:a16="http://schemas.microsoft.com/office/drawing/2014/main" id="{435959A8-6F2D-4585-9786-B1291A0C288D}"/>
               </a:ext>
             </a:extLst>
           </p:cNvPr>
@@ -10530,7 +10530,7 @@
           <p:cNvPr id="9" name="Q = 14.200 abonnementen per maand">
             <a:extLst xmlns:a="http://schemas.openxmlformats.org/drawingml/2006/main">
               <a:ext uri="{FF2B5EF4-FFF2-40B4-BE49-F238E27FC236}">
-                <a16:creationId xmlns:a16="http://schemas.microsoft.com/office/drawing/2014/main" id="{A7EAF306-30A5-4A7E-8435-1E86C58EFF2D}"/>
+                <a16:creationId xmlns:a16="http://schemas.microsoft.com/office/drawing/2014/main" id="{744C575A-7D58-43EB-BE1E-FA8B7186D686}"/>
               </a:ext>
             </a:extLst>
           </p:cNvPr>
@@ -10585,7 +10585,7 @@
     </p:spTree>
     <p:extLst>
       <p:ext uri="{BB962C8B-B14F-4D97-AF65-F5344CB8AC3E}">
-        <p14:creationId xmlns:p14="http://schemas.microsoft.com/office/powerpoint/2010/main" val="236312922"/>
+        <p14:creationId xmlns:p14="http://schemas.microsoft.com/office/powerpoint/2010/main" val="1149414515"/>
       </p:ext>
     </p:extLst>
   </p:cSld>
@@ -10616,7 +10616,7 @@
           <p:cNvPr id="11" name="Opgave 5.5 · Alleen Y wordt € 42.000">
             <a:extLst xmlns:a="http://schemas.openxmlformats.org/drawingml/2006/main">
               <a:ext uri="{FF2B5EF4-FFF2-40B4-BE49-F238E27FC236}">
-                <a16:creationId xmlns:a16="http://schemas.microsoft.com/office/drawing/2014/main" id="{B77E241B-04DA-4269-A12B-7C2AB2A4BD0A}"/>
+                <a16:creationId xmlns:a16="http://schemas.microsoft.com/office/drawing/2014/main" id="{894428C6-6D3B-4040-9E3A-75D9780221CE}"/>
               </a:ext>
             </a:extLst>
           </p:cNvPr>
@@ -10673,7 +10673,7 @@
           <p:cNvPr id="2" name="">
             <a:extLst xmlns:a="http://schemas.openxmlformats.org/drawingml/2006/main">
               <a:ext uri="{FF2B5EF4-FFF2-40B4-BE49-F238E27FC236}">
-                <a16:creationId xmlns:a16="http://schemas.microsoft.com/office/drawing/2014/main" id="{204FB71B-99F3-4091-BF31-00517397B189}"/>
+                <a16:creationId xmlns:a16="http://schemas.microsoft.com/office/drawing/2014/main" id="{9E9AC29D-A10D-4070-8545-FFEBBCAB25FC}"/>
               </a:ext>
             </a:extLst>
           </p:cNvPr>
@@ -10702,7 +10702,7 @@
           <p:cNvPr id="3" name="footer">
             <a:extLst xmlns:a="http://schemas.openxmlformats.org/drawingml/2006/main">
               <a:ext uri="{FF2B5EF4-FFF2-40B4-BE49-F238E27FC236}">
-                <a16:creationId xmlns:a16="http://schemas.microsoft.com/office/drawing/2014/main" id="{7E2449D8-6046-4D50-B77E-4D045634C87A}"/>
+                <a16:creationId xmlns:a16="http://schemas.microsoft.com/office/drawing/2014/main" id="{2A96C828-8705-4667-9B40-D93DD0936232}"/>
               </a:ext>
             </a:extLst>
           </p:cNvPr>
@@ -10749,7 +10749,7 @@
                 <a:ea typeface="Arial"/>
                 <a:cs typeface="Arial"/>
               </a:rPr>
-              <a:t>§2.2.4 Gemengde opgaven · Opgave 5 · Boekpagina 66–67</a:t>
+              <a:t>§2.2.4 Gemengde opgaven · Opgave 5 · Boekpagina 67–68</a:t>
             </a:r>
           </a:p>
         </p:txBody>
@@ -10759,7 +10759,7 @@
           <p:cNvPr id="4" name="slide-number">
             <a:extLst xmlns:a="http://schemas.openxmlformats.org/drawingml/2006/main">
               <a:ext uri="{FF2B5EF4-FFF2-40B4-BE49-F238E27FC236}">
-                <a16:creationId xmlns:a16="http://schemas.microsoft.com/office/drawing/2014/main" id="{C9F2139B-D36C-41D6-BAEB-52A9FFA2D11E}"/>
+                <a16:creationId xmlns:a16="http://schemas.microsoft.com/office/drawing/2014/main" id="{0C407B18-74C3-4618-AAB0-A071A2935855}"/>
               </a:ext>
             </a:extLst>
           </p:cNvPr>
@@ -10816,7 +10816,7 @@
           <p:cNvPr id="5" name="P = 12 en Pc = 10 blijven gelijk">
             <a:extLst xmlns:a="http://schemas.openxmlformats.org/drawingml/2006/main">
               <a:ext uri="{FF2B5EF4-FFF2-40B4-BE49-F238E27FC236}">
-                <a16:creationId xmlns:a16="http://schemas.microsoft.com/office/drawing/2014/main" id="{34DB37FD-2422-4C5E-AE15-5045A6E03646}"/>
+                <a16:creationId xmlns:a16="http://schemas.microsoft.com/office/drawing/2014/main" id="{E52D1AB3-9E09-4547-9E4D-F6827F20B869}"/>
               </a:ext>
             </a:extLst>
           </p:cNvPr>
@@ -10873,7 +10873,7 @@
           <p:cNvPr id="6" name="Q = 12.000 − 400 × 12 + 0,1 × 42.000 + 300 × 10">
             <a:extLst xmlns:a="http://schemas.openxmlformats.org/drawingml/2006/main">
               <a:ext uri="{FF2B5EF4-FFF2-40B4-BE49-F238E27FC236}">
-                <a16:creationId xmlns:a16="http://schemas.microsoft.com/office/drawing/2014/main" id="{19F8B876-AC8B-4391-A15B-F7731A4F6106}"/>
+                <a16:creationId xmlns:a16="http://schemas.microsoft.com/office/drawing/2014/main" id="{24F65EDC-3166-4D98-8825-B005CFB6CDC5}"/>
               </a:ext>
             </a:extLst>
           </p:cNvPr>
@@ -10930,7 +10930,7 @@
           <p:cNvPr id="7" name="Q = 12.000 − 4.800 + 4.200 + 3.000">
             <a:extLst xmlns:a="http://schemas.openxmlformats.org/drawingml/2006/main">
               <a:ext uri="{FF2B5EF4-FFF2-40B4-BE49-F238E27FC236}">
-                <a16:creationId xmlns:a16="http://schemas.microsoft.com/office/drawing/2014/main" id="{142F4764-ACA0-4BB2-92D3-CFE658450AA4}"/>
+                <a16:creationId xmlns:a16="http://schemas.microsoft.com/office/drawing/2014/main" id="{7ECAAF97-E32F-474B-857C-89A1D2CC6287}"/>
               </a:ext>
             </a:extLst>
           </p:cNvPr>
@@ -10987,7 +10987,7 @@
           <p:cNvPr id="8" name="Q = 14.400 abonnementen per maand">
             <a:extLst xmlns:a="http://schemas.openxmlformats.org/drawingml/2006/main">
               <a:ext uri="{FF2B5EF4-FFF2-40B4-BE49-F238E27FC236}">
-                <a16:creationId xmlns:a16="http://schemas.microsoft.com/office/drawing/2014/main" id="{ECF04DFA-0AB4-405C-A8F0-45231470731B}"/>
+                <a16:creationId xmlns:a16="http://schemas.microsoft.com/office/drawing/2014/main" id="{4A7479CF-B0D1-4D6A-AA85-AF2584DB74D1}"/>
               </a:ext>
             </a:extLst>
           </p:cNvPr>
@@ -11044,7 +11044,7 @@
           <p:cNvPr id="9" name="">
             <a:extLst xmlns:a="http://schemas.openxmlformats.org/drawingml/2006/main">
               <a:ext uri="{FF2B5EF4-FFF2-40B4-BE49-F238E27FC236}">
-                <a16:creationId xmlns:a16="http://schemas.microsoft.com/office/drawing/2014/main" id="{769A6B5B-3CAB-4518-9F76-8B1327A2A6CE}"/>
+                <a16:creationId xmlns:a16="http://schemas.microsoft.com/office/drawing/2014/main" id="{F9037DFE-983F-4BCC-8E5E-4B6D5278882C}"/>
               </a:ext>
             </a:extLst>
           </p:cNvPr>
@@ -11073,7 +11073,7 @@
           <p:cNvPr id="10" name="Controle: ΔQ = 0,1 × (42.000 − 40.000) = +200">
             <a:extLst xmlns:a="http://schemas.openxmlformats.org/drawingml/2006/main">
               <a:ext uri="{FF2B5EF4-FFF2-40B4-BE49-F238E27FC236}">
-                <a16:creationId xmlns:a16="http://schemas.microsoft.com/office/drawing/2014/main" id="{91FA2264-A876-4BC1-9098-82ADC8796EAE}"/>
+                <a16:creationId xmlns:a16="http://schemas.microsoft.com/office/drawing/2014/main" id="{F6651AB7-8DE2-4349-8318-F312BF21F637}"/>
               </a:ext>
             </a:extLst>
           </p:cNvPr>
@@ -11128,7 +11128,7 @@
     </p:spTree>
     <p:extLst>
       <p:ext uri="{BB962C8B-B14F-4D97-AF65-F5344CB8AC3E}">
-        <p14:creationId xmlns:p14="http://schemas.microsoft.com/office/powerpoint/2010/main" val="647747320"/>
+        <p14:creationId xmlns:p14="http://schemas.microsoft.com/office/powerpoint/2010/main" val="376837635"/>
       </p:ext>
     </p:extLst>
   </p:cSld>
@@ -11159,7 +11159,7 @@
           <p:cNvPr id="11" name="Klimwand · Prijsreactie en omzet">
             <a:extLst xmlns:a="http://schemas.openxmlformats.org/drawingml/2006/main">
               <a:ext uri="{FF2B5EF4-FFF2-40B4-BE49-F238E27FC236}">
-                <a16:creationId xmlns:a16="http://schemas.microsoft.com/office/drawing/2014/main" id="{E1F93A13-218A-47E5-A251-B482CC26EBC4}"/>
+                <a16:creationId xmlns:a16="http://schemas.microsoft.com/office/drawing/2014/main" id="{EA088BC0-315D-4D7B-89EF-C111F8922C64}"/>
               </a:ext>
             </a:extLst>
           </p:cNvPr>
@@ -11216,7 +11216,7 @@
           <p:cNvPr id="2" name="">
             <a:extLst xmlns:a="http://schemas.openxmlformats.org/drawingml/2006/main">
               <a:ext uri="{FF2B5EF4-FFF2-40B4-BE49-F238E27FC236}">
-                <a16:creationId xmlns:a16="http://schemas.microsoft.com/office/drawing/2014/main" id="{382DA163-4C8A-4E82-B13B-E9E4B5B8980E}"/>
+                <a16:creationId xmlns:a16="http://schemas.microsoft.com/office/drawing/2014/main" id="{B94DA066-2F10-4048-86CD-7E3DF9FF97D6}"/>
               </a:ext>
             </a:extLst>
           </p:cNvPr>
@@ -11245,7 +11245,7 @@
           <p:cNvPr id="3" name="footer">
             <a:extLst xmlns:a="http://schemas.openxmlformats.org/drawingml/2006/main">
               <a:ext uri="{FF2B5EF4-FFF2-40B4-BE49-F238E27FC236}">
-                <a16:creationId xmlns:a16="http://schemas.microsoft.com/office/drawing/2014/main" id="{B2DB455A-98CC-4B40-BA49-F58CE635D0A1}"/>
+                <a16:creationId xmlns:a16="http://schemas.microsoft.com/office/drawing/2014/main" id="{E9BB40B2-2CAE-4964-A754-DDF004203AB2}"/>
               </a:ext>
             </a:extLst>
           </p:cNvPr>
@@ -11302,7 +11302,7 @@
           <p:cNvPr id="4" name="slide-number">
             <a:extLst xmlns:a="http://schemas.openxmlformats.org/drawingml/2006/main">
               <a:ext uri="{FF2B5EF4-FFF2-40B4-BE49-F238E27FC236}">
-                <a16:creationId xmlns:a16="http://schemas.microsoft.com/office/drawing/2014/main" id="{CEDB8AB9-5EED-40CD-98E2-852CD830FCE8}"/>
+                <a16:creationId xmlns:a16="http://schemas.microsoft.com/office/drawing/2014/main" id="{3A054F78-9D43-4DB2-99C6-8CD84E6C0A73}"/>
               </a:ext>
             </a:extLst>
           </p:cNvPr>
@@ -11359,7 +11359,7 @@
           <p:cNvPr id="5" name="A · Dagkaarten, per maand · Andere vraagfactoren blijven gel">
             <a:extLst xmlns:a="http://schemas.openxmlformats.org/drawingml/2006/main">
               <a:ext uri="{FF2B5EF4-FFF2-40B4-BE49-F238E27FC236}">
-                <a16:creationId xmlns:a16="http://schemas.microsoft.com/office/drawing/2014/main" id="{46B51341-18F4-4732-8AC3-83CBC140D3E6}"/>
+                <a16:creationId xmlns:a16="http://schemas.microsoft.com/office/drawing/2014/main" id="{806B6A47-6378-441D-BC7B-69205202BB13}"/>
               </a:ext>
             </a:extLst>
           </p:cNvPr>
@@ -11661,7 +11661,7 @@
           <p:cNvPr id="7" name="%ΔP = (30 − 25) / 25 × 100% = +20%">
             <a:extLst xmlns:a="http://schemas.openxmlformats.org/drawingml/2006/main">
               <a:ext uri="{FF2B5EF4-FFF2-40B4-BE49-F238E27FC236}">
-                <a16:creationId xmlns:a16="http://schemas.microsoft.com/office/drawing/2014/main" id="{27319CB7-3910-4BA6-83DC-613608C9F8E2}"/>
+                <a16:creationId xmlns:a16="http://schemas.microsoft.com/office/drawing/2014/main" id="{07693611-8CA1-45C2-B400-AA773A02739C}"/>
               </a:ext>
             </a:extLst>
           </p:cNvPr>
@@ -11718,7 +11718,7 @@
           <p:cNvPr id="8" name="%ΔQ = (360 − 400) / 400 × 100% = −10%">
             <a:extLst xmlns:a="http://schemas.openxmlformats.org/drawingml/2006/main">
               <a:ext uri="{FF2B5EF4-FFF2-40B4-BE49-F238E27FC236}">
-                <a16:creationId xmlns:a16="http://schemas.microsoft.com/office/drawing/2014/main" id="{E246A357-B054-4B0D-9B9E-BEDBAE9F9A09}"/>
+                <a16:creationId xmlns:a16="http://schemas.microsoft.com/office/drawing/2014/main" id="{4A24243F-3360-4B87-A272-B080AA80548B}"/>
               </a:ext>
             </a:extLst>
           </p:cNvPr>
@@ -11775,7 +11775,7 @@
           <p:cNvPr id="9" name="Ev = −10% / +20% = −0,5 → prijsinelastisch">
             <a:extLst xmlns:a="http://schemas.openxmlformats.org/drawingml/2006/main">
               <a:ext uri="{FF2B5EF4-FFF2-40B4-BE49-F238E27FC236}">
-                <a16:creationId xmlns:a16="http://schemas.microsoft.com/office/drawing/2014/main" id="{7ECD60DE-A554-43F0-B3AB-0043DE738247}"/>
+                <a16:creationId xmlns:a16="http://schemas.microsoft.com/office/drawing/2014/main" id="{C6C34718-1E83-42BE-BD61-70A8B4EF4E5F}"/>
               </a:ext>
             </a:extLst>
           </p:cNvPr>
@@ -11832,7 +11832,7 @@
           <p:cNvPr id="10" name="TO: 25 × 400 = € 10.000 → 30 × 360 = € 10.800 per maand">
             <a:extLst xmlns:a="http://schemas.openxmlformats.org/drawingml/2006/main">
               <a:ext uri="{FF2B5EF4-FFF2-40B4-BE49-F238E27FC236}">
-                <a16:creationId xmlns:a16="http://schemas.microsoft.com/office/drawing/2014/main" id="{5F18944D-9FC6-4B6C-9DF7-383332334F26}"/>
+                <a16:creationId xmlns:a16="http://schemas.microsoft.com/office/drawing/2014/main" id="{81991696-879A-41DF-9893-2521204BF9F4}"/>
               </a:ext>
             </a:extLst>
           </p:cNvPr>
@@ -11887,7 +11887,7 @@
     </p:spTree>
     <p:extLst>
       <p:ext uri="{BB962C8B-B14F-4D97-AF65-F5344CB8AC3E}">
-        <p14:creationId xmlns:p14="http://schemas.microsoft.com/office/powerpoint/2010/main" val="610836603"/>
+        <p14:creationId xmlns:p14="http://schemas.microsoft.com/office/powerpoint/2010/main" val="1602266221"/>
       </p:ext>
     </p:extLst>
   </p:cSld>
@@ -11918,7 +11918,7 @@
           <p:cNvPr id="8" name="Opgave 5.6 · Onderbouwing van het advies">
             <a:extLst xmlns:a="http://schemas.openxmlformats.org/drawingml/2006/main">
               <a:ext uri="{FF2B5EF4-FFF2-40B4-BE49-F238E27FC236}">
-                <a16:creationId xmlns:a16="http://schemas.microsoft.com/office/drawing/2014/main" id="{BD4137A1-8FD5-492E-8829-192D05C4F0CC}"/>
+                <a16:creationId xmlns:a16="http://schemas.microsoft.com/office/drawing/2014/main" id="{15B526ED-BEF8-4BBF-85C1-E51B4324168E}"/>
               </a:ext>
             </a:extLst>
           </p:cNvPr>
@@ -11975,7 +11975,7 @@
           <p:cNvPr id="2" name="">
             <a:extLst xmlns:a="http://schemas.openxmlformats.org/drawingml/2006/main">
               <a:ext uri="{FF2B5EF4-FFF2-40B4-BE49-F238E27FC236}">
-                <a16:creationId xmlns:a16="http://schemas.microsoft.com/office/drawing/2014/main" id="{1D2076BB-1E34-4FF5-B245-66E785E8C78F}"/>
+                <a16:creationId xmlns:a16="http://schemas.microsoft.com/office/drawing/2014/main" id="{2D0E6E4D-0C2F-4762-8A60-08557A5937C8}"/>
               </a:ext>
             </a:extLst>
           </p:cNvPr>
@@ -12004,7 +12004,7 @@
           <p:cNvPr id="3" name="footer">
             <a:extLst xmlns:a="http://schemas.openxmlformats.org/drawingml/2006/main">
               <a:ext uri="{FF2B5EF4-FFF2-40B4-BE49-F238E27FC236}">
-                <a16:creationId xmlns:a16="http://schemas.microsoft.com/office/drawing/2014/main" id="{1A621D47-61B0-4B49-91DE-A54179D7B834}"/>
+                <a16:creationId xmlns:a16="http://schemas.microsoft.com/office/drawing/2014/main" id="{06F865E1-49D6-4CA7-A947-4B7745642A96}"/>
               </a:ext>
             </a:extLst>
           </p:cNvPr>
@@ -12051,7 +12051,7 @@
                 <a:ea typeface="Arial"/>
                 <a:cs typeface="Arial"/>
               </a:rPr>
-              <a:t>§2.2.4 Gemengde opgaven · Opgave 5 · Boekpagina 66–67</a:t>
+              <a:t>§2.2.4 Gemengde opgaven · Opgave 5 · Boekpagina 67–68</a:t>
             </a:r>
           </a:p>
         </p:txBody>
@@ -12061,7 +12061,7 @@
           <p:cNvPr id="4" name="slide-number">
             <a:extLst xmlns:a="http://schemas.openxmlformats.org/drawingml/2006/main">
               <a:ext uri="{FF2B5EF4-FFF2-40B4-BE49-F238E27FC236}">
-                <a16:creationId xmlns:a16="http://schemas.microsoft.com/office/drawing/2014/main" id="{E8BD0BED-BEDE-4AFD-8830-DC1C1BC60214}"/>
+                <a16:creationId xmlns:a16="http://schemas.microsoft.com/office/drawing/2014/main" id="{1199E114-3D37-4344-8C81-7678600DF22A}"/>
               </a:ext>
             </a:extLst>
           </p:cNvPr>
@@ -12389,7 +12389,7 @@
           <p:cNvPr id="6" name="Advies: onderzoek een eventuele volgende prijswijziging zorg">
             <a:extLst xmlns:a="http://schemas.openxmlformats.org/drawingml/2006/main">
               <a:ext uri="{FF2B5EF4-FFF2-40B4-BE49-F238E27FC236}">
-                <a16:creationId xmlns:a16="http://schemas.microsoft.com/office/drawing/2014/main" id="{7BD5F104-AFFE-46AD-8617-2D7CDC7D2749}"/>
+                <a16:creationId xmlns:a16="http://schemas.microsoft.com/office/drawing/2014/main" id="{7ED9FFAF-F549-4C38-885B-81F61F5B7BDA}"/>
               </a:ext>
             </a:extLst>
           </p:cNvPr>
@@ -12446,7 +12446,7 @@
           <p:cNvPr id="7" name="Koppel je aanbeveling aan deze twee bronnen.">
             <a:extLst xmlns:a="http://schemas.openxmlformats.org/drawingml/2006/main">
               <a:ext uri="{FF2B5EF4-FFF2-40B4-BE49-F238E27FC236}">
-                <a16:creationId xmlns:a16="http://schemas.microsoft.com/office/drawing/2014/main" id="{D13BF9F5-3BA5-43AF-85C9-CDEBF5CB2C38}"/>
+                <a16:creationId xmlns:a16="http://schemas.microsoft.com/office/drawing/2014/main" id="{8DB34AAA-3CF1-470D-9B6E-1B9592009AA1}"/>
               </a:ext>
             </a:extLst>
           </p:cNvPr>
@@ -12501,7 +12501,7 @@
     </p:spTree>
     <p:extLst>
       <p:ext uri="{BB962C8B-B14F-4D97-AF65-F5344CB8AC3E}">
-        <p14:creationId xmlns:p14="http://schemas.microsoft.com/office/powerpoint/2010/main" val="267021646"/>
+        <p14:creationId xmlns:p14="http://schemas.microsoft.com/office/powerpoint/2010/main" val="1708639085"/>
       </p:ext>
     </p:extLst>
   </p:cSld>
@@ -12532,7 +12532,7 @@
           <p:cNvPr id="13" name="Opgave 5.6 · Precies twee grenzen">
             <a:extLst xmlns:a="http://schemas.openxmlformats.org/drawingml/2006/main">
               <a:ext uri="{FF2B5EF4-FFF2-40B4-BE49-F238E27FC236}">
-                <a16:creationId xmlns:a16="http://schemas.microsoft.com/office/drawing/2014/main" id="{3A6D3822-E96E-459E-9203-086D43E94E14}"/>
+                <a16:creationId xmlns:a16="http://schemas.microsoft.com/office/drawing/2014/main" id="{11AB03AC-53EE-4517-8FBD-86B09A773D16}"/>
               </a:ext>
             </a:extLst>
           </p:cNvPr>
@@ -12589,7 +12589,7 @@
           <p:cNvPr id="2" name="">
             <a:extLst xmlns:a="http://schemas.openxmlformats.org/drawingml/2006/main">
               <a:ext uri="{FF2B5EF4-FFF2-40B4-BE49-F238E27FC236}">
-                <a16:creationId xmlns:a16="http://schemas.microsoft.com/office/drawing/2014/main" id="{6DCD864F-4F18-49A7-9E51-24CD5C49B9AF}"/>
+                <a16:creationId xmlns:a16="http://schemas.microsoft.com/office/drawing/2014/main" id="{E70DF8DB-68B7-418E-8B56-0EF3A4D84FC8}"/>
               </a:ext>
             </a:extLst>
           </p:cNvPr>
@@ -12618,7 +12618,7 @@
           <p:cNvPr id="3" name="footer">
             <a:extLst xmlns:a="http://schemas.openxmlformats.org/drawingml/2006/main">
               <a:ext uri="{FF2B5EF4-FFF2-40B4-BE49-F238E27FC236}">
-                <a16:creationId xmlns:a16="http://schemas.microsoft.com/office/drawing/2014/main" id="{08988498-5B55-4791-83AC-B6D322CFFC2D}"/>
+                <a16:creationId xmlns:a16="http://schemas.microsoft.com/office/drawing/2014/main" id="{F8E9E11B-B5BA-4EDA-A280-07A5DE0FA477}"/>
               </a:ext>
             </a:extLst>
           </p:cNvPr>
@@ -12665,7 +12665,7 @@
                 <a:ea typeface="Arial"/>
                 <a:cs typeface="Arial"/>
               </a:rPr>
-              <a:t>§2.2.4 Gemengde opgaven · Opgave 5 · Boekpagina 66–67</a:t>
+              <a:t>§2.2.4 Gemengde opgaven · Opgave 5 · Boekpagina 67–68</a:t>
             </a:r>
           </a:p>
         </p:txBody>
@@ -12675,7 +12675,7 @@
           <p:cNvPr id="4" name="slide-number">
             <a:extLst xmlns:a="http://schemas.openxmlformats.org/drawingml/2006/main">
               <a:ext uri="{FF2B5EF4-FFF2-40B4-BE49-F238E27FC236}">
-                <a16:creationId xmlns:a16="http://schemas.microsoft.com/office/drawing/2014/main" id="{26942CA5-82A1-4D67-AAE6-4DBDBAFB24F9}"/>
+                <a16:creationId xmlns:a16="http://schemas.microsoft.com/office/drawing/2014/main" id="{C49273B4-17BE-4068-A5C1-A52C77A5F47E}"/>
               </a:ext>
             </a:extLst>
           </p:cNvPr>
@@ -12732,7 +12732,7 @@
           <p:cNvPr id="5" name="Niet bewezen">
             <a:extLst xmlns:a="http://schemas.openxmlformats.org/drawingml/2006/main">
               <a:ext uri="{FF2B5EF4-FFF2-40B4-BE49-F238E27FC236}">
-                <a16:creationId xmlns:a16="http://schemas.microsoft.com/office/drawing/2014/main" id="{1ABBEB12-4436-4427-8083-BC676C670FAD}"/>
+                <a16:creationId xmlns:a16="http://schemas.microsoft.com/office/drawing/2014/main" id="{0BD1739E-FA23-4BDC-8000-B31862072E94}"/>
               </a:ext>
             </a:extLst>
           </p:cNvPr>
@@ -12789,7 +12789,7 @@
           <p:cNvPr id="6" name="1">
             <a:extLst xmlns:a="http://schemas.openxmlformats.org/drawingml/2006/main">
               <a:ext uri="{FF2B5EF4-FFF2-40B4-BE49-F238E27FC236}">
-                <a16:creationId xmlns:a16="http://schemas.microsoft.com/office/drawing/2014/main" id="{AC915D82-352F-45D9-8D15-E6A657B1E9C1}"/>
+                <a16:creationId xmlns:a16="http://schemas.microsoft.com/office/drawing/2014/main" id="{4969598D-6B2F-421A-A2C5-945E6A1B607F}"/>
               </a:ext>
             </a:extLst>
           </p:cNvPr>
@@ -12846,7 +12846,7 @@
           <p:cNvPr id="7" name="Dezelfde reactie bij een volgende prijsverhoging">
             <a:extLst xmlns:a="http://schemas.openxmlformats.org/drawingml/2006/main">
               <a:ext uri="{FF2B5EF4-FFF2-40B4-BE49-F238E27FC236}">
-                <a16:creationId xmlns:a16="http://schemas.microsoft.com/office/drawing/2014/main" id="{951A893C-F698-470D-9DD0-E0ADBC2872D8}"/>
+                <a16:creationId xmlns:a16="http://schemas.microsoft.com/office/drawing/2014/main" id="{7781452B-C477-4A36-BB04-C5DE440AEE3B}"/>
               </a:ext>
             </a:extLst>
           </p:cNvPr>
@@ -12903,7 +12903,7 @@
           <p:cNvPr id="8" name="De meting gaat over de onderzochte prijsstap.">
             <a:extLst xmlns:a="http://schemas.openxmlformats.org/drawingml/2006/main">
               <a:ext uri="{FF2B5EF4-FFF2-40B4-BE49-F238E27FC236}">
-                <a16:creationId xmlns:a16="http://schemas.microsoft.com/office/drawing/2014/main" id="{B605EFF8-B9B7-4E44-9236-C69E16A4E249}"/>
+                <a16:creationId xmlns:a16="http://schemas.microsoft.com/office/drawing/2014/main" id="{26A15EBD-ECEF-4BDF-BDB9-95C032B359F9}"/>
               </a:ext>
             </a:extLst>
           </p:cNvPr>
@@ -12960,7 +12960,7 @@
           <p:cNvPr id="9" name="">
             <a:extLst xmlns:a="http://schemas.openxmlformats.org/drawingml/2006/main">
               <a:ext uri="{FF2B5EF4-FFF2-40B4-BE49-F238E27FC236}">
-                <a16:creationId xmlns:a16="http://schemas.microsoft.com/office/drawing/2014/main" id="{541A4ED1-B3C6-4C23-9E27-257CE970B1EB}"/>
+                <a16:creationId xmlns:a16="http://schemas.microsoft.com/office/drawing/2014/main" id="{C15106CE-B0C7-45DD-968F-81D819F3FF1D}"/>
               </a:ext>
             </a:extLst>
           </p:cNvPr>
@@ -12989,7 +12989,7 @@
           <p:cNvPr id="10" name="2">
             <a:extLst xmlns:a="http://schemas.openxmlformats.org/drawingml/2006/main">
               <a:ext uri="{FF2B5EF4-FFF2-40B4-BE49-F238E27FC236}">
-                <a16:creationId xmlns:a16="http://schemas.microsoft.com/office/drawing/2014/main" id="{D14728C7-9693-4DC7-BB85-3B7AACF271E3}"/>
+                <a16:creationId xmlns:a16="http://schemas.microsoft.com/office/drawing/2014/main" id="{CE4E3BE7-2E39-4074-A8B7-2D24ED622873}"/>
               </a:ext>
             </a:extLst>
           </p:cNvPr>
@@ -13046,7 +13046,7 @@
           <p:cNvPr id="11" name="Een hogere winst">
             <a:extLst xmlns:a="http://schemas.openxmlformats.org/drawingml/2006/main">
               <a:ext uri="{FF2B5EF4-FFF2-40B4-BE49-F238E27FC236}">
-                <a16:creationId xmlns:a16="http://schemas.microsoft.com/office/drawing/2014/main" id="{3099F0C0-A1E5-4C07-BF94-BABBB200BDF5}"/>
+                <a16:creationId xmlns:a16="http://schemas.microsoft.com/office/drawing/2014/main" id="{2A6E47EF-9B33-4E20-897F-626097088C5B}"/>
               </a:ext>
             </a:extLst>
           </p:cNvPr>
@@ -13103,7 +13103,7 @@
           <p:cNvPr id="12" name="De kosten ontbreken: omzet alleen bewijst geen winststijging">
             <a:extLst xmlns:a="http://schemas.openxmlformats.org/drawingml/2006/main">
               <a:ext uri="{FF2B5EF4-FFF2-40B4-BE49-F238E27FC236}">
-                <a16:creationId xmlns:a16="http://schemas.microsoft.com/office/drawing/2014/main" id="{ED8365EA-FBD8-4682-9A3B-6FED64936CE7}"/>
+                <a16:creationId xmlns:a16="http://schemas.microsoft.com/office/drawing/2014/main" id="{B0EB34E4-A23C-4135-970A-B9398C1D2E96}"/>
               </a:ext>
             </a:extLst>
           </p:cNvPr>
@@ -13158,7 +13158,7 @@
     </p:spTree>
     <p:extLst>
       <p:ext uri="{BB962C8B-B14F-4D97-AF65-F5344CB8AC3E}">
-        <p14:creationId xmlns:p14="http://schemas.microsoft.com/office/powerpoint/2010/main" val="1620739731"/>
+        <p14:creationId xmlns:p14="http://schemas.microsoft.com/office/powerpoint/2010/main" val="610409135"/>
       </p:ext>
     </p:extLst>
   </p:cSld>
@@ -13189,7 +13189,7 @@
           <p:cNvPr id="14" name="Controleer en verbeter je antwoord">
             <a:extLst xmlns:a="http://schemas.openxmlformats.org/drawingml/2006/main">
               <a:ext uri="{FF2B5EF4-FFF2-40B4-BE49-F238E27FC236}">
-                <a16:creationId xmlns:a16="http://schemas.microsoft.com/office/drawing/2014/main" id="{D670C710-51AE-45B3-8CC6-1110DB68F9C5}"/>
+                <a16:creationId xmlns:a16="http://schemas.microsoft.com/office/drawing/2014/main" id="{A746BE24-3CBB-4D87-A408-3104A3285033}"/>
               </a:ext>
             </a:extLst>
           </p:cNvPr>
@@ -13246,7 +13246,7 @@
           <p:cNvPr id="2" name="">
             <a:extLst xmlns:a="http://schemas.openxmlformats.org/drawingml/2006/main">
               <a:ext uri="{FF2B5EF4-FFF2-40B4-BE49-F238E27FC236}">
-                <a16:creationId xmlns:a16="http://schemas.microsoft.com/office/drawing/2014/main" id="{0A8107AB-9F82-4D62-B842-6D04308CE938}"/>
+                <a16:creationId xmlns:a16="http://schemas.microsoft.com/office/drawing/2014/main" id="{AA52D284-2034-4DD1-A5DF-7A7BFD5808FA}"/>
               </a:ext>
             </a:extLst>
           </p:cNvPr>
@@ -13275,7 +13275,7 @@
           <p:cNvPr id="3" name="footer">
             <a:extLst xmlns:a="http://schemas.openxmlformats.org/drawingml/2006/main">
               <a:ext uri="{FF2B5EF4-FFF2-40B4-BE49-F238E27FC236}">
-                <a16:creationId xmlns:a16="http://schemas.microsoft.com/office/drawing/2014/main" id="{5DE3ED93-14C4-4733-8135-54AB33DDC263}"/>
+                <a16:creationId xmlns:a16="http://schemas.microsoft.com/office/drawing/2014/main" id="{6B770E85-4283-42D3-B58A-13509F2E25A2}"/>
               </a:ext>
             </a:extLst>
           </p:cNvPr>
@@ -13332,7 +13332,7 @@
           <p:cNvPr id="4" name="slide-number">
             <a:extLst xmlns:a="http://schemas.openxmlformats.org/drawingml/2006/main">
               <a:ext uri="{FF2B5EF4-FFF2-40B4-BE49-F238E27FC236}">
-                <a16:creationId xmlns:a16="http://schemas.microsoft.com/office/drawing/2014/main" id="{E592FCF5-2348-4A26-8D21-DF35248BE56F}"/>
+                <a16:creationId xmlns:a16="http://schemas.microsoft.com/office/drawing/2014/main" id="{EEBA5C45-2C7B-4253-8BA8-B3FC1C3D932F}"/>
               </a:ext>
             </a:extLst>
           </p:cNvPr>
@@ -13389,7 +13389,7 @@
           <p:cNvPr id="5" name="Bronkeuze">
             <a:extLst xmlns:a="http://schemas.openxmlformats.org/drawingml/2006/main">
               <a:ext uri="{FF2B5EF4-FFF2-40B4-BE49-F238E27FC236}">
-                <a16:creationId xmlns:a16="http://schemas.microsoft.com/office/drawing/2014/main" id="{83C53F41-60AE-4D74-BF94-B60D36ED4FFB}"/>
+                <a16:creationId xmlns:a16="http://schemas.microsoft.com/office/drawing/2014/main" id="{0198BB81-DD1D-400A-8BC5-B9D83F85B3F9}"/>
               </a:ext>
             </a:extLst>
           </p:cNvPr>
@@ -13446,7 +13446,7 @@
           <p:cNvPr id="6" name="A, B, C en D blijven bij hun eigen onderzoek.">
             <a:extLst xmlns:a="http://schemas.openxmlformats.org/drawingml/2006/main">
               <a:ext uri="{FF2B5EF4-FFF2-40B4-BE49-F238E27FC236}">
-                <a16:creationId xmlns:a16="http://schemas.microsoft.com/office/drawing/2014/main" id="{221A4298-C56D-46FD-86C9-4976FC314492}"/>
+                <a16:creationId xmlns:a16="http://schemas.microsoft.com/office/drawing/2014/main" id="{BB4B56DE-343A-4DA2-AE2A-B57B975601AD}"/>
               </a:ext>
             </a:extLst>
           </p:cNvPr>
@@ -13503,7 +13503,7 @@
           <p:cNvPr id="7" name="Berekeningen">
             <a:extLst xmlns:a="http://schemas.openxmlformats.org/drawingml/2006/main">
               <a:ext uri="{FF2B5EF4-FFF2-40B4-BE49-F238E27FC236}">
-                <a16:creationId xmlns:a16="http://schemas.microsoft.com/office/drawing/2014/main" id="{646C5B09-2D10-491A-B5E9-E2AB37444BEF}"/>
+                <a16:creationId xmlns:a16="http://schemas.microsoft.com/office/drawing/2014/main" id="{12A8AD2D-C17F-4D55-B711-8EF84E9C8D9D}"/>
               </a:ext>
             </a:extLst>
           </p:cNvPr>
@@ -13560,7 +13560,7 @@
           <p:cNvPr id="8" name="Oude waarde als basis; tussenstappen en eenheden.">
             <a:extLst xmlns:a="http://schemas.openxmlformats.org/drawingml/2006/main">
               <a:ext uri="{FF2B5EF4-FFF2-40B4-BE49-F238E27FC236}">
-                <a16:creationId xmlns:a16="http://schemas.microsoft.com/office/drawing/2014/main" id="{DE78671B-C16F-46E8-AFAB-781F921F3A4C}"/>
+                <a16:creationId xmlns:a16="http://schemas.microsoft.com/office/drawing/2014/main" id="{9ADBD1CD-9659-4AF6-BAED-7655C1C91BD1}"/>
               </a:ext>
             </a:extLst>
           </p:cNvPr>
@@ -13617,7 +13617,7 @@
           <p:cNvPr id="9" name="Betekenis">
             <a:extLst xmlns:a="http://schemas.openxmlformats.org/drawingml/2006/main">
               <a:ext uri="{FF2B5EF4-FFF2-40B4-BE49-F238E27FC236}">
-                <a16:creationId xmlns:a16="http://schemas.microsoft.com/office/drawing/2014/main" id="{14ECC788-DE04-45C0-BA87-9F2DCB4A10F0}"/>
+                <a16:creationId xmlns:a16="http://schemas.microsoft.com/office/drawing/2014/main" id="{A10EE03E-C7BD-4B06-B8DD-B8BD3F75E093}"/>
               </a:ext>
             </a:extLst>
           </p:cNvPr>
@@ -13674,7 +13674,7 @@
           <p:cNvPr id="10" name="Ev: sterkte en richting · Ei: categorie · Ek: twee diensten.">
             <a:extLst xmlns:a="http://schemas.openxmlformats.org/drawingml/2006/main">
               <a:ext uri="{FF2B5EF4-FFF2-40B4-BE49-F238E27FC236}">
-                <a16:creationId xmlns:a16="http://schemas.microsoft.com/office/drawing/2014/main" id="{0ECAF7C2-80E7-4B21-874B-A955D4B8D2D9}"/>
+                <a16:creationId xmlns:a16="http://schemas.microsoft.com/office/drawing/2014/main" id="{1B9CFC66-C3D6-4CF5-AF51-1982C9E8C8D4}"/>
               </a:ext>
             </a:extLst>
           </p:cNvPr>
@@ -13731,7 +13731,7 @@
           <p:cNvPr id="11" name="Advies">
             <a:extLst xmlns:a="http://schemas.openxmlformats.org/drawingml/2006/main">
               <a:ext uri="{FF2B5EF4-FFF2-40B4-BE49-F238E27FC236}">
-                <a16:creationId xmlns:a16="http://schemas.microsoft.com/office/drawing/2014/main" id="{F92175CB-C049-4780-9F4B-B9BA5C6C3B55}"/>
+                <a16:creationId xmlns:a16="http://schemas.microsoft.com/office/drawing/2014/main" id="{2B5C0AC2-FFF8-4B81-BB21-99C0FA868027}"/>
               </a:ext>
             </a:extLst>
           </p:cNvPr>
@@ -13788,7 +13788,7 @@
           <p:cNvPr id="12" name="Minstens twee bronnen en precies twee niet-bewezen conclusie">
             <a:extLst xmlns:a="http://schemas.openxmlformats.org/drawingml/2006/main">
               <a:ext uri="{FF2B5EF4-FFF2-40B4-BE49-F238E27FC236}">
-                <a16:creationId xmlns:a16="http://schemas.microsoft.com/office/drawing/2014/main" id="{6FCD1883-E4FA-4263-916B-BAB28030F3D5}"/>
+                <a16:creationId xmlns:a16="http://schemas.microsoft.com/office/drawing/2014/main" id="{1AEB5010-8937-4D8A-B701-8A8ED5A5D8F1}"/>
               </a:ext>
             </a:extLst>
           </p:cNvPr>
@@ -13845,7 +13845,7 @@
           <p:cNvPr id="13" name="Verbeter één volledige berekening of redenering.">
             <a:extLst xmlns:a="http://schemas.openxmlformats.org/drawingml/2006/main">
               <a:ext uri="{FF2B5EF4-FFF2-40B4-BE49-F238E27FC236}">
-                <a16:creationId xmlns:a16="http://schemas.microsoft.com/office/drawing/2014/main" id="{8E42490B-0999-409B-B2C9-97140C38FCDE}"/>
+                <a16:creationId xmlns:a16="http://schemas.microsoft.com/office/drawing/2014/main" id="{525BA13E-17C4-4C47-82FD-92B44E302F99}"/>
               </a:ext>
             </a:extLst>
           </p:cNvPr>
@@ -13900,7 +13900,7 @@
     </p:spTree>
     <p:extLst>
       <p:ext uri="{BB962C8B-B14F-4D97-AF65-F5344CB8AC3E}">
-        <p14:creationId xmlns:p14="http://schemas.microsoft.com/office/powerpoint/2010/main" val="208694469"/>
+        <p14:creationId xmlns:p14="http://schemas.microsoft.com/office/powerpoint/2010/main" val="270571683"/>
       </p:ext>
     </p:extLst>
   </p:cSld>
@@ -13931,7 +13931,7 @@
           <p:cNvPr id="29" name="Deze les: §2.2.4 Gemengde opgaven">
             <a:extLst xmlns:a="http://schemas.openxmlformats.org/drawingml/2006/main">
               <a:ext uri="{FF2B5EF4-FFF2-40B4-BE49-F238E27FC236}">
-                <a16:creationId xmlns:a16="http://schemas.microsoft.com/office/drawing/2014/main" id="{F79919DB-BE73-43AD-98BD-0CD9F0FEF06C}"/>
+                <a16:creationId xmlns:a16="http://schemas.microsoft.com/office/drawing/2014/main" id="{6F5BE9CA-9FFF-43C7-9FC1-C902C6B2C5F7}"/>
               </a:ext>
             </a:extLst>
           </p:cNvPr>
@@ -13988,7 +13988,7 @@
           <p:cNvPr id="2" name="">
             <a:extLst xmlns:a="http://schemas.openxmlformats.org/drawingml/2006/main">
               <a:ext uri="{FF2B5EF4-FFF2-40B4-BE49-F238E27FC236}">
-                <a16:creationId xmlns:a16="http://schemas.microsoft.com/office/drawing/2014/main" id="{F8FAFB33-DA54-4BD1-A580-3174861D03FF}"/>
+                <a16:creationId xmlns:a16="http://schemas.microsoft.com/office/drawing/2014/main" id="{F9247630-38F6-4C9B-8F57-3AAB01A8C82F}"/>
               </a:ext>
             </a:extLst>
           </p:cNvPr>
@@ -14017,7 +14017,7 @@
           <p:cNvPr id="3" name="footer">
             <a:extLst xmlns:a="http://schemas.openxmlformats.org/drawingml/2006/main">
               <a:ext uri="{FF2B5EF4-FFF2-40B4-BE49-F238E27FC236}">
-                <a16:creationId xmlns:a16="http://schemas.microsoft.com/office/drawing/2014/main" id="{4F8303B2-8B0F-49DD-B23B-4F09244D661A}"/>
+                <a16:creationId xmlns:a16="http://schemas.microsoft.com/office/drawing/2014/main" id="{C2C22BC9-C817-4C08-BD91-022DB9D11A7F}"/>
               </a:ext>
             </a:extLst>
           </p:cNvPr>
@@ -14074,7 +14074,7 @@
           <p:cNvPr id="4" name="slide-number">
             <a:extLst xmlns:a="http://schemas.openxmlformats.org/drawingml/2006/main">
               <a:ext uri="{FF2B5EF4-FFF2-40B4-BE49-F238E27FC236}">
-                <a16:creationId xmlns:a16="http://schemas.microsoft.com/office/drawing/2014/main" id="{C9BA7A0C-EC45-4D72-A504-6A1F78A1F821}"/>
+                <a16:creationId xmlns:a16="http://schemas.microsoft.com/office/drawing/2014/main" id="{C1A24F83-6B99-47CF-97A5-59C1F9E7F02D}"/>
               </a:ext>
             </a:extLst>
           </p:cNvPr>
@@ -14131,7 +14131,7 @@
           <p:cNvPr id="5" name="phase">
             <a:extLst xmlns:a="http://schemas.openxmlformats.org/drawingml/2006/main">
               <a:ext uri="{FF2B5EF4-FFF2-40B4-BE49-F238E27FC236}">
-                <a16:creationId xmlns:a16="http://schemas.microsoft.com/office/drawing/2014/main" id="{201034B7-C654-439B-A793-1E4DBF6A2B7A}"/>
+                <a16:creationId xmlns:a16="http://schemas.microsoft.com/office/drawing/2014/main" id="{190D2905-E8AB-4E3B-B7D4-272AF2B2E9D8}"/>
               </a:ext>
             </a:extLst>
           </p:cNvPr>
@@ -14188,7 +14188,7 @@
           <p:cNvPr id="6" name="Lesroute">
             <a:extLst xmlns:a="http://schemas.openxmlformats.org/drawingml/2006/main">
               <a:ext uri="{FF2B5EF4-FFF2-40B4-BE49-F238E27FC236}">
-                <a16:creationId xmlns:a16="http://schemas.microsoft.com/office/drawing/2014/main" id="{CF4B394D-541B-4279-BF20-1D0F1FC3EA61}"/>
+                <a16:creationId xmlns:a16="http://schemas.microsoft.com/office/drawing/2014/main" id="{2B07076F-ABAE-4DA5-B4DA-CC2220AE225E}"/>
               </a:ext>
             </a:extLst>
           </p:cNvPr>
@@ -14245,7 +14245,7 @@
           <p:cNvPr id="7" name="route-number-1">
             <a:extLst xmlns:a="http://schemas.openxmlformats.org/drawingml/2006/main">
               <a:ext uri="{FF2B5EF4-FFF2-40B4-BE49-F238E27FC236}">
-                <a16:creationId xmlns:a16="http://schemas.microsoft.com/office/drawing/2014/main" id="{BCEC2E67-FC18-4E44-9BEF-91278DF3910F}"/>
+                <a16:creationId xmlns:a16="http://schemas.microsoft.com/office/drawing/2014/main" id="{57B32EB3-78F9-4494-BC38-CE2F535DD6A2}"/>
               </a:ext>
             </a:extLst>
           </p:cNvPr>
@@ -14302,7 +14302,7 @@
           <p:cNvPr id="8" name="route-1">
             <a:extLst xmlns:a="http://schemas.openxmlformats.org/drawingml/2006/main">
               <a:ext uri="{FF2B5EF4-FFF2-40B4-BE49-F238E27FC236}">
-                <a16:creationId xmlns:a16="http://schemas.microsoft.com/office/drawing/2014/main" id="{07BD27CD-CF7D-4D90-BDC0-1CE117FF6B3D}"/>
+                <a16:creationId xmlns:a16="http://schemas.microsoft.com/office/drawing/2014/main" id="{F82014EC-677A-48D9-BD69-DA8149263061}"/>
               </a:ext>
             </a:extLst>
           </p:cNvPr>
@@ -14359,7 +14359,7 @@
           <p:cNvPr id="9" name="route-number-2">
             <a:extLst xmlns:a="http://schemas.openxmlformats.org/drawingml/2006/main">
               <a:ext uri="{FF2B5EF4-FFF2-40B4-BE49-F238E27FC236}">
-                <a16:creationId xmlns:a16="http://schemas.microsoft.com/office/drawing/2014/main" id="{C48F26D0-594A-45E3-85EC-073550E7FEE8}"/>
+                <a16:creationId xmlns:a16="http://schemas.microsoft.com/office/drawing/2014/main" id="{5AF3B7BD-2F9A-424C-885B-C38B4533A568}"/>
               </a:ext>
             </a:extLst>
           </p:cNvPr>
@@ -14416,7 +14416,7 @@
           <p:cNvPr id="10" name="route-2">
             <a:extLst xmlns:a="http://schemas.openxmlformats.org/drawingml/2006/main">
               <a:ext uri="{FF2B5EF4-FFF2-40B4-BE49-F238E27FC236}">
-                <a16:creationId xmlns:a16="http://schemas.microsoft.com/office/drawing/2014/main" id="{98B95729-8572-45EA-81EC-7A95CF2F3F6A}"/>
+                <a16:creationId xmlns:a16="http://schemas.microsoft.com/office/drawing/2014/main" id="{AE22D11F-4DD0-4079-81CC-94AEDCBC923E}"/>
               </a:ext>
             </a:extLst>
           </p:cNvPr>
@@ -14473,7 +14473,7 @@
           <p:cNvPr id="11" name="route-number-3">
             <a:extLst xmlns:a="http://schemas.openxmlformats.org/drawingml/2006/main">
               <a:ext uri="{FF2B5EF4-FFF2-40B4-BE49-F238E27FC236}">
-                <a16:creationId xmlns:a16="http://schemas.microsoft.com/office/drawing/2014/main" id="{495CC0A8-12C7-4577-94E6-9103DBAFF747}"/>
+                <a16:creationId xmlns:a16="http://schemas.microsoft.com/office/drawing/2014/main" id="{DD6A4C7E-5B97-4C5B-BB0A-DF06C3AD4CAC}"/>
               </a:ext>
             </a:extLst>
           </p:cNvPr>
@@ -14530,7 +14530,7 @@
           <p:cNvPr id="12" name="route-3">
             <a:extLst xmlns:a="http://schemas.openxmlformats.org/drawingml/2006/main">
               <a:ext uri="{FF2B5EF4-FFF2-40B4-BE49-F238E27FC236}">
-                <a16:creationId xmlns:a16="http://schemas.microsoft.com/office/drawing/2014/main" id="{D1E929E4-1705-42E0-B847-BFF678F06511}"/>
+                <a16:creationId xmlns:a16="http://schemas.microsoft.com/office/drawing/2014/main" id="{4D5E9170-ADBA-4320-8252-4F706B1806CE}"/>
               </a:ext>
             </a:extLst>
           </p:cNvPr>
@@ -14587,7 +14587,7 @@
           <p:cNvPr id="13" name="route-number-4">
             <a:extLst xmlns:a="http://schemas.openxmlformats.org/drawingml/2006/main">
               <a:ext uri="{FF2B5EF4-FFF2-40B4-BE49-F238E27FC236}">
-                <a16:creationId xmlns:a16="http://schemas.microsoft.com/office/drawing/2014/main" id="{EA9D3C56-BC3C-4FCA-8C77-5D1E9AEF1FFA}"/>
+                <a16:creationId xmlns:a16="http://schemas.microsoft.com/office/drawing/2014/main" id="{DEAE23DC-87D6-4226-83C9-4810DB3D4272}"/>
               </a:ext>
             </a:extLst>
           </p:cNvPr>
@@ -14644,7 +14644,7 @@
           <p:cNvPr id="14" name="route-4">
             <a:extLst xmlns:a="http://schemas.openxmlformats.org/drawingml/2006/main">
               <a:ext uri="{FF2B5EF4-FFF2-40B4-BE49-F238E27FC236}">
-                <a16:creationId xmlns:a16="http://schemas.microsoft.com/office/drawing/2014/main" id="{14D4C2E0-30C3-4E67-940C-29BF5B5A28B1}"/>
+                <a16:creationId xmlns:a16="http://schemas.microsoft.com/office/drawing/2014/main" id="{D6437013-9A9C-41AF-940E-BA1000CDA99C}"/>
               </a:ext>
             </a:extLst>
           </p:cNvPr>
@@ -14701,7 +14701,7 @@
           <p:cNvPr id="15" name="route-number-5">
             <a:extLst xmlns:a="http://schemas.openxmlformats.org/drawingml/2006/main">
               <a:ext uri="{FF2B5EF4-FFF2-40B4-BE49-F238E27FC236}">
-                <a16:creationId xmlns:a16="http://schemas.microsoft.com/office/drawing/2014/main" id="{09ACE23B-9DE4-4FEC-893C-87AA76BA9257}"/>
+                <a16:creationId xmlns:a16="http://schemas.microsoft.com/office/drawing/2014/main" id="{A7418525-7F54-42B1-B95B-67E1915CA34B}"/>
               </a:ext>
             </a:extLst>
           </p:cNvPr>
@@ -14758,7 +14758,7 @@
           <p:cNvPr id="16" name="route-5">
             <a:extLst xmlns:a="http://schemas.openxmlformats.org/drawingml/2006/main">
               <a:ext uri="{FF2B5EF4-FFF2-40B4-BE49-F238E27FC236}">
-                <a16:creationId xmlns:a16="http://schemas.microsoft.com/office/drawing/2014/main" id="{70FE25EF-026F-4582-AE10-EF8613A2373B}"/>
+                <a16:creationId xmlns:a16="http://schemas.microsoft.com/office/drawing/2014/main" id="{A263C835-BC6F-4A0D-BADE-80699ED740E1}"/>
               </a:ext>
             </a:extLst>
           </p:cNvPr>
@@ -14815,7 +14815,7 @@
           <p:cNvPr id="17" name="route-number-6">
             <a:extLst xmlns:a="http://schemas.openxmlformats.org/drawingml/2006/main">
               <a:ext uri="{FF2B5EF4-FFF2-40B4-BE49-F238E27FC236}">
-                <a16:creationId xmlns:a16="http://schemas.microsoft.com/office/drawing/2014/main" id="{5CB541D0-DFB2-4CEE-901E-AA46EB02281A}"/>
+                <a16:creationId xmlns:a16="http://schemas.microsoft.com/office/drawing/2014/main" id="{E3637ECB-5B28-4D7C-8EFC-3582E3C6CD2D}"/>
               </a:ext>
             </a:extLst>
           </p:cNvPr>
@@ -14872,7 +14872,7 @@
           <p:cNvPr id="18" name="route-6">
             <a:extLst xmlns:a="http://schemas.openxmlformats.org/drawingml/2006/main">
               <a:ext uri="{FF2B5EF4-FFF2-40B4-BE49-F238E27FC236}">
-                <a16:creationId xmlns:a16="http://schemas.microsoft.com/office/drawing/2014/main" id="{D02F54F3-5DF3-463C-8341-9B7BBDCE4BB1}"/>
+                <a16:creationId xmlns:a16="http://schemas.microsoft.com/office/drawing/2014/main" id="{A86F1BA2-DF9C-48E6-BBF9-044B902416C4}"/>
               </a:ext>
             </a:extLst>
           </p:cNvPr>
@@ -14929,7 +14929,7 @@
           <p:cNvPr id="19" name="route-number-7">
             <a:extLst xmlns:a="http://schemas.openxmlformats.org/drawingml/2006/main">
               <a:ext uri="{FF2B5EF4-FFF2-40B4-BE49-F238E27FC236}">
-                <a16:creationId xmlns:a16="http://schemas.microsoft.com/office/drawing/2014/main" id="{E4D68B8E-E095-4CC0-945B-BAE93C023FE8}"/>
+                <a16:creationId xmlns:a16="http://schemas.microsoft.com/office/drawing/2014/main" id="{04259B04-0D73-4AE3-903A-BB3CABA4E6F2}"/>
               </a:ext>
             </a:extLst>
           </p:cNvPr>
@@ -14986,7 +14986,7 @@
           <p:cNvPr id="20" name="route-7">
             <a:extLst xmlns:a="http://schemas.openxmlformats.org/drawingml/2006/main">
               <a:ext uri="{FF2B5EF4-FFF2-40B4-BE49-F238E27FC236}">
-                <a16:creationId xmlns:a16="http://schemas.microsoft.com/office/drawing/2014/main" id="{3472CB9E-4992-44F3-9DE8-E3C694C433D5}"/>
+                <a16:creationId xmlns:a16="http://schemas.microsoft.com/office/drawing/2014/main" id="{99ACC9A9-FF30-492A-90C9-84FAEFCC18A1}"/>
               </a:ext>
             </a:extLst>
           </p:cNvPr>
@@ -15043,7 +15043,7 @@
           <p:cNvPr id="21" name="Lesdoelen">
             <a:extLst xmlns:a="http://schemas.openxmlformats.org/drawingml/2006/main">
               <a:ext uri="{FF2B5EF4-FFF2-40B4-BE49-F238E27FC236}">
-                <a16:creationId xmlns:a16="http://schemas.microsoft.com/office/drawing/2014/main" id="{FDF4AD5E-99B3-4F92-98EF-1F19209C4D1D}"/>
+                <a16:creationId xmlns:a16="http://schemas.microsoft.com/office/drawing/2014/main" id="{0E149C11-E16B-4C11-835B-C8748F3487E6}"/>
               </a:ext>
             </a:extLst>
           </p:cNvPr>
@@ -15100,7 +15100,7 @@
           <p:cNvPr id="22" name="overview-goals">
             <a:extLst xmlns:a="http://schemas.openxmlformats.org/drawingml/2006/main">
               <a:ext uri="{FF2B5EF4-FFF2-40B4-BE49-F238E27FC236}">
-                <a16:creationId xmlns:a16="http://schemas.microsoft.com/office/drawing/2014/main" id="{CFA82EC9-324E-41A7-B711-E7073116DFD5}"/>
+                <a16:creationId xmlns:a16="http://schemas.microsoft.com/office/drawing/2014/main" id="{15EB4077-5229-4093-9A91-4AF10E62ACD0}"/>
               </a:ext>
             </a:extLst>
           </p:cNvPr>
@@ -15203,7 +15203,7 @@
           <p:cNvPr id="23" name="">
             <a:extLst xmlns:a="http://schemas.openxmlformats.org/drawingml/2006/main">
               <a:ext uri="{FF2B5EF4-FFF2-40B4-BE49-F238E27FC236}">
-                <a16:creationId xmlns:a16="http://schemas.microsoft.com/office/drawing/2014/main" id="{EA4364F6-02A4-44D9-8E05-1174EF24FC1A}"/>
+                <a16:creationId xmlns:a16="http://schemas.microsoft.com/office/drawing/2014/main" id="{8B82756C-8025-47F6-87BB-1B883B66F65A}"/>
               </a:ext>
             </a:extLst>
           </p:cNvPr>
@@ -15232,7 +15232,7 @@
           <p:cNvPr id="24" name="Startopdracht">
             <a:extLst xmlns:a="http://schemas.openxmlformats.org/drawingml/2006/main">
               <a:ext uri="{FF2B5EF4-FFF2-40B4-BE49-F238E27FC236}">
-                <a16:creationId xmlns:a16="http://schemas.microsoft.com/office/drawing/2014/main" id="{172E0D55-A60B-44EA-B30F-D6C0D4FDBF94}"/>
+                <a16:creationId xmlns:a16="http://schemas.microsoft.com/office/drawing/2014/main" id="{C4A88446-121B-4AB3-BB8E-79D86D0DE382}"/>
               </a:ext>
             </a:extLst>
           </p:cNvPr>
@@ -15289,7 +15289,7 @@
           <p:cNvPr id="25" name="overview-start">
             <a:extLst xmlns:a="http://schemas.openxmlformats.org/drawingml/2006/main">
               <a:ext uri="{FF2B5EF4-FFF2-40B4-BE49-F238E27FC236}">
-                <a16:creationId xmlns:a16="http://schemas.microsoft.com/office/drawing/2014/main" id="{A770C1C5-3CF9-4CAA-B8A0-3072F96F5BF1}"/>
+                <a16:creationId xmlns:a16="http://schemas.microsoft.com/office/drawing/2014/main" id="{88453B9F-F883-4782-AE38-6C145CB9FCFB}"/>
               </a:ext>
             </a:extLst>
           </p:cNvPr>
@@ -15336,7 +15336,7 @@
                 <a:ea typeface="Arial"/>
                 <a:cs typeface="Arial"/>
               </a:rPr>
-              <a:t>Pagina 64</a:t>
+              <a:t>Pagina 65</a:t>
             </a:r>
           </a:p>
           <a:p xmlns:a="http://schemas.openxmlformats.org/drawingml/2006/main">
@@ -15369,7 +15369,7 @@
           <p:cNvPr id="26" name="">
             <a:extLst xmlns:a="http://schemas.openxmlformats.org/drawingml/2006/main">
               <a:ext uri="{FF2B5EF4-FFF2-40B4-BE49-F238E27FC236}">
-                <a16:creationId xmlns:a16="http://schemas.microsoft.com/office/drawing/2014/main" id="{740755F7-4AC1-4E32-B91D-6B4C936E5B8B}"/>
+                <a16:creationId xmlns:a16="http://schemas.microsoft.com/office/drawing/2014/main" id="{9D775C05-88D1-426C-A35C-091859DDE5C2}"/>
               </a:ext>
             </a:extLst>
           </p:cNvPr>
@@ -15398,7 +15398,7 @@
           <p:cNvPr id="27" name="Huiswerk">
             <a:extLst xmlns:a="http://schemas.openxmlformats.org/drawingml/2006/main">
               <a:ext uri="{FF2B5EF4-FFF2-40B4-BE49-F238E27FC236}">
-                <a16:creationId xmlns:a16="http://schemas.microsoft.com/office/drawing/2014/main" id="{56EEC4D7-2188-4B10-90D5-101A7A472EEA}"/>
+                <a16:creationId xmlns:a16="http://schemas.microsoft.com/office/drawing/2014/main" id="{C7E27961-31B8-42F9-A284-476A846FF42A}"/>
               </a:ext>
             </a:extLst>
           </p:cNvPr>
@@ -15455,7 +15455,7 @@
           <p:cNvPr id="28" name="overview-homework">
             <a:extLst xmlns:a="http://schemas.openxmlformats.org/drawingml/2006/main">
               <a:ext uri="{FF2B5EF4-FFF2-40B4-BE49-F238E27FC236}">
-                <a16:creationId xmlns:a16="http://schemas.microsoft.com/office/drawing/2014/main" id="{7ED30095-F5C2-4CF4-9181-7D35C241961B}"/>
+                <a16:creationId xmlns:a16="http://schemas.microsoft.com/office/drawing/2014/main" id="{E79B5526-5453-4FA3-8B59-9970BE88E368}"/>
               </a:ext>
             </a:extLst>
           </p:cNvPr>
@@ -15602,7 +15602,7 @@
     </p:spTree>
     <p:extLst>
       <p:ext uri="{BB962C8B-B14F-4D97-AF65-F5344CB8AC3E}">
-        <p14:creationId xmlns:p14="http://schemas.microsoft.com/office/powerpoint/2010/main" val="1474134133"/>
+        <p14:creationId xmlns:p14="http://schemas.microsoft.com/office/powerpoint/2010/main" val="1253480189"/>
       </p:ext>
     </p:extLst>
   </p:cSld>
@@ -15633,7 +15633,7 @@
           <p:cNvPr id="9" name="Klimwand · Inkomen en een concurrent">
             <a:extLst xmlns:a="http://schemas.openxmlformats.org/drawingml/2006/main">
               <a:ext uri="{FF2B5EF4-FFF2-40B4-BE49-F238E27FC236}">
-                <a16:creationId xmlns:a16="http://schemas.microsoft.com/office/drawing/2014/main" id="{A64D02F8-98BA-4251-8851-A0ECDC631B75}"/>
+                <a16:creationId xmlns:a16="http://schemas.microsoft.com/office/drawing/2014/main" id="{E0BC0598-BAD5-4E26-87BB-7A3B552E5C65}"/>
               </a:ext>
             </a:extLst>
           </p:cNvPr>
@@ -15690,7 +15690,7 @@
           <p:cNvPr id="2" name="">
             <a:extLst xmlns:a="http://schemas.openxmlformats.org/drawingml/2006/main">
               <a:ext uri="{FF2B5EF4-FFF2-40B4-BE49-F238E27FC236}">
-                <a16:creationId xmlns:a16="http://schemas.microsoft.com/office/drawing/2014/main" id="{67EB9FF9-7A5A-487D-A481-3D03409D19B2}"/>
+                <a16:creationId xmlns:a16="http://schemas.microsoft.com/office/drawing/2014/main" id="{4EF58FC0-C54A-4A3D-84FF-528359FCB361}"/>
               </a:ext>
             </a:extLst>
           </p:cNvPr>
@@ -15719,7 +15719,7 @@
           <p:cNvPr id="3" name="footer">
             <a:extLst xmlns:a="http://schemas.openxmlformats.org/drawingml/2006/main">
               <a:ext uri="{FF2B5EF4-FFF2-40B4-BE49-F238E27FC236}">
-                <a16:creationId xmlns:a16="http://schemas.microsoft.com/office/drawing/2014/main" id="{75E682C3-93EB-4245-8FBD-7AEB35EA331E}"/>
+                <a16:creationId xmlns:a16="http://schemas.microsoft.com/office/drawing/2014/main" id="{5D953269-121F-4026-A154-584897E89A1D}"/>
               </a:ext>
             </a:extLst>
           </p:cNvPr>
@@ -15776,7 +15776,7 @@
           <p:cNvPr id="4" name="slide-number">
             <a:extLst xmlns:a="http://schemas.openxmlformats.org/drawingml/2006/main">
               <a:ext uri="{FF2B5EF4-FFF2-40B4-BE49-F238E27FC236}">
-                <a16:creationId xmlns:a16="http://schemas.microsoft.com/office/drawing/2014/main" id="{8F7E9C4C-F2E4-405D-B800-6C5004B0E566}"/>
+                <a16:creationId xmlns:a16="http://schemas.microsoft.com/office/drawing/2014/main" id="{4F0E29AB-0005-4790-917B-2829E6F7B448}"/>
               </a:ext>
             </a:extLst>
           </p:cNvPr>
@@ -15833,7 +15833,7 @@
           <p:cNvPr id="5" name="B en C · Afzonderlijke metingen; andere vraagfactoren blijve">
             <a:extLst xmlns:a="http://schemas.openxmlformats.org/drawingml/2006/main">
               <a:ext uri="{FF2B5EF4-FFF2-40B4-BE49-F238E27FC236}">
-                <a16:creationId xmlns:a16="http://schemas.microsoft.com/office/drawing/2014/main" id="{121316D3-8E87-4BAE-871A-611F4290F90E}"/>
+                <a16:creationId xmlns:a16="http://schemas.microsoft.com/office/drawing/2014/main" id="{397C9835-DE63-45DE-966F-44E439BA4D1F}"/>
               </a:ext>
             </a:extLst>
           </p:cNvPr>
@@ -16261,7 +16261,7 @@
           <p:cNvPr id="7" name="Ei: inkomen in de noemer">
             <a:extLst xmlns:a="http://schemas.openxmlformats.org/drawingml/2006/main">
               <a:ext uri="{FF2B5EF4-FFF2-40B4-BE49-F238E27FC236}">
-                <a16:creationId xmlns:a16="http://schemas.microsoft.com/office/drawing/2014/main" id="{5A517EA3-96DA-46DD-BEA6-82DAE09669F8}"/>
+                <a16:creationId xmlns:a16="http://schemas.microsoft.com/office/drawing/2014/main" id="{18BA254F-B425-49C6-AE24-50E763B254AD}"/>
               </a:ext>
             </a:extLst>
           </p:cNvPr>
@@ -16318,7 +16318,7 @@
           <p:cNvPr id="8" name="Ek: prijs van de ándere dienst">
             <a:extLst xmlns:a="http://schemas.openxmlformats.org/drawingml/2006/main">
               <a:ext uri="{FF2B5EF4-FFF2-40B4-BE49-F238E27FC236}">
-                <a16:creationId xmlns:a16="http://schemas.microsoft.com/office/drawing/2014/main" id="{D67DA0B9-B5D6-4B2B-9111-C51392488347}"/>
+                <a16:creationId xmlns:a16="http://schemas.microsoft.com/office/drawing/2014/main" id="{26D46BD0-9EDC-4019-AE54-C6D975B9BC84}"/>
               </a:ext>
             </a:extLst>
           </p:cNvPr>
@@ -16373,7 +16373,7 @@
     </p:spTree>
     <p:extLst>
       <p:ext uri="{BB962C8B-B14F-4D97-AF65-F5344CB8AC3E}">
-        <p14:creationId xmlns:p14="http://schemas.microsoft.com/office/powerpoint/2010/main" val="384954687"/>
+        <p14:creationId xmlns:p14="http://schemas.microsoft.com/office/powerpoint/2010/main" val="1546365694"/>
       </p:ext>
     </p:extLst>
   </p:cSld>
@@ -16404,7 +16404,7 @@
           <p:cNvPr id="11" name="Klimwand · Alleen het inkomen verandert">
             <a:extLst xmlns:a="http://schemas.openxmlformats.org/drawingml/2006/main">
               <a:ext uri="{FF2B5EF4-FFF2-40B4-BE49-F238E27FC236}">
-                <a16:creationId xmlns:a16="http://schemas.microsoft.com/office/drawing/2014/main" id="{F9A6509C-079F-4AFE-8A12-087E073FC14D}"/>
+                <a16:creationId xmlns:a16="http://schemas.microsoft.com/office/drawing/2014/main" id="{904909DA-9394-49AB-BCE5-AA1DDCE552E0}"/>
               </a:ext>
             </a:extLst>
           </p:cNvPr>
@@ -16461,7 +16461,7 @@
           <p:cNvPr id="2" name="">
             <a:extLst xmlns:a="http://schemas.openxmlformats.org/drawingml/2006/main">
               <a:ext uri="{FF2B5EF4-FFF2-40B4-BE49-F238E27FC236}">
-                <a16:creationId xmlns:a16="http://schemas.microsoft.com/office/drawing/2014/main" id="{5A6205DD-0FBA-4B7E-9DFC-75B63AA864D1}"/>
+                <a16:creationId xmlns:a16="http://schemas.microsoft.com/office/drawing/2014/main" id="{251338C0-716E-49F1-9316-FB666648D5D6}"/>
               </a:ext>
             </a:extLst>
           </p:cNvPr>
@@ -16490,7 +16490,7 @@
           <p:cNvPr id="3" name="footer">
             <a:extLst xmlns:a="http://schemas.openxmlformats.org/drawingml/2006/main">
               <a:ext uri="{FF2B5EF4-FFF2-40B4-BE49-F238E27FC236}">
-                <a16:creationId xmlns:a16="http://schemas.microsoft.com/office/drawing/2014/main" id="{1CDDF461-EF6A-4918-8095-D92BEE9C8BCB}"/>
+                <a16:creationId xmlns:a16="http://schemas.microsoft.com/office/drawing/2014/main" id="{B14076D6-2488-4F11-ABE5-78A457792B80}"/>
               </a:ext>
             </a:extLst>
           </p:cNvPr>
@@ -16547,7 +16547,7 @@
           <p:cNvPr id="4" name="slide-number">
             <a:extLst xmlns:a="http://schemas.openxmlformats.org/drawingml/2006/main">
               <a:ext uri="{FF2B5EF4-FFF2-40B4-BE49-F238E27FC236}">
-                <a16:creationId xmlns:a16="http://schemas.microsoft.com/office/drawing/2014/main" id="{E8858770-F8D4-4D71-B44A-15E815728130}"/>
+                <a16:creationId xmlns:a16="http://schemas.microsoft.com/office/drawing/2014/main" id="{D02F213E-1B35-4D7B-BAC1-BCA7EB9A5F89}"/>
               </a:ext>
             </a:extLst>
           </p:cNvPr>
@@ -16604,7 +16604,7 @@
           <p:cNvPr id="5" name="D · Regionaal model: Q = 200 − 2P + 0,01Y + 3Pc">
             <a:extLst xmlns:a="http://schemas.openxmlformats.org/drawingml/2006/main">
               <a:ext uri="{FF2B5EF4-FFF2-40B4-BE49-F238E27FC236}">
-                <a16:creationId xmlns:a16="http://schemas.microsoft.com/office/drawing/2014/main" id="{6EEB8697-4504-4D82-8284-C0A4EC7E3CE8}"/>
+                <a16:creationId xmlns:a16="http://schemas.microsoft.com/office/drawing/2014/main" id="{C8DE86AA-98D3-4647-B7A7-48ED84F71EA8}"/>
               </a:ext>
             </a:extLst>
           </p:cNvPr>
@@ -16661,7 +16661,7 @@
           <p:cNvPr id="6" name="Q: dagkaarten per maand · P en Pc: € per dagkaart · Y: € per">
             <a:extLst xmlns:a="http://schemas.openxmlformats.org/drawingml/2006/main">
               <a:ext uri="{FF2B5EF4-FFF2-40B4-BE49-F238E27FC236}">
-                <a16:creationId xmlns:a16="http://schemas.microsoft.com/office/drawing/2014/main" id="{1CEB98A6-5743-43BE-88B0-4A42DB076383}"/>
+                <a16:creationId xmlns:a16="http://schemas.microsoft.com/office/drawing/2014/main" id="{584241CF-43C4-4EB2-B30F-529259E67B1F}"/>
               </a:ext>
             </a:extLst>
           </p:cNvPr>
@@ -17036,7 +17036,7 @@
           <p:cNvPr id="8" name="Q oud = 200 − 2 × 25 + 0,01 × 30.000 + 3 × 20 = 510">
             <a:extLst xmlns:a="http://schemas.openxmlformats.org/drawingml/2006/main">
               <a:ext uri="{FF2B5EF4-FFF2-40B4-BE49-F238E27FC236}">
-                <a16:creationId xmlns:a16="http://schemas.microsoft.com/office/drawing/2014/main" id="{BD5110BD-182C-4D4B-AE37-F2B73E7FF17C}"/>
+                <a16:creationId xmlns:a16="http://schemas.microsoft.com/office/drawing/2014/main" id="{574AA57A-50D6-404A-BC44-4C7536F9EDF5}"/>
               </a:ext>
             </a:extLst>
           </p:cNvPr>
@@ -17093,7 +17093,7 @@
           <p:cNvPr id="9" name="Q nieuw = 200 − 2 × 25 + 0,01 × 30.600 + 3 × 20 = 516">
             <a:extLst xmlns:a="http://schemas.openxmlformats.org/drawingml/2006/main">
               <a:ext uri="{FF2B5EF4-FFF2-40B4-BE49-F238E27FC236}">
-                <a16:creationId xmlns:a16="http://schemas.microsoft.com/office/drawing/2014/main" id="{2347C6DB-B84B-412E-961B-675AAEC59D1C}"/>
+                <a16:creationId xmlns:a16="http://schemas.microsoft.com/office/drawing/2014/main" id="{B6AD6292-1FDF-4AB5-9339-0C0A870A6310}"/>
               </a:ext>
             </a:extLst>
           </p:cNvPr>
@@ -17150,7 +17150,7 @@
           <p:cNvPr id="10" name="ΔQ = +6 dagkaarten per maand · P en Pc blijven gelijk">
             <a:extLst xmlns:a="http://schemas.openxmlformats.org/drawingml/2006/main">
               <a:ext uri="{FF2B5EF4-FFF2-40B4-BE49-F238E27FC236}">
-                <a16:creationId xmlns:a16="http://schemas.microsoft.com/office/drawing/2014/main" id="{7F87B1B0-FDF9-414D-854F-D3F979373FEB}"/>
+                <a16:creationId xmlns:a16="http://schemas.microsoft.com/office/drawing/2014/main" id="{6AA2BAE9-AA81-4E09-83DE-19B0801797F5}"/>
               </a:ext>
             </a:extLst>
           </p:cNvPr>
@@ -17205,7 +17205,7 @@
     </p:spTree>
     <p:extLst>
       <p:ext uri="{BB962C8B-B14F-4D97-AF65-F5344CB8AC3E}">
-        <p14:creationId xmlns:p14="http://schemas.microsoft.com/office/powerpoint/2010/main" val="1793500592"/>
+        <p14:creationId xmlns:p14="http://schemas.microsoft.com/office/powerpoint/2010/main" val="11962630"/>
       </p:ext>
     </p:extLst>
   </p:cSld>
@@ -17236,7 +17236,7 @@
           <p:cNvPr id="16" name="Klimwand · Een onderbouwd advies">
             <a:extLst xmlns:a="http://schemas.openxmlformats.org/drawingml/2006/main">
               <a:ext uri="{FF2B5EF4-FFF2-40B4-BE49-F238E27FC236}">
-                <a16:creationId xmlns:a16="http://schemas.microsoft.com/office/drawing/2014/main" id="{88357047-80D3-4C92-AA83-9FA0E43BF922}"/>
+                <a16:creationId xmlns:a16="http://schemas.microsoft.com/office/drawing/2014/main" id="{9C7A0D9A-F085-490B-94E3-F307F8F75690}"/>
               </a:ext>
             </a:extLst>
           </p:cNvPr>
@@ -17293,7 +17293,7 @@
           <p:cNvPr id="2" name="">
             <a:extLst xmlns:a="http://schemas.openxmlformats.org/drawingml/2006/main">
               <a:ext uri="{FF2B5EF4-FFF2-40B4-BE49-F238E27FC236}">
-                <a16:creationId xmlns:a16="http://schemas.microsoft.com/office/drawing/2014/main" id="{3DBFC011-7CD2-444F-BC23-46BC175D99FB}"/>
+                <a16:creationId xmlns:a16="http://schemas.microsoft.com/office/drawing/2014/main" id="{175023BC-71E5-4973-AEA5-9FE324EC6967}"/>
               </a:ext>
             </a:extLst>
           </p:cNvPr>
@@ -17322,7 +17322,7 @@
           <p:cNvPr id="3" name="footer">
             <a:extLst xmlns:a="http://schemas.openxmlformats.org/drawingml/2006/main">
               <a:ext uri="{FF2B5EF4-FFF2-40B4-BE49-F238E27FC236}">
-                <a16:creationId xmlns:a16="http://schemas.microsoft.com/office/drawing/2014/main" id="{66228CAB-C4F0-422B-B06B-E0DA2C894F18}"/>
+                <a16:creationId xmlns:a16="http://schemas.microsoft.com/office/drawing/2014/main" id="{CD6A1A71-B9EB-46BF-A087-47BD54527099}"/>
               </a:ext>
             </a:extLst>
           </p:cNvPr>
@@ -17379,7 +17379,7 @@
           <p:cNvPr id="4" name="slide-number">
             <a:extLst xmlns:a="http://schemas.openxmlformats.org/drawingml/2006/main">
               <a:ext uri="{FF2B5EF4-FFF2-40B4-BE49-F238E27FC236}">
-                <a16:creationId xmlns:a16="http://schemas.microsoft.com/office/drawing/2014/main" id="{1F01DDCE-DA10-423A-85EF-34335D55012A}"/>
+                <a16:creationId xmlns:a16="http://schemas.microsoft.com/office/drawing/2014/main" id="{10EA0D58-2546-4E45-8642-06482E261ED8}"/>
               </a:ext>
             </a:extLst>
           </p:cNvPr>
@@ -17436,7 +17436,7 @@
           <p:cNvPr id="5" name="Ondersteund · A">
             <a:extLst xmlns:a="http://schemas.openxmlformats.org/drawingml/2006/main">
               <a:ext uri="{FF2B5EF4-FFF2-40B4-BE49-F238E27FC236}">
-                <a16:creationId xmlns:a16="http://schemas.microsoft.com/office/drawing/2014/main" id="{D24A23A3-28C7-40CA-BBB4-9CE5B36434C2}"/>
+                <a16:creationId xmlns:a16="http://schemas.microsoft.com/office/drawing/2014/main" id="{EE7A3944-EC68-46A2-910A-45EE7B22626F}"/>
               </a:ext>
             </a:extLst>
           </p:cNvPr>
@@ -17493,7 +17493,7 @@
           <p:cNvPr id="6" name="De onderzochte prijsstap verhoogde de maandomzet met € 800.">
             <a:extLst xmlns:a="http://schemas.openxmlformats.org/drawingml/2006/main">
               <a:ext uri="{FF2B5EF4-FFF2-40B4-BE49-F238E27FC236}">
-                <a16:creationId xmlns:a16="http://schemas.microsoft.com/office/drawing/2014/main" id="{C5A72B22-DAC9-421E-A354-A815DD2B4F71}"/>
+                <a16:creationId xmlns:a16="http://schemas.microsoft.com/office/drawing/2014/main" id="{FAA40E18-BB03-4C54-895A-82DAD867890B}"/>
               </a:ext>
             </a:extLst>
           </p:cNvPr>
@@ -17550,7 +17550,7 @@
           <p:cNvPr id="7" name="">
             <a:extLst xmlns:a="http://schemas.openxmlformats.org/drawingml/2006/main">
               <a:ext uri="{FF2B5EF4-FFF2-40B4-BE49-F238E27FC236}">
-                <a16:creationId xmlns:a16="http://schemas.microsoft.com/office/drawing/2014/main" id="{A29EE42B-9584-4FF8-88AC-213DCCE2485A}"/>
+                <a16:creationId xmlns:a16="http://schemas.microsoft.com/office/drawing/2014/main" id="{E22A1E93-4AC9-4FA9-9667-E475E20321E1}"/>
               </a:ext>
             </a:extLst>
           </p:cNvPr>
@@ -17579,7 +17579,7 @@
           <p:cNvPr id="8" name="Tweede bron · C">
             <a:extLst xmlns:a="http://schemas.openxmlformats.org/drawingml/2006/main">
               <a:ext uri="{FF2B5EF4-FFF2-40B4-BE49-F238E27FC236}">
-                <a16:creationId xmlns:a16="http://schemas.microsoft.com/office/drawing/2014/main" id="{CB3AD2EB-BAD4-4AD1-B840-FDFF7491FD2F}"/>
+                <a16:creationId xmlns:a16="http://schemas.microsoft.com/office/drawing/2014/main" id="{34409EA7-2269-45C2-93D4-CB8C65C051F2}"/>
               </a:ext>
             </a:extLst>
           </p:cNvPr>
@@ -17636,7 +17636,7 @@
           <p:cNvPr id="9" name="De diensten zijn substituten: klanten reageren op de concurr">
             <a:extLst xmlns:a="http://schemas.openxmlformats.org/drawingml/2006/main">
               <a:ext uri="{FF2B5EF4-FFF2-40B4-BE49-F238E27FC236}">
-                <a16:creationId xmlns:a16="http://schemas.microsoft.com/office/drawing/2014/main" id="{C216CE1E-7ABC-4FAF-BEA7-DEE791DDB96C}"/>
+                <a16:creationId xmlns:a16="http://schemas.microsoft.com/office/drawing/2014/main" id="{1984C3CA-C712-41FE-9935-3A837BF037CA}"/>
               </a:ext>
             </a:extLst>
           </p:cNvPr>
@@ -17693,7 +17693,7 @@
           <p:cNvPr id="10" name="">
             <a:extLst xmlns:a="http://schemas.openxmlformats.org/drawingml/2006/main">
               <a:ext uri="{FF2B5EF4-FFF2-40B4-BE49-F238E27FC236}">
-                <a16:creationId xmlns:a16="http://schemas.microsoft.com/office/drawing/2014/main" id="{ABE3B2B4-C842-4782-90F6-8BDEFCEFB696}"/>
+                <a16:creationId xmlns:a16="http://schemas.microsoft.com/office/drawing/2014/main" id="{36E23F23-6B43-4367-AEC1-631812F9E4C8}"/>
               </a:ext>
             </a:extLst>
           </p:cNvPr>
@@ -17722,7 +17722,7 @@
           <p:cNvPr id="11" name="Advies">
             <a:extLst xmlns:a="http://schemas.openxmlformats.org/drawingml/2006/main">
               <a:ext uri="{FF2B5EF4-FFF2-40B4-BE49-F238E27FC236}">
-                <a16:creationId xmlns:a16="http://schemas.microsoft.com/office/drawing/2014/main" id="{1E981D1C-6D90-43FF-BE65-A6DE582ECD4F}"/>
+                <a16:creationId xmlns:a16="http://schemas.microsoft.com/office/drawing/2014/main" id="{58F04E67-41CB-4397-8DA0-ABBECD704045}"/>
               </a:ext>
             </a:extLst>
           </p:cNvPr>
@@ -17779,7 +17779,7 @@
           <p:cNvPr id="12" name="Onderzoek een kleine volgende prijsstap en vergelijk opnieuw">
             <a:extLst xmlns:a="http://schemas.openxmlformats.org/drawingml/2006/main">
               <a:ext uri="{FF2B5EF4-FFF2-40B4-BE49-F238E27FC236}">
-                <a16:creationId xmlns:a16="http://schemas.microsoft.com/office/drawing/2014/main" id="{26F0D733-AE79-4669-97F0-A44CF6CE09C4}"/>
+                <a16:creationId xmlns:a16="http://schemas.microsoft.com/office/drawing/2014/main" id="{5710ED7A-9139-4A2D-9455-CBA2DC56A3FE}"/>
               </a:ext>
             </a:extLst>
           </p:cNvPr>
@@ -17836,7 +17836,7 @@
           <p:cNvPr id="13" name="">
             <a:extLst xmlns:a="http://schemas.openxmlformats.org/drawingml/2006/main">
               <a:ext uri="{FF2B5EF4-FFF2-40B4-BE49-F238E27FC236}">
-                <a16:creationId xmlns:a16="http://schemas.microsoft.com/office/drawing/2014/main" id="{F66140A3-16A4-4C05-B74B-F69348CF30D5}"/>
+                <a16:creationId xmlns:a16="http://schemas.microsoft.com/office/drawing/2014/main" id="{93A2FE49-FBAA-49C4-8FC1-99949CEE3EE5}"/>
               </a:ext>
             </a:extLst>
           </p:cNvPr>
@@ -17865,7 +17865,7 @@
           <p:cNvPr id="14" name="Niet bewezen · precies twee">
             <a:extLst xmlns:a="http://schemas.openxmlformats.org/drawingml/2006/main">
               <a:ext uri="{FF2B5EF4-FFF2-40B4-BE49-F238E27FC236}">
-                <a16:creationId xmlns:a16="http://schemas.microsoft.com/office/drawing/2014/main" id="{9D7AE126-9777-4053-AE8F-6FB958DA56F2}"/>
+                <a16:creationId xmlns:a16="http://schemas.microsoft.com/office/drawing/2014/main" id="{D2B6B78C-AD21-4257-B74F-6755B8C4D764}"/>
               </a:ext>
             </a:extLst>
           </p:cNvPr>
@@ -17922,7 +17922,7 @@
           <p:cNvPr id="15" name="Dezelfde reactie bij een volgende prijsstap.&#10;Hogere winst: k">
             <a:extLst xmlns:a="http://schemas.openxmlformats.org/drawingml/2006/main">
               <a:ext uri="{FF2B5EF4-FFF2-40B4-BE49-F238E27FC236}">
-                <a16:creationId xmlns:a16="http://schemas.microsoft.com/office/drawing/2014/main" id="{28A43480-609C-499A-836F-5839ADE9853A}"/>
+                <a16:creationId xmlns:a16="http://schemas.microsoft.com/office/drawing/2014/main" id="{75A951BB-B315-4564-AE40-CF11FA591EF1}"/>
               </a:ext>
             </a:extLst>
           </p:cNvPr>
@@ -18000,7 +18000,7 @@
     </p:spTree>
     <p:extLst>
       <p:ext uri="{BB962C8B-B14F-4D97-AF65-F5344CB8AC3E}">
-        <p14:creationId xmlns:p14="http://schemas.microsoft.com/office/powerpoint/2010/main" val="1510511691"/>
+        <p14:creationId xmlns:p14="http://schemas.microsoft.com/office/powerpoint/2010/main" val="1352136215"/>
       </p:ext>
     </p:extLst>
   </p:cSld>
@@ -18031,7 +18031,7 @@
           <p:cNvPr id="29" name="Deze les: §2.2.4 Gemengde opgaven">
             <a:extLst xmlns:a="http://schemas.openxmlformats.org/drawingml/2006/main">
               <a:ext uri="{FF2B5EF4-FFF2-40B4-BE49-F238E27FC236}">
-                <a16:creationId xmlns:a16="http://schemas.microsoft.com/office/drawing/2014/main" id="{EE6F6DE1-4608-43C2-9889-4813A4F043A4}"/>
+                <a16:creationId xmlns:a16="http://schemas.microsoft.com/office/drawing/2014/main" id="{73FB4648-7EFD-43CD-81AA-802EC7164085}"/>
               </a:ext>
             </a:extLst>
           </p:cNvPr>
@@ -18088,7 +18088,7 @@
           <p:cNvPr id="2" name="">
             <a:extLst xmlns:a="http://schemas.openxmlformats.org/drawingml/2006/main">
               <a:ext uri="{FF2B5EF4-FFF2-40B4-BE49-F238E27FC236}">
-                <a16:creationId xmlns:a16="http://schemas.microsoft.com/office/drawing/2014/main" id="{1A99BF93-8A2E-4418-B34C-DF09600E67F4}"/>
+                <a16:creationId xmlns:a16="http://schemas.microsoft.com/office/drawing/2014/main" id="{8C167438-CF28-447A-A7F6-1A16D0463C47}"/>
               </a:ext>
             </a:extLst>
           </p:cNvPr>
@@ -18117,7 +18117,7 @@
           <p:cNvPr id="3" name="footer">
             <a:extLst xmlns:a="http://schemas.openxmlformats.org/drawingml/2006/main">
               <a:ext uri="{FF2B5EF4-FFF2-40B4-BE49-F238E27FC236}">
-                <a16:creationId xmlns:a16="http://schemas.microsoft.com/office/drawing/2014/main" id="{1D07F656-98FC-409C-8352-F3DD6B84487A}"/>
+                <a16:creationId xmlns:a16="http://schemas.microsoft.com/office/drawing/2014/main" id="{9957A7A2-B170-4644-8D3F-56CD44BD90B1}"/>
               </a:ext>
             </a:extLst>
           </p:cNvPr>
@@ -18174,7 +18174,7 @@
           <p:cNvPr id="4" name="slide-number">
             <a:extLst xmlns:a="http://schemas.openxmlformats.org/drawingml/2006/main">
               <a:ext uri="{FF2B5EF4-FFF2-40B4-BE49-F238E27FC236}">
-                <a16:creationId xmlns:a16="http://schemas.microsoft.com/office/drawing/2014/main" id="{5B648A9C-F026-437C-89A4-3A4519E086E0}"/>
+                <a16:creationId xmlns:a16="http://schemas.microsoft.com/office/drawing/2014/main" id="{43A35C47-8EA0-4BD8-A5E2-64FD8B0B5C02}"/>
               </a:ext>
             </a:extLst>
           </p:cNvPr>
@@ -18231,7 +18231,7 @@
           <p:cNvPr id="5" name="phase">
             <a:extLst xmlns:a="http://schemas.openxmlformats.org/drawingml/2006/main">
               <a:ext uri="{FF2B5EF4-FFF2-40B4-BE49-F238E27FC236}">
-                <a16:creationId xmlns:a16="http://schemas.microsoft.com/office/drawing/2014/main" id="{BB9C207A-F395-4CFB-AFF8-88138F9C8A7A}"/>
+                <a16:creationId xmlns:a16="http://schemas.microsoft.com/office/drawing/2014/main" id="{BC1EEC90-8028-4456-8500-A52E74AF23A6}"/>
               </a:ext>
             </a:extLst>
           </p:cNvPr>
@@ -18288,7 +18288,7 @@
           <p:cNvPr id="6" name="Lesroute">
             <a:extLst xmlns:a="http://schemas.openxmlformats.org/drawingml/2006/main">
               <a:ext uri="{FF2B5EF4-FFF2-40B4-BE49-F238E27FC236}">
-                <a16:creationId xmlns:a16="http://schemas.microsoft.com/office/drawing/2014/main" id="{FE8C3F94-C217-4AA8-AB7C-81A9037F7227}"/>
+                <a16:creationId xmlns:a16="http://schemas.microsoft.com/office/drawing/2014/main" id="{BC247720-AF9D-48AA-A8C6-082C90E89CFC}"/>
               </a:ext>
             </a:extLst>
           </p:cNvPr>
@@ -18345,7 +18345,7 @@
           <p:cNvPr id="7" name="route-number-1">
             <a:extLst xmlns:a="http://schemas.openxmlformats.org/drawingml/2006/main">
               <a:ext uri="{FF2B5EF4-FFF2-40B4-BE49-F238E27FC236}">
-                <a16:creationId xmlns:a16="http://schemas.microsoft.com/office/drawing/2014/main" id="{4DE64086-EC1C-46DD-8372-98FBF6B1ABA5}"/>
+                <a16:creationId xmlns:a16="http://schemas.microsoft.com/office/drawing/2014/main" id="{8EF28196-9816-4CBA-9FAC-DD6BF58407CE}"/>
               </a:ext>
             </a:extLst>
           </p:cNvPr>
@@ -18402,7 +18402,7 @@
           <p:cNvPr id="8" name="route-1">
             <a:extLst xmlns:a="http://schemas.openxmlformats.org/drawingml/2006/main">
               <a:ext uri="{FF2B5EF4-FFF2-40B4-BE49-F238E27FC236}">
-                <a16:creationId xmlns:a16="http://schemas.microsoft.com/office/drawing/2014/main" id="{4916F2B8-70C7-4303-852A-D864DB3F880C}"/>
+                <a16:creationId xmlns:a16="http://schemas.microsoft.com/office/drawing/2014/main" id="{F54CB391-35E7-408A-85FB-E9C5861ED079}"/>
               </a:ext>
             </a:extLst>
           </p:cNvPr>
@@ -18459,7 +18459,7 @@
           <p:cNvPr id="9" name="route-number-2">
             <a:extLst xmlns:a="http://schemas.openxmlformats.org/drawingml/2006/main">
               <a:ext uri="{FF2B5EF4-FFF2-40B4-BE49-F238E27FC236}">
-                <a16:creationId xmlns:a16="http://schemas.microsoft.com/office/drawing/2014/main" id="{D92FB595-65CA-486C-9C47-AEBB4B281646}"/>
+                <a16:creationId xmlns:a16="http://schemas.microsoft.com/office/drawing/2014/main" id="{4ED1A7EE-DD1A-48CA-9741-B641AEA3FF10}"/>
               </a:ext>
             </a:extLst>
           </p:cNvPr>
@@ -18516,7 +18516,7 @@
           <p:cNvPr id="10" name="route-2">
             <a:extLst xmlns:a="http://schemas.openxmlformats.org/drawingml/2006/main">
               <a:ext uri="{FF2B5EF4-FFF2-40B4-BE49-F238E27FC236}">
-                <a16:creationId xmlns:a16="http://schemas.microsoft.com/office/drawing/2014/main" id="{D86F8AE9-A77E-4AA9-9B3D-2F8C78E90AC3}"/>
+                <a16:creationId xmlns:a16="http://schemas.microsoft.com/office/drawing/2014/main" id="{282C26AC-76D3-4C4A-8A31-3FD8CFC92313}"/>
               </a:ext>
             </a:extLst>
           </p:cNvPr>
@@ -18573,7 +18573,7 @@
           <p:cNvPr id="11" name="route-number-3">
             <a:extLst xmlns:a="http://schemas.openxmlformats.org/drawingml/2006/main">
               <a:ext uri="{FF2B5EF4-FFF2-40B4-BE49-F238E27FC236}">
-                <a16:creationId xmlns:a16="http://schemas.microsoft.com/office/drawing/2014/main" id="{F0B6DEF7-0357-4DDC-83CD-0866A95A5C2E}"/>
+                <a16:creationId xmlns:a16="http://schemas.microsoft.com/office/drawing/2014/main" id="{B59237DB-FF22-474B-BD85-3498AD058B51}"/>
               </a:ext>
             </a:extLst>
           </p:cNvPr>
@@ -18630,7 +18630,7 @@
           <p:cNvPr id="12" name="route-3">
             <a:extLst xmlns:a="http://schemas.openxmlformats.org/drawingml/2006/main">
               <a:ext uri="{FF2B5EF4-FFF2-40B4-BE49-F238E27FC236}">
-                <a16:creationId xmlns:a16="http://schemas.microsoft.com/office/drawing/2014/main" id="{443EA0DC-7A78-4FE4-9B1A-182D9048C259}"/>
+                <a16:creationId xmlns:a16="http://schemas.microsoft.com/office/drawing/2014/main" id="{918DC3FA-53C6-41C8-8509-511FA56612E1}"/>
               </a:ext>
             </a:extLst>
           </p:cNvPr>
@@ -18687,7 +18687,7 @@
           <p:cNvPr id="13" name="route-number-4">
             <a:extLst xmlns:a="http://schemas.openxmlformats.org/drawingml/2006/main">
               <a:ext uri="{FF2B5EF4-FFF2-40B4-BE49-F238E27FC236}">
-                <a16:creationId xmlns:a16="http://schemas.microsoft.com/office/drawing/2014/main" id="{3933D361-78A7-48FA-A80B-42ACAD3F2ECB}"/>
+                <a16:creationId xmlns:a16="http://schemas.microsoft.com/office/drawing/2014/main" id="{740CE673-5099-40AC-B413-0A9BF46B0414}"/>
               </a:ext>
             </a:extLst>
           </p:cNvPr>
@@ -18744,7 +18744,7 @@
           <p:cNvPr id="14" name="route-4">
             <a:extLst xmlns:a="http://schemas.openxmlformats.org/drawingml/2006/main">
               <a:ext uri="{FF2B5EF4-FFF2-40B4-BE49-F238E27FC236}">
-                <a16:creationId xmlns:a16="http://schemas.microsoft.com/office/drawing/2014/main" id="{324F9FEE-1C77-4B99-9531-464D04DDB1D5}"/>
+                <a16:creationId xmlns:a16="http://schemas.microsoft.com/office/drawing/2014/main" id="{A450318D-B025-41AD-911E-C567CD426873}"/>
               </a:ext>
             </a:extLst>
           </p:cNvPr>
@@ -18801,7 +18801,7 @@
           <p:cNvPr id="15" name="route-number-5">
             <a:extLst xmlns:a="http://schemas.openxmlformats.org/drawingml/2006/main">
               <a:ext uri="{FF2B5EF4-FFF2-40B4-BE49-F238E27FC236}">
-                <a16:creationId xmlns:a16="http://schemas.microsoft.com/office/drawing/2014/main" id="{27C0C2F0-D544-47B4-8BEA-270565A9B4F2}"/>
+                <a16:creationId xmlns:a16="http://schemas.microsoft.com/office/drawing/2014/main" id="{9061419A-7C2A-4AF5-8D94-3A915FB1F662}"/>
               </a:ext>
             </a:extLst>
           </p:cNvPr>
@@ -18858,7 +18858,7 @@
           <p:cNvPr id="16" name="route-5">
             <a:extLst xmlns:a="http://schemas.openxmlformats.org/drawingml/2006/main">
               <a:ext uri="{FF2B5EF4-FFF2-40B4-BE49-F238E27FC236}">
-                <a16:creationId xmlns:a16="http://schemas.microsoft.com/office/drawing/2014/main" id="{11D3CB0D-1BCB-4BD4-BFC9-EB3EA48944A6}"/>
+                <a16:creationId xmlns:a16="http://schemas.microsoft.com/office/drawing/2014/main" id="{B5E0938B-C626-4BE7-BADB-2711737AFED8}"/>
               </a:ext>
             </a:extLst>
           </p:cNvPr>
@@ -18915,7 +18915,7 @@
           <p:cNvPr id="17" name="route-number-6">
             <a:extLst xmlns:a="http://schemas.openxmlformats.org/drawingml/2006/main">
               <a:ext uri="{FF2B5EF4-FFF2-40B4-BE49-F238E27FC236}">
-                <a16:creationId xmlns:a16="http://schemas.microsoft.com/office/drawing/2014/main" id="{B7269991-1783-48C3-B9C6-65DF030E49BB}"/>
+                <a16:creationId xmlns:a16="http://schemas.microsoft.com/office/drawing/2014/main" id="{691515E3-95B9-45F6-9FD8-D143CB7CBD9B}"/>
               </a:ext>
             </a:extLst>
           </p:cNvPr>
@@ -18972,7 +18972,7 @@
           <p:cNvPr id="18" name="route-6">
             <a:extLst xmlns:a="http://schemas.openxmlformats.org/drawingml/2006/main">
               <a:ext uri="{FF2B5EF4-FFF2-40B4-BE49-F238E27FC236}">
-                <a16:creationId xmlns:a16="http://schemas.microsoft.com/office/drawing/2014/main" id="{F2232122-128C-4D90-8928-8CBEBC5772AE}"/>
+                <a16:creationId xmlns:a16="http://schemas.microsoft.com/office/drawing/2014/main" id="{5540D0D9-3541-406D-ADAA-4A98E3513365}"/>
               </a:ext>
             </a:extLst>
           </p:cNvPr>
@@ -19029,7 +19029,7 @@
           <p:cNvPr id="19" name="route-number-7">
             <a:extLst xmlns:a="http://schemas.openxmlformats.org/drawingml/2006/main">
               <a:ext uri="{FF2B5EF4-FFF2-40B4-BE49-F238E27FC236}">
-                <a16:creationId xmlns:a16="http://schemas.microsoft.com/office/drawing/2014/main" id="{AD0FC54D-A0D5-4F33-9973-F3A6B96BA7EE}"/>
+                <a16:creationId xmlns:a16="http://schemas.microsoft.com/office/drawing/2014/main" id="{A39F3754-C0BF-4B6A-A217-71EF9EDF1E96}"/>
               </a:ext>
             </a:extLst>
           </p:cNvPr>
@@ -19086,7 +19086,7 @@
           <p:cNvPr id="20" name="route-7">
             <a:extLst xmlns:a="http://schemas.openxmlformats.org/drawingml/2006/main">
               <a:ext uri="{FF2B5EF4-FFF2-40B4-BE49-F238E27FC236}">
-                <a16:creationId xmlns:a16="http://schemas.microsoft.com/office/drawing/2014/main" id="{DC63B0AE-F1F6-4994-B6FE-05CFCBFFFC84}"/>
+                <a16:creationId xmlns:a16="http://schemas.microsoft.com/office/drawing/2014/main" id="{A4C06CD1-1E7E-45D5-92F6-94BD5EEFED15}"/>
               </a:ext>
             </a:extLst>
           </p:cNvPr>
@@ -19143,7 +19143,7 @@
           <p:cNvPr id="21" name="Lesdoelen">
             <a:extLst xmlns:a="http://schemas.openxmlformats.org/drawingml/2006/main">
               <a:ext uri="{FF2B5EF4-FFF2-40B4-BE49-F238E27FC236}">
-                <a16:creationId xmlns:a16="http://schemas.microsoft.com/office/drawing/2014/main" id="{E2B0D23E-AD68-40D3-B177-32E7FF781392}"/>
+                <a16:creationId xmlns:a16="http://schemas.microsoft.com/office/drawing/2014/main" id="{BA643199-B6F0-42BC-B7BF-8632EAE30F83}"/>
               </a:ext>
             </a:extLst>
           </p:cNvPr>
@@ -19200,7 +19200,7 @@
           <p:cNvPr id="22" name="overview-goals">
             <a:extLst xmlns:a="http://schemas.openxmlformats.org/drawingml/2006/main">
               <a:ext uri="{FF2B5EF4-FFF2-40B4-BE49-F238E27FC236}">
-                <a16:creationId xmlns:a16="http://schemas.microsoft.com/office/drawing/2014/main" id="{F4121752-C742-411E-A46E-582FDC3AA523}"/>
+                <a16:creationId xmlns:a16="http://schemas.microsoft.com/office/drawing/2014/main" id="{438DFEAC-411D-463C-B48B-C84DEC05A1C1}"/>
               </a:ext>
             </a:extLst>
           </p:cNvPr>
@@ -19303,7 +19303,7 @@
           <p:cNvPr id="23" name="">
             <a:extLst xmlns:a="http://schemas.openxmlformats.org/drawingml/2006/main">
               <a:ext uri="{FF2B5EF4-FFF2-40B4-BE49-F238E27FC236}">
-                <a16:creationId xmlns:a16="http://schemas.microsoft.com/office/drawing/2014/main" id="{A6FA0F11-54D6-498E-A680-520B8D25A58D}"/>
+                <a16:creationId xmlns:a16="http://schemas.microsoft.com/office/drawing/2014/main" id="{BB07EAF9-7A48-4818-9E79-67DC379CBBC5}"/>
               </a:ext>
             </a:extLst>
           </p:cNvPr>
@@ -19332,7 +19332,7 @@
           <p:cNvPr id="24" name="Startopdracht">
             <a:extLst xmlns:a="http://schemas.openxmlformats.org/drawingml/2006/main">
               <a:ext uri="{FF2B5EF4-FFF2-40B4-BE49-F238E27FC236}">
-                <a16:creationId xmlns:a16="http://schemas.microsoft.com/office/drawing/2014/main" id="{B480F47B-94B4-423F-9082-D86585FF0945}"/>
+                <a16:creationId xmlns:a16="http://schemas.microsoft.com/office/drawing/2014/main" id="{C673A2CD-81FA-4ECE-AFDB-686DE89D033B}"/>
               </a:ext>
             </a:extLst>
           </p:cNvPr>
@@ -19389,7 +19389,7 @@
           <p:cNvPr id="25" name="overview-start">
             <a:extLst xmlns:a="http://schemas.openxmlformats.org/drawingml/2006/main">
               <a:ext uri="{FF2B5EF4-FFF2-40B4-BE49-F238E27FC236}">
-                <a16:creationId xmlns:a16="http://schemas.microsoft.com/office/drawing/2014/main" id="{0D55D81F-FA4F-489D-9B8E-87053ADB0B20}"/>
+                <a16:creationId xmlns:a16="http://schemas.microsoft.com/office/drawing/2014/main" id="{E51238C5-2E6F-4D13-8EC4-E6DF10646917}"/>
               </a:ext>
             </a:extLst>
           </p:cNvPr>
@@ -19436,7 +19436,7 @@
                 <a:ea typeface="Arial"/>
                 <a:cs typeface="Arial"/>
               </a:rPr>
-              <a:t>Pagina 64</a:t>
+              <a:t>Pagina 65</a:t>
             </a:r>
           </a:p>
           <a:p xmlns:a="http://schemas.openxmlformats.org/drawingml/2006/main">
@@ -19469,7 +19469,7 @@
           <p:cNvPr id="26" name="">
             <a:extLst xmlns:a="http://schemas.openxmlformats.org/drawingml/2006/main">
               <a:ext uri="{FF2B5EF4-FFF2-40B4-BE49-F238E27FC236}">
-                <a16:creationId xmlns:a16="http://schemas.microsoft.com/office/drawing/2014/main" id="{8BC6824A-C511-475C-9BD3-56F273824712}"/>
+                <a16:creationId xmlns:a16="http://schemas.microsoft.com/office/drawing/2014/main" id="{68F8AE9B-773E-4ADB-88DD-2840AE95520E}"/>
               </a:ext>
             </a:extLst>
           </p:cNvPr>
@@ -19498,7 +19498,7 @@
           <p:cNvPr id="27" name="Huiswerk">
             <a:extLst xmlns:a="http://schemas.openxmlformats.org/drawingml/2006/main">
               <a:ext uri="{FF2B5EF4-FFF2-40B4-BE49-F238E27FC236}">
-                <a16:creationId xmlns:a16="http://schemas.microsoft.com/office/drawing/2014/main" id="{1FD61913-28D6-471E-A385-754D7542CD9A}"/>
+                <a16:creationId xmlns:a16="http://schemas.microsoft.com/office/drawing/2014/main" id="{25DD053E-D55D-42E7-84A1-A84CAFDF992E}"/>
               </a:ext>
             </a:extLst>
           </p:cNvPr>
@@ -19555,7 +19555,7 @@
           <p:cNvPr id="28" name="overview-homework">
             <a:extLst xmlns:a="http://schemas.openxmlformats.org/drawingml/2006/main">
               <a:ext uri="{FF2B5EF4-FFF2-40B4-BE49-F238E27FC236}">
-                <a16:creationId xmlns:a16="http://schemas.microsoft.com/office/drawing/2014/main" id="{AE0FB3CC-EB1E-44BA-904B-C800F4151700}"/>
+                <a16:creationId xmlns:a16="http://schemas.microsoft.com/office/drawing/2014/main" id="{D184983C-BFFD-4A54-BF24-1851004288C4}"/>
               </a:ext>
             </a:extLst>
           </p:cNvPr>
@@ -19702,7 +19702,7 @@
     </p:spTree>
     <p:extLst>
       <p:ext uri="{BB962C8B-B14F-4D97-AF65-F5344CB8AC3E}">
-        <p14:creationId xmlns:p14="http://schemas.microsoft.com/office/powerpoint/2010/main" val="608448297"/>
+        <p14:creationId xmlns:p14="http://schemas.microsoft.com/office/powerpoint/2010/main" val="366531211"/>
       </p:ext>
     </p:extLst>
   </p:cSld>
@@ -19733,7 +19733,7 @@
           <p:cNvPr id="10" name="Opgave 5 · StreamPlus">
             <a:extLst xmlns:a="http://schemas.openxmlformats.org/drawingml/2006/main">
               <a:ext uri="{FF2B5EF4-FFF2-40B4-BE49-F238E27FC236}">
-                <a16:creationId xmlns:a16="http://schemas.microsoft.com/office/drawing/2014/main" id="{447EA41D-6C06-488B-85C4-073A301A0F06}"/>
+                <a16:creationId xmlns:a16="http://schemas.microsoft.com/office/drawing/2014/main" id="{896823B2-295E-4D8A-9272-1D8C5B60581A}"/>
               </a:ext>
             </a:extLst>
           </p:cNvPr>
@@ -19790,7 +19790,7 @@
           <p:cNvPr id="2" name="">
             <a:extLst xmlns:a="http://schemas.openxmlformats.org/drawingml/2006/main">
               <a:ext uri="{FF2B5EF4-FFF2-40B4-BE49-F238E27FC236}">
-                <a16:creationId xmlns:a16="http://schemas.microsoft.com/office/drawing/2014/main" id="{BC6E7220-66DE-4C72-8029-646820675F19}"/>
+                <a16:creationId xmlns:a16="http://schemas.microsoft.com/office/drawing/2014/main" id="{4CDD0BA4-66B1-44C2-B7C0-DC7552491C1B}"/>
               </a:ext>
             </a:extLst>
           </p:cNvPr>
@@ -19819,7 +19819,7 @@
           <p:cNvPr id="3" name="footer">
             <a:extLst xmlns:a="http://schemas.openxmlformats.org/drawingml/2006/main">
               <a:ext uri="{FF2B5EF4-FFF2-40B4-BE49-F238E27FC236}">
-                <a16:creationId xmlns:a16="http://schemas.microsoft.com/office/drawing/2014/main" id="{4429DBCE-6E91-46F1-9B60-7689B928BDBC}"/>
+                <a16:creationId xmlns:a16="http://schemas.microsoft.com/office/drawing/2014/main" id="{EE560790-B4E4-4D41-848F-9994C53C6CC0}"/>
               </a:ext>
             </a:extLst>
           </p:cNvPr>
@@ -19866,7 +19866,7 @@
                 <a:ea typeface="Arial"/>
                 <a:cs typeface="Arial"/>
               </a:rPr>
-              <a:t>§2.2.4 Gemengde opgaven · Opgave 5 · Boekpagina 66–67</a:t>
+              <a:t>§2.2.4 Gemengde opgaven · Opgave 5 · Boekpagina 67–68</a:t>
             </a:r>
           </a:p>
         </p:txBody>
@@ -19876,7 +19876,7 @@
           <p:cNvPr id="4" name="slide-number">
             <a:extLst xmlns:a="http://schemas.openxmlformats.org/drawingml/2006/main">
               <a:ext uri="{FF2B5EF4-FFF2-40B4-BE49-F238E27FC236}">
-                <a16:creationId xmlns:a16="http://schemas.microsoft.com/office/drawing/2014/main" id="{90F8E601-B033-4A1F-A1E1-B5C3C3E29BAA}"/>
+                <a16:creationId xmlns:a16="http://schemas.microsoft.com/office/drawing/2014/main" id="{3E48A069-1284-4A28-91C3-F7EF33F1BDFB}"/>
               </a:ext>
             </a:extLst>
           </p:cNvPr>
@@ -19933,7 +19933,7 @@
           <p:cNvPr id="5" name="StreamPlus onderzoekt één recente prijsverhoging en mogelijk">
             <a:extLst xmlns:a="http://schemas.openxmlformats.org/drawingml/2006/main">
               <a:ext uri="{FF2B5EF4-FFF2-40B4-BE49-F238E27FC236}">
-                <a16:creationId xmlns:a16="http://schemas.microsoft.com/office/drawing/2014/main" id="{B715F3E5-4810-4BDC-9440-EB6DD3686301}"/>
+                <a16:creationId xmlns:a16="http://schemas.microsoft.com/office/drawing/2014/main" id="{DB985AF6-263B-49BF-B3E0-51E7D658D331}"/>
               </a:ext>
             </a:extLst>
           </p:cNvPr>
@@ -19990,7 +19990,7 @@
           <p:cNvPr id="6" name="Vragen 1–5: gebruik telkens alleen de aangegeven bron.&#10;Vraag">
             <a:extLst xmlns:a="http://schemas.openxmlformats.org/drawingml/2006/main">
               <a:ext uri="{FF2B5EF4-FFF2-40B4-BE49-F238E27FC236}">
-                <a16:creationId xmlns:a16="http://schemas.microsoft.com/office/drawing/2014/main" id="{C2ADC363-0B8D-4F1E-BE6E-87037D700FA5}"/>
+                <a16:creationId xmlns:a16="http://schemas.microsoft.com/office/drawing/2014/main" id="{77B9E247-D0F5-413A-975B-0F0FE4BADD29}"/>
               </a:ext>
             </a:extLst>
           </p:cNvPr>
@@ -20070,7 +20070,7 @@
           <p:cNvPr id="7" name="Bron A · Standaardabonnement">
             <a:extLst xmlns:a="http://schemas.openxmlformats.org/drawingml/2006/main">
               <a:ext uri="{FF2B5EF4-FFF2-40B4-BE49-F238E27FC236}">
-                <a16:creationId xmlns:a16="http://schemas.microsoft.com/office/drawing/2014/main" id="{13F2CCD7-615A-40B1-BA53-24887512D56A}"/>
+                <a16:creationId xmlns:a16="http://schemas.microsoft.com/office/drawing/2014/main" id="{12A6AFA1-06C5-4A58-8E48-06FA74CC6F7D}"/>
               </a:ext>
             </a:extLst>
           </p:cNvPr>
@@ -20446,7 +20446,7 @@
           <p:cNvPr id="9" name="Gegeven: Ev = −0,7 · Prijzen per maand per abonnement · TO p">
             <a:extLst xmlns:a="http://schemas.openxmlformats.org/drawingml/2006/main">
               <a:ext uri="{FF2B5EF4-FFF2-40B4-BE49-F238E27FC236}">
-                <a16:creationId xmlns:a16="http://schemas.microsoft.com/office/drawing/2014/main" id="{D417A1CC-0132-4CFC-983C-1AA6B775A067}"/>
+                <a16:creationId xmlns:a16="http://schemas.microsoft.com/office/drawing/2014/main" id="{1A549AD7-2568-430D-B23A-C01F65410F3C}"/>
               </a:ext>
             </a:extLst>
           </p:cNvPr>
@@ -20501,7 +20501,7 @@
     </p:spTree>
     <p:extLst>
       <p:ext uri="{BB962C8B-B14F-4D97-AF65-F5344CB8AC3E}">
-        <p14:creationId xmlns:p14="http://schemas.microsoft.com/office/powerpoint/2010/main" val="1573342022"/>
+        <p14:creationId xmlns:p14="http://schemas.microsoft.com/office/powerpoint/2010/main" val="1215589913"/>
       </p:ext>
     </p:extLst>
   </p:cSld>
@@ -20532,7 +20532,7 @@
           <p:cNvPr id="9" name="Opgave 5 · Bronnen B en C">
             <a:extLst xmlns:a="http://schemas.openxmlformats.org/drawingml/2006/main">
               <a:ext uri="{FF2B5EF4-FFF2-40B4-BE49-F238E27FC236}">
-                <a16:creationId xmlns:a16="http://schemas.microsoft.com/office/drawing/2014/main" id="{D3337EC4-6DFF-4D9A-A344-D8189C138C5C}"/>
+                <a16:creationId xmlns:a16="http://schemas.microsoft.com/office/drawing/2014/main" id="{BD274B59-1463-4B83-9935-E29351EFEBD5}"/>
               </a:ext>
             </a:extLst>
           </p:cNvPr>
@@ -20589,7 +20589,7 @@
           <p:cNvPr id="2" name="">
             <a:extLst xmlns:a="http://schemas.openxmlformats.org/drawingml/2006/main">
               <a:ext uri="{FF2B5EF4-FFF2-40B4-BE49-F238E27FC236}">
-                <a16:creationId xmlns:a16="http://schemas.microsoft.com/office/drawing/2014/main" id="{6AAD6DEE-505B-4E63-9566-20427E3EAF6A}"/>
+                <a16:creationId xmlns:a16="http://schemas.microsoft.com/office/drawing/2014/main" id="{63DBE380-DAF9-40BF-A031-D4FEA710A66A}"/>
               </a:ext>
             </a:extLst>
           </p:cNvPr>
@@ -20618,7 +20618,7 @@
           <p:cNvPr id="3" name="footer">
             <a:extLst xmlns:a="http://schemas.openxmlformats.org/drawingml/2006/main">
               <a:ext uri="{FF2B5EF4-FFF2-40B4-BE49-F238E27FC236}">
-                <a16:creationId xmlns:a16="http://schemas.microsoft.com/office/drawing/2014/main" id="{1C224847-AF17-4B3D-ADB6-205B0AB3D703}"/>
+                <a16:creationId xmlns:a16="http://schemas.microsoft.com/office/drawing/2014/main" id="{38D5FD2B-B26B-4302-86D6-220F18358097}"/>
               </a:ext>
             </a:extLst>
           </p:cNvPr>
@@ -20665,7 +20665,7 @@
                 <a:ea typeface="Arial"/>
                 <a:cs typeface="Arial"/>
               </a:rPr>
-              <a:t>§2.2.4 Gemengde opgaven · Opgave 5 · Boekpagina 66–67</a:t>
+              <a:t>§2.2.4 Gemengde opgaven · Opgave 5 · Boekpagina 67–68</a:t>
             </a:r>
           </a:p>
         </p:txBody>
@@ -20675,7 +20675,7 @@
           <p:cNvPr id="4" name="slide-number">
             <a:extLst xmlns:a="http://schemas.openxmlformats.org/drawingml/2006/main">
               <a:ext uri="{FF2B5EF4-FFF2-40B4-BE49-F238E27FC236}">
-                <a16:creationId xmlns:a16="http://schemas.microsoft.com/office/drawing/2014/main" id="{F7771011-46F5-4776-8CCD-F73CD2BEF221}"/>
+                <a16:creationId xmlns:a16="http://schemas.microsoft.com/office/drawing/2014/main" id="{B55DAB16-B46E-4B6F-9F5D-F36C32CBAFAC}"/>
               </a:ext>
             </a:extLst>
           </p:cNvPr>
@@ -20732,7 +20732,7 @@
           <p:cNvPr id="5" name="Bron B · Inkomen en gevraagde hoeveelheid">
             <a:extLst xmlns:a="http://schemas.openxmlformats.org/drawingml/2006/main">
               <a:ext uri="{FF2B5EF4-FFF2-40B4-BE49-F238E27FC236}">
-                <a16:creationId xmlns:a16="http://schemas.microsoft.com/office/drawing/2014/main" id="{FF2447D5-443C-4AD3-8576-EE4FDFC71693}"/>
+                <a16:creationId xmlns:a16="http://schemas.microsoft.com/office/drawing/2014/main" id="{D9962DF2-0074-4540-B83E-666FAC227423}"/>
               </a:ext>
             </a:extLst>
           </p:cNvPr>
@@ -21034,7 +21034,7 @@
           <p:cNvPr id="7" name="Bron C · Prijs van een concurrerend abonnement">
             <a:extLst xmlns:a="http://schemas.openxmlformats.org/drawingml/2006/main">
               <a:ext uri="{FF2B5EF4-FFF2-40B4-BE49-F238E27FC236}">
-                <a16:creationId xmlns:a16="http://schemas.microsoft.com/office/drawing/2014/main" id="{8D2FFB8C-F1C1-4848-B81B-5D7D0CAEB31C}"/>
+                <a16:creationId xmlns:a16="http://schemas.microsoft.com/office/drawing/2014/main" id="{B5674C76-CDE7-4304-8D42-3EDE9AA1CDD6}"/>
               </a:ext>
             </a:extLst>
           </p:cNvPr>
@@ -21334,7 +21334,7 @@
     </p:spTree>
     <p:extLst>
       <p:ext uri="{BB962C8B-B14F-4D97-AF65-F5344CB8AC3E}">
-        <p14:creationId xmlns:p14="http://schemas.microsoft.com/office/powerpoint/2010/main" val="1592284750"/>
+        <p14:creationId xmlns:p14="http://schemas.microsoft.com/office/powerpoint/2010/main" val="1908737879"/>
       </p:ext>
     </p:extLst>
   </p:cSld>
@@ -21365,7 +21365,7 @@
           <p:cNvPr id="9" name="Opgave 5 · Bron D">
             <a:extLst xmlns:a="http://schemas.openxmlformats.org/drawingml/2006/main">
               <a:ext uri="{FF2B5EF4-FFF2-40B4-BE49-F238E27FC236}">
-                <a16:creationId xmlns:a16="http://schemas.microsoft.com/office/drawing/2014/main" id="{EB2C81A3-B485-45B7-AE1B-67C9A9BF6DAE}"/>
+                <a16:creationId xmlns:a16="http://schemas.microsoft.com/office/drawing/2014/main" id="{35D00DA0-F0FE-4571-A353-148979F2EE0A}"/>
               </a:ext>
             </a:extLst>
           </p:cNvPr>
@@ -21422,7 +21422,7 @@
           <p:cNvPr id="2" name="">
             <a:extLst xmlns:a="http://schemas.openxmlformats.org/drawingml/2006/main">
               <a:ext uri="{FF2B5EF4-FFF2-40B4-BE49-F238E27FC236}">
-                <a16:creationId xmlns:a16="http://schemas.microsoft.com/office/drawing/2014/main" id="{0AC92FCE-AFC9-4950-B53C-20A8031EEF5E}"/>
+                <a16:creationId xmlns:a16="http://schemas.microsoft.com/office/drawing/2014/main" id="{9B57EA40-43C4-4106-9002-1157D2D28DDA}"/>
               </a:ext>
             </a:extLst>
           </p:cNvPr>
@@ -21451,7 +21451,7 @@
           <p:cNvPr id="3" name="footer">
             <a:extLst xmlns:a="http://schemas.openxmlformats.org/drawingml/2006/main">
               <a:ext uri="{FF2B5EF4-FFF2-40B4-BE49-F238E27FC236}">
-                <a16:creationId xmlns:a16="http://schemas.microsoft.com/office/drawing/2014/main" id="{17BF750A-C4F6-4EF0-BB97-7010B1776E92}"/>
+                <a16:creationId xmlns:a16="http://schemas.microsoft.com/office/drawing/2014/main" id="{07E5C0E1-1147-4632-8104-E6AE5AE28D02}"/>
               </a:ext>
             </a:extLst>
           </p:cNvPr>
@@ -21498,7 +21498,7 @@
                 <a:ea typeface="Arial"/>
                 <a:cs typeface="Arial"/>
               </a:rPr>
-              <a:t>§2.2.4 Gemengde opgaven · Opgave 5 · Boekpagina 66–67</a:t>
+              <a:t>§2.2.4 Gemengde opgaven · Opgave 5 · Boekpagina 67–68</a:t>
             </a:r>
           </a:p>
         </p:txBody>
@@ -21508,7 +21508,7 @@
           <p:cNvPr id="4" name="slide-number">
             <a:extLst xmlns:a="http://schemas.openxmlformats.org/drawingml/2006/main">
               <a:ext uri="{FF2B5EF4-FFF2-40B4-BE49-F238E27FC236}">
-                <a16:creationId xmlns:a16="http://schemas.microsoft.com/office/drawing/2014/main" id="{3C7386A2-8396-49B0-AEB7-98D31F5AB477}"/>
+                <a16:creationId xmlns:a16="http://schemas.microsoft.com/office/drawing/2014/main" id="{13F774B0-608D-4A8F-8CF7-2457FCBA7832}"/>
               </a:ext>
             </a:extLst>
           </p:cNvPr>
@@ -21565,7 +21565,7 @@
           <p:cNvPr id="5" name="Regionale vraagfunctie">
             <a:extLst xmlns:a="http://schemas.openxmlformats.org/drawingml/2006/main">
               <a:ext uri="{FF2B5EF4-FFF2-40B4-BE49-F238E27FC236}">
-                <a16:creationId xmlns:a16="http://schemas.microsoft.com/office/drawing/2014/main" id="{FF81D052-1B84-4E14-B426-3C4C83C037E5}"/>
+                <a16:creationId xmlns:a16="http://schemas.microsoft.com/office/drawing/2014/main" id="{DEFD631B-C9CE-4FDE-A840-A8C6D7360763}"/>
               </a:ext>
             </a:extLst>
           </p:cNvPr>
@@ -21622,7 +21622,7 @@
           <p:cNvPr id="6" name="Q = 12.000 − 400P + 0,1Y + 300Pc">
             <a:extLst xmlns:a="http://schemas.openxmlformats.org/drawingml/2006/main">
               <a:ext uri="{FF2B5EF4-FFF2-40B4-BE49-F238E27FC236}">
-                <a16:creationId xmlns:a16="http://schemas.microsoft.com/office/drawing/2014/main" id="{79DF5878-68B4-4CDE-AE64-84954278A86E}"/>
+                <a16:creationId xmlns:a16="http://schemas.microsoft.com/office/drawing/2014/main" id="{4BA037D3-6529-4A01-A672-DC8DD367FA3C}"/>
               </a:ext>
             </a:extLst>
           </p:cNvPr>
@@ -22072,7 +22072,7 @@
           <p:cNvPr id="8" name="Gebruik de gegevens uit D, niet het aantal uit A.">
             <a:extLst xmlns:a="http://schemas.openxmlformats.org/drawingml/2006/main">
               <a:ext uri="{FF2B5EF4-FFF2-40B4-BE49-F238E27FC236}">
-                <a16:creationId xmlns:a16="http://schemas.microsoft.com/office/drawing/2014/main" id="{4E09E45C-AB5C-433A-AC2B-C9DFE7B07753}"/>
+                <a16:creationId xmlns:a16="http://schemas.microsoft.com/office/drawing/2014/main" id="{1DBB1C1F-77D7-4611-B7B7-A4DA32B84384}"/>
               </a:ext>
             </a:extLst>
           </p:cNvPr>
@@ -22127,7 +22127,7 @@
     </p:spTree>
     <p:extLst>
       <p:ext uri="{BB962C8B-B14F-4D97-AF65-F5344CB8AC3E}">
-        <p14:creationId xmlns:p14="http://schemas.microsoft.com/office/powerpoint/2010/main" val="1613854149"/>
+        <p14:creationId xmlns:p14="http://schemas.microsoft.com/office/powerpoint/2010/main" val="1375177167"/>
       </p:ext>
     </p:extLst>
   </p:cSld>
